--- a/Poliedro Novos Negócios.pptx
+++ b/Poliedro Novos Negócios.pptx
@@ -378,7 +378,7 @@
             <a:pPr indent="0" algn="r">
               <a:buNone/>
             </a:pPr>
-            <a:fld id="{D26BF902-218F-45EE-A817-745FC5EAC915}" type="slidenum">
+            <a:fld id="{6D36E3E9-262A-41A4-8DA8-AA5D63564C5A}" type="slidenum">
               <a:rPr lang="pt-BR" sz="1400" b="0" u="none" strike="noStrike">
                 <a:solidFill>
                   <a:srgbClr val="000000"/>
@@ -436,7 +436,7 @@
         <p:spPr>
           <a:xfrm>
             <a:off x="685800" y="857160"/>
-            <a:ext cx="5486040" cy="2314080"/>
+            <a:ext cx="5485680" cy="2313720"/>
           </a:xfrm>
           <a:prstGeom prst="rect">
             <a:avLst/>
@@ -459,7 +459,7 @@
         <p:spPr>
           <a:xfrm>
             <a:off x="685800" y="3300480"/>
-            <a:ext cx="5486040" cy="2700000"/>
+            <a:ext cx="5485680" cy="2699640"/>
           </a:xfrm>
           <a:prstGeom prst="rect">
             <a:avLst/>
@@ -477,7 +477,7 @@
             <a:pPr indent="0" algn="l">
               <a:buNone/>
             </a:pPr>
-            <a:endParaRPr lang="pt-BR" sz="1100" b="0" u="none" strike="noStrike">
+            <a:endParaRPr lang="pt-BR" sz="1800" b="0" u="none" strike="noStrike">
               <a:solidFill>
                 <a:srgbClr val="000000"/>
               </a:solidFill>
@@ -501,7 +501,7 @@
         <p:spPr>
           <a:xfrm>
             <a:off x="3884760" y="6513840"/>
-            <a:ext cx="2971440" cy="343800"/>
+            <a:ext cx="2971080" cy="343440"/>
           </a:xfrm>
           <a:prstGeom prst="rect">
             <a:avLst/>
@@ -545,7 +545,7 @@
                 <a:tab pos="0" algn="l"/>
               </a:tabLst>
             </a:pPr>
-            <a:fld id="{CABC8D8E-C3DD-4802-8877-B773C430966D}" type="slidenum">
+            <a:fld id="{BC9DB30E-C9BD-485C-BF6E-8EDC3251E8C2}" type="slidenum">
               <a:rPr lang="pt-BR" sz="1400" b="0" u="none" strike="noStrike">
                 <a:solidFill>
                   <a:srgbClr val="000000"/>
@@ -555,7 +555,7 @@
                 <a:latin typeface="Arial"/>
                 <a:ea typeface="Arial"/>
               </a:rPr>
-              <a:t>1</a:t>
+              <a:t>&lt;número&gt;</a:t>
             </a:fld>
             <a:endParaRPr lang="pt-BR" sz="1400" b="0" u="none" strike="noStrike">
               <a:solidFill>
@@ -603,7 +603,7 @@
         <p:spPr>
           <a:xfrm>
             <a:off x="685800" y="857160"/>
-            <a:ext cx="5486040" cy="2314080"/>
+            <a:ext cx="5485680" cy="2313720"/>
           </a:xfrm>
           <a:prstGeom prst="rect">
             <a:avLst/>
@@ -626,7 +626,7 @@
         <p:spPr>
           <a:xfrm>
             <a:off x="685800" y="3300480"/>
-            <a:ext cx="5486040" cy="2700000"/>
+            <a:ext cx="5485680" cy="2699640"/>
           </a:xfrm>
           <a:prstGeom prst="rect">
             <a:avLst/>
@@ -644,7 +644,7 @@
             <a:pPr indent="0" algn="l">
               <a:buNone/>
             </a:pPr>
-            <a:endParaRPr lang="pt-BR" sz="1100" b="0" u="none" strike="noStrike">
+            <a:endParaRPr lang="pt-BR" sz="1800" b="0" u="none" strike="noStrike">
               <a:solidFill>
                 <a:srgbClr val="000000"/>
               </a:solidFill>
@@ -668,7 +668,7 @@
         <p:spPr>
           <a:xfrm>
             <a:off x="3884760" y="6513840"/>
-            <a:ext cx="2971440" cy="343800"/>
+            <a:ext cx="2971080" cy="343440"/>
           </a:xfrm>
           <a:prstGeom prst="rect">
             <a:avLst/>
@@ -712,7 +712,7 @@
                 <a:tab pos="0" algn="l"/>
               </a:tabLst>
             </a:pPr>
-            <a:fld id="{80CA4516-B133-451A-B0A3-15B4D2E142D7}" type="slidenum">
+            <a:fld id="{C0AC1C4B-EF1B-422F-8B0E-6F834F7B93FA}" type="slidenum">
               <a:rPr lang="pt-BR" sz="1400" b="0" u="none" strike="noStrike">
                 <a:solidFill>
                   <a:srgbClr val="000000"/>
@@ -770,7 +770,7 @@
         <p:spPr>
           <a:xfrm>
             <a:off x="685800" y="857160"/>
-            <a:ext cx="5486040" cy="2314080"/>
+            <a:ext cx="5485680" cy="2313720"/>
           </a:xfrm>
           <a:prstGeom prst="rect">
             <a:avLst/>
@@ -793,7 +793,7 @@
         <p:spPr>
           <a:xfrm>
             <a:off x="685800" y="3300480"/>
-            <a:ext cx="5486040" cy="2700000"/>
+            <a:ext cx="5485680" cy="2699640"/>
           </a:xfrm>
           <a:prstGeom prst="rect">
             <a:avLst/>
@@ -811,7 +811,7 @@
             <a:pPr indent="0" algn="l">
               <a:buNone/>
             </a:pPr>
-            <a:endParaRPr lang="pt-BR" sz="1100" b="0" u="none" strike="noStrike">
+            <a:endParaRPr lang="pt-BR" sz="1800" b="0" u="none" strike="noStrike">
               <a:solidFill>
                 <a:srgbClr val="000000"/>
               </a:solidFill>
@@ -835,7 +835,7 @@
         <p:spPr>
           <a:xfrm>
             <a:off x="3884760" y="6513840"/>
-            <a:ext cx="2971440" cy="343800"/>
+            <a:ext cx="2971080" cy="343440"/>
           </a:xfrm>
           <a:prstGeom prst="rect">
             <a:avLst/>
@@ -879,7 +879,7 @@
                 <a:tab pos="0" algn="l"/>
               </a:tabLst>
             </a:pPr>
-            <a:fld id="{7E434939-92ED-4F71-8B49-EA615B8050C1}" type="slidenum">
+            <a:fld id="{81E224FC-AD9D-4D23-86E3-87B3D5B2F290}" type="slidenum">
               <a:rPr lang="pt-BR" sz="1400" b="0" u="none" strike="noStrike">
                 <a:solidFill>
                   <a:srgbClr val="000000"/>
@@ -937,7 +937,7 @@
         <p:spPr>
           <a:xfrm>
             <a:off x="685800" y="857160"/>
-            <a:ext cx="5486040" cy="2314080"/>
+            <a:ext cx="5485680" cy="2313720"/>
           </a:xfrm>
           <a:prstGeom prst="rect">
             <a:avLst/>
@@ -960,7 +960,7 @@
         <p:spPr>
           <a:xfrm>
             <a:off x="685800" y="3300480"/>
-            <a:ext cx="5486040" cy="2700000"/>
+            <a:ext cx="5485680" cy="2699640"/>
           </a:xfrm>
           <a:prstGeom prst="rect">
             <a:avLst/>
@@ -978,7 +978,7 @@
             <a:pPr indent="0" algn="l">
               <a:buNone/>
             </a:pPr>
-            <a:endParaRPr lang="pt-BR" sz="1100" b="0" u="none" strike="noStrike">
+            <a:endParaRPr lang="pt-BR" sz="1800" b="0" u="none" strike="noStrike">
               <a:solidFill>
                 <a:srgbClr val="000000"/>
               </a:solidFill>
@@ -1002,7 +1002,7 @@
         <p:spPr>
           <a:xfrm>
             <a:off x="3884760" y="6513840"/>
-            <a:ext cx="2971440" cy="343800"/>
+            <a:ext cx="2971080" cy="343440"/>
           </a:xfrm>
           <a:prstGeom prst="rect">
             <a:avLst/>
@@ -1046,7 +1046,7 @@
                 <a:tab pos="0" algn="l"/>
               </a:tabLst>
             </a:pPr>
-            <a:fld id="{6BAEB2DA-938B-44B5-8146-E6C575553672}" type="slidenum">
+            <a:fld id="{2389198C-1B26-4707-A3C8-6812BB9488C3}" type="slidenum">
               <a:rPr lang="pt-BR" sz="1400" b="0" u="none" strike="noStrike">
                 <a:solidFill>
                   <a:srgbClr val="000000"/>
@@ -1104,7 +1104,7 @@
         <p:spPr>
           <a:xfrm>
             <a:off x="685800" y="857160"/>
-            <a:ext cx="5486040" cy="2314080"/>
+            <a:ext cx="5485680" cy="2313720"/>
           </a:xfrm>
           <a:prstGeom prst="rect">
             <a:avLst/>
@@ -1127,7 +1127,7 @@
         <p:spPr>
           <a:xfrm>
             <a:off x="685800" y="3300480"/>
-            <a:ext cx="5486040" cy="2700000"/>
+            <a:ext cx="5485680" cy="2699640"/>
           </a:xfrm>
           <a:prstGeom prst="rect">
             <a:avLst/>
@@ -1145,7 +1145,7 @@
             <a:pPr indent="0" algn="l">
               <a:buNone/>
             </a:pPr>
-            <a:endParaRPr lang="pt-BR" sz="1100" b="0" u="none" strike="noStrike">
+            <a:endParaRPr lang="pt-BR" sz="1800" b="0" u="none" strike="noStrike">
               <a:solidFill>
                 <a:srgbClr val="000000"/>
               </a:solidFill>
@@ -1169,7 +1169,7 @@
         <p:spPr>
           <a:xfrm>
             <a:off x="3884760" y="6513840"/>
-            <a:ext cx="2971440" cy="343800"/>
+            <a:ext cx="2971080" cy="343440"/>
           </a:xfrm>
           <a:prstGeom prst="rect">
             <a:avLst/>
@@ -1213,7 +1213,7 @@
                 <a:tab pos="0" algn="l"/>
               </a:tabLst>
             </a:pPr>
-            <a:fld id="{19A2D201-EEBD-4DDA-87A7-4D07E515397C}" type="slidenum">
+            <a:fld id="{EFC99DE2-A6A6-4D97-83E3-3789742877FB}" type="slidenum">
               <a:rPr lang="pt-BR" sz="1400" b="0" u="none" strike="noStrike">
                 <a:solidFill>
                   <a:srgbClr val="000000"/>
@@ -1271,7 +1271,7 @@
         <p:spPr>
           <a:xfrm>
             <a:off x="685800" y="857160"/>
-            <a:ext cx="5486040" cy="2314080"/>
+            <a:ext cx="5485680" cy="2313720"/>
           </a:xfrm>
           <a:prstGeom prst="rect">
             <a:avLst/>
@@ -1294,7 +1294,7 @@
         <p:spPr>
           <a:xfrm>
             <a:off x="685800" y="3300480"/>
-            <a:ext cx="5486040" cy="2700000"/>
+            <a:ext cx="5485680" cy="2699640"/>
           </a:xfrm>
           <a:prstGeom prst="rect">
             <a:avLst/>
@@ -1312,7 +1312,7 @@
             <a:pPr indent="0" algn="l">
               <a:buNone/>
             </a:pPr>
-            <a:endParaRPr lang="pt-BR" sz="1100" b="0" u="none" strike="noStrike">
+            <a:endParaRPr lang="pt-BR" sz="1800" b="0" u="none" strike="noStrike">
               <a:solidFill>
                 <a:srgbClr val="000000"/>
               </a:solidFill>
@@ -1336,7 +1336,7 @@
         <p:spPr>
           <a:xfrm>
             <a:off x="3884760" y="6513840"/>
-            <a:ext cx="2971440" cy="343800"/>
+            <a:ext cx="2971080" cy="343440"/>
           </a:xfrm>
           <a:prstGeom prst="rect">
             <a:avLst/>
@@ -1380,7 +1380,7 @@
                 <a:tab pos="0" algn="l"/>
               </a:tabLst>
             </a:pPr>
-            <a:fld id="{B7456D64-049C-4521-9E37-B3617845297E}" type="slidenum">
+            <a:fld id="{B4BD415B-6A38-44E3-BF0A-2B3640357645}" type="slidenum">
               <a:rPr lang="pt-BR" sz="1400" b="0" u="none" strike="noStrike">
                 <a:solidFill>
                   <a:srgbClr val="000000"/>
@@ -1438,7 +1438,7 @@
         <p:spPr>
           <a:xfrm>
             <a:off x="685800" y="857160"/>
-            <a:ext cx="5486040" cy="2314080"/>
+            <a:ext cx="5485680" cy="2313720"/>
           </a:xfrm>
           <a:prstGeom prst="rect">
             <a:avLst/>
@@ -1461,7 +1461,7 @@
         <p:spPr>
           <a:xfrm>
             <a:off x="685800" y="3300480"/>
-            <a:ext cx="5486040" cy="2700000"/>
+            <a:ext cx="5485680" cy="2699640"/>
           </a:xfrm>
           <a:prstGeom prst="rect">
             <a:avLst/>
@@ -1479,7 +1479,7 @@
             <a:pPr indent="0" algn="l">
               <a:buNone/>
             </a:pPr>
-            <a:endParaRPr lang="pt-BR" sz="1100" b="0" u="none" strike="noStrike">
+            <a:endParaRPr lang="pt-BR" sz="1800" b="0" u="none" strike="noStrike">
               <a:solidFill>
                 <a:srgbClr val="000000"/>
               </a:solidFill>
@@ -1503,7 +1503,7 @@
         <p:spPr>
           <a:xfrm>
             <a:off x="3884760" y="6513840"/>
-            <a:ext cx="2971440" cy="343800"/>
+            <a:ext cx="2971080" cy="343440"/>
           </a:xfrm>
           <a:prstGeom prst="rect">
             <a:avLst/>
@@ -1547,7 +1547,7 @@
                 <a:tab pos="0" algn="l"/>
               </a:tabLst>
             </a:pPr>
-            <a:fld id="{9617DACF-F1F6-41D4-A1C9-B0BF5B1C6868}" type="slidenum">
+            <a:fld id="{4F819727-825B-48E6-A287-BD8EEA9BA300}" type="slidenum">
               <a:rPr lang="pt-BR" sz="1400" b="0" u="none" strike="noStrike">
                 <a:solidFill>
                   <a:srgbClr val="000000"/>
@@ -1605,7 +1605,7 @@
         <p:spPr>
           <a:xfrm>
             <a:off x="685800" y="857160"/>
-            <a:ext cx="5486040" cy="2314080"/>
+            <a:ext cx="5485680" cy="2313720"/>
           </a:xfrm>
           <a:prstGeom prst="rect">
             <a:avLst/>
@@ -1628,7 +1628,7 @@
         <p:spPr>
           <a:xfrm>
             <a:off x="685800" y="3300480"/>
-            <a:ext cx="5486040" cy="2700000"/>
+            <a:ext cx="5485680" cy="2699640"/>
           </a:xfrm>
           <a:prstGeom prst="rect">
             <a:avLst/>
@@ -1646,7 +1646,7 @@
             <a:pPr indent="0" algn="l">
               <a:buNone/>
             </a:pPr>
-            <a:endParaRPr lang="pt-BR" sz="1100" b="0" u="none" strike="noStrike">
+            <a:endParaRPr lang="pt-BR" sz="1800" b="0" u="none" strike="noStrike">
               <a:solidFill>
                 <a:srgbClr val="000000"/>
               </a:solidFill>
@@ -1670,7 +1670,7 @@
         <p:spPr>
           <a:xfrm>
             <a:off x="3884760" y="6513840"/>
-            <a:ext cx="2971440" cy="343800"/>
+            <a:ext cx="2971080" cy="343440"/>
           </a:xfrm>
           <a:prstGeom prst="rect">
             <a:avLst/>
@@ -1714,7 +1714,7 @@
                 <a:tab pos="0" algn="l"/>
               </a:tabLst>
             </a:pPr>
-            <a:fld id="{75D7D0B5-5DAE-4DFB-A30E-2A049E1A456D}" type="slidenum">
+            <a:fld id="{B88F7EBE-5B62-4C33-93E0-9048B98EEBC3}" type="slidenum">
               <a:rPr lang="pt-BR" sz="1400" b="0" u="none" strike="noStrike">
                 <a:solidFill>
                   <a:srgbClr val="000000"/>
@@ -1772,7 +1772,7 @@
         <p:spPr>
           <a:xfrm>
             <a:off x="685800" y="857160"/>
-            <a:ext cx="5486040" cy="2314080"/>
+            <a:ext cx="5485680" cy="2313720"/>
           </a:xfrm>
           <a:prstGeom prst="rect">
             <a:avLst/>
@@ -1795,7 +1795,7 @@
         <p:spPr>
           <a:xfrm>
             <a:off x="685800" y="3300480"/>
-            <a:ext cx="5486040" cy="2700000"/>
+            <a:ext cx="5485680" cy="2699640"/>
           </a:xfrm>
           <a:prstGeom prst="rect">
             <a:avLst/>
@@ -1813,7 +1813,7 @@
             <a:pPr indent="0" algn="l">
               <a:buNone/>
             </a:pPr>
-            <a:endParaRPr lang="pt-BR" sz="1100" b="0" u="none" strike="noStrike">
+            <a:endParaRPr lang="pt-BR" sz="1800" b="0" u="none" strike="noStrike">
               <a:solidFill>
                 <a:srgbClr val="000000"/>
               </a:solidFill>
@@ -1837,7 +1837,7 @@
         <p:spPr>
           <a:xfrm>
             <a:off x="3884760" y="6513840"/>
-            <a:ext cx="2971440" cy="343800"/>
+            <a:ext cx="2971080" cy="343440"/>
           </a:xfrm>
           <a:prstGeom prst="rect">
             <a:avLst/>
@@ -1881,7 +1881,7 @@
                 <a:tab pos="0" algn="l"/>
               </a:tabLst>
             </a:pPr>
-            <a:fld id="{70231667-0645-4330-99CD-5836AE3FC023}" type="slidenum">
+            <a:fld id="{EFD54353-0CC8-40ED-ABC7-6F2F7E3B31FD}" type="slidenum">
               <a:rPr lang="pt-BR" sz="1400" b="0" u="none" strike="noStrike">
                 <a:solidFill>
                   <a:srgbClr val="000000"/>
@@ -1939,7 +1939,7 @@
         <p:spPr>
           <a:xfrm>
             <a:off x="685800" y="857160"/>
-            <a:ext cx="5486040" cy="2314080"/>
+            <a:ext cx="5485680" cy="2313720"/>
           </a:xfrm>
           <a:prstGeom prst="rect">
             <a:avLst/>
@@ -1962,7 +1962,7 @@
         <p:spPr>
           <a:xfrm>
             <a:off x="685800" y="3300480"/>
-            <a:ext cx="5486040" cy="2700000"/>
+            <a:ext cx="5485680" cy="2699640"/>
           </a:xfrm>
           <a:prstGeom prst="rect">
             <a:avLst/>
@@ -1980,7 +1980,7 @@
             <a:pPr indent="0" algn="l">
               <a:buNone/>
             </a:pPr>
-            <a:endParaRPr lang="pt-BR" sz="1100" b="0" u="none" strike="noStrike">
+            <a:endParaRPr lang="pt-BR" sz="1800" b="0" u="none" strike="noStrike">
               <a:solidFill>
                 <a:srgbClr val="000000"/>
               </a:solidFill>
@@ -2004,7 +2004,7 @@
         <p:spPr>
           <a:xfrm>
             <a:off x="3884760" y="6513840"/>
-            <a:ext cx="2971440" cy="343800"/>
+            <a:ext cx="2971080" cy="343440"/>
           </a:xfrm>
           <a:prstGeom prst="rect">
             <a:avLst/>
@@ -2048,7 +2048,7 @@
                 <a:tab pos="0" algn="l"/>
               </a:tabLst>
             </a:pPr>
-            <a:fld id="{6E23B2DB-747E-4D60-9FB4-017664D37F6A}" type="slidenum">
+            <a:fld id="{84CB20C1-839F-4857-9734-32CFDCF256E3}" type="slidenum">
               <a:rPr lang="pt-BR" sz="1400" b="0" u="none" strike="noStrike">
                 <a:solidFill>
                   <a:srgbClr val="000000"/>
@@ -2106,7 +2106,7 @@
         <p:spPr>
           <a:xfrm>
             <a:off x="685800" y="857160"/>
-            <a:ext cx="5486040" cy="2314080"/>
+            <a:ext cx="5485680" cy="2313720"/>
           </a:xfrm>
           <a:prstGeom prst="rect">
             <a:avLst/>
@@ -2129,7 +2129,7 @@
         <p:spPr>
           <a:xfrm>
             <a:off x="685800" y="3300480"/>
-            <a:ext cx="5486040" cy="2700000"/>
+            <a:ext cx="5485680" cy="2699640"/>
           </a:xfrm>
           <a:prstGeom prst="rect">
             <a:avLst/>
@@ -2147,7 +2147,7 @@
             <a:pPr indent="0" algn="l">
               <a:buNone/>
             </a:pPr>
-            <a:endParaRPr lang="pt-BR" sz="1100" b="0" u="none" strike="noStrike">
+            <a:endParaRPr lang="pt-BR" sz="1800" b="0" u="none" strike="noStrike">
               <a:solidFill>
                 <a:srgbClr val="000000"/>
               </a:solidFill>
@@ -2171,7 +2171,7 @@
         <p:spPr>
           <a:xfrm>
             <a:off x="3884760" y="6513840"/>
-            <a:ext cx="2971440" cy="343800"/>
+            <a:ext cx="2971080" cy="343440"/>
           </a:xfrm>
           <a:prstGeom prst="rect">
             <a:avLst/>
@@ -2215,7 +2215,7 @@
                 <a:tab pos="0" algn="l"/>
               </a:tabLst>
             </a:pPr>
-            <a:fld id="{851D744B-D81C-40B4-B3F2-D1484819D424}" type="slidenum">
+            <a:fld id="{25E29A63-E7D0-4A78-AF53-9FCFC64BE221}" type="slidenum">
               <a:rPr lang="pt-BR" sz="1400" b="0" u="none" strike="noStrike">
                 <a:solidFill>
                   <a:srgbClr val="000000"/>
@@ -2273,7 +2273,7 @@
         <p:spPr>
           <a:xfrm>
             <a:off x="685800" y="857160"/>
-            <a:ext cx="5486040" cy="2314080"/>
+            <a:ext cx="5485680" cy="2313720"/>
           </a:xfrm>
           <a:prstGeom prst="rect">
             <a:avLst/>
@@ -2296,7 +2296,7 @@
         <p:spPr>
           <a:xfrm>
             <a:off x="685800" y="3300480"/>
-            <a:ext cx="5486040" cy="2700000"/>
+            <a:ext cx="5485680" cy="2699640"/>
           </a:xfrm>
           <a:prstGeom prst="rect">
             <a:avLst/>
@@ -2314,7 +2314,7 @@
             <a:pPr indent="0" algn="l">
               <a:buNone/>
             </a:pPr>
-            <a:endParaRPr lang="pt-BR" sz="1100" b="0" u="none" strike="noStrike">
+            <a:endParaRPr lang="pt-BR" sz="1800" b="0" u="none" strike="noStrike">
               <a:solidFill>
                 <a:srgbClr val="000000"/>
               </a:solidFill>
@@ -2338,7 +2338,7 @@
         <p:spPr>
           <a:xfrm>
             <a:off x="3884760" y="6513840"/>
-            <a:ext cx="2971440" cy="343800"/>
+            <a:ext cx="2971080" cy="343440"/>
           </a:xfrm>
           <a:prstGeom prst="rect">
             <a:avLst/>
@@ -2382,7 +2382,7 @@
                 <a:tab pos="0" algn="l"/>
               </a:tabLst>
             </a:pPr>
-            <a:fld id="{F25780D3-9077-4F9D-84FC-EB2792B14BEB}" type="slidenum">
+            <a:fld id="{CF87D913-1B9F-46D0-AC90-CF2A18305009}" type="slidenum">
               <a:rPr lang="pt-BR" sz="1400" b="0" u="none" strike="noStrike">
                 <a:solidFill>
                   <a:srgbClr val="000000"/>
@@ -2440,7 +2440,7 @@
         <p:spPr>
           <a:xfrm>
             <a:off x="685800" y="857160"/>
-            <a:ext cx="5486040" cy="2314080"/>
+            <a:ext cx="5485680" cy="2313720"/>
           </a:xfrm>
           <a:prstGeom prst="rect">
             <a:avLst/>
@@ -2463,7 +2463,7 @@
         <p:spPr>
           <a:xfrm>
             <a:off x="685800" y="3300480"/>
-            <a:ext cx="5486040" cy="2700000"/>
+            <a:ext cx="5485680" cy="2699640"/>
           </a:xfrm>
           <a:prstGeom prst="rect">
             <a:avLst/>
@@ -2481,7 +2481,7 @@
             <a:pPr indent="0" algn="l">
               <a:buNone/>
             </a:pPr>
-            <a:endParaRPr lang="pt-BR" sz="1100" b="0" u="none" strike="noStrike">
+            <a:endParaRPr lang="pt-BR" sz="1800" b="0" u="none" strike="noStrike">
               <a:solidFill>
                 <a:srgbClr val="000000"/>
               </a:solidFill>
@@ -2505,7 +2505,7 @@
         <p:spPr>
           <a:xfrm>
             <a:off x="3884760" y="6513840"/>
-            <a:ext cx="2971440" cy="343800"/>
+            <a:ext cx="2971080" cy="343440"/>
           </a:xfrm>
           <a:prstGeom prst="rect">
             <a:avLst/>
@@ -2549,7 +2549,7 @@
                 <a:tab pos="0" algn="l"/>
               </a:tabLst>
             </a:pPr>
-            <a:fld id="{CB05E844-139B-4A81-A2B7-5AE2C4A46B9D}" type="slidenum">
+            <a:fld id="{57C35D62-6E9F-4B5A-A65A-E427936C804D}" type="slidenum">
               <a:rPr lang="pt-BR" sz="1400" b="0" u="none" strike="noStrike">
                 <a:solidFill>
                   <a:srgbClr val="000000"/>
@@ -2607,7 +2607,7 @@
         <p:spPr>
           <a:xfrm>
             <a:off x="685800" y="857160"/>
-            <a:ext cx="5486040" cy="2314080"/>
+            <a:ext cx="5485680" cy="2313720"/>
           </a:xfrm>
           <a:prstGeom prst="rect">
             <a:avLst/>
@@ -2630,7 +2630,7 @@
         <p:spPr>
           <a:xfrm>
             <a:off x="685800" y="3300480"/>
-            <a:ext cx="5486040" cy="2700000"/>
+            <a:ext cx="5485680" cy="2699640"/>
           </a:xfrm>
           <a:prstGeom prst="rect">
             <a:avLst/>
@@ -2648,7 +2648,7 @@
             <a:pPr indent="0" algn="l">
               <a:buNone/>
             </a:pPr>
-            <a:endParaRPr lang="pt-BR" sz="1100" b="0" u="none" strike="noStrike">
+            <a:endParaRPr lang="pt-BR" sz="1800" b="0" u="none" strike="noStrike">
               <a:solidFill>
                 <a:srgbClr val="000000"/>
               </a:solidFill>
@@ -2672,7 +2672,7 @@
         <p:spPr>
           <a:xfrm>
             <a:off x="3884760" y="6513840"/>
-            <a:ext cx="2971440" cy="343800"/>
+            <a:ext cx="2971080" cy="343440"/>
           </a:xfrm>
           <a:prstGeom prst="rect">
             <a:avLst/>
@@ -2716,7 +2716,7 @@
                 <a:tab pos="0" algn="l"/>
               </a:tabLst>
             </a:pPr>
-            <a:fld id="{192832DB-E198-45E4-924F-3E5BC6EF56CD}" type="slidenum">
+            <a:fld id="{57B91205-49A2-400B-9491-B727DE9B946D}" type="slidenum">
               <a:rPr lang="pt-BR" sz="1400" b="0" u="none" strike="noStrike">
                 <a:solidFill>
                   <a:srgbClr val="000000"/>
@@ -2745,8 +2745,8 @@
 </file>
 
 <file path=ppt/slideLayouts/slideLayout1.xml><?xml version="1.0" encoding="utf-8"?>
-<p:sldLayout xmlns:a="http://schemas.openxmlformats.org/drawingml/2006/main" xmlns:p="http://schemas.openxmlformats.org/presentationml/2006/main" xmlns:r="http://schemas.openxmlformats.org/officeDocument/2006/relationships" xmlns:p14="http://schemas.microsoft.com/office/powerpoint/2010/main" xmlns:p15="http://schemas.microsoft.com/office/powerpoint/2012/main" xmlns:mc="http://schemas.openxmlformats.org/markup-compatibility/2006" type="title" preserve="1">
-  <p:cSld name="TITLE">
+<p:sldLayout xmlns:a="http://schemas.openxmlformats.org/drawingml/2006/main" xmlns:p="http://schemas.openxmlformats.org/presentationml/2006/main" xmlns:r="http://schemas.openxmlformats.org/officeDocument/2006/relationships" xmlns:p14="http://schemas.microsoft.com/office/powerpoint/2010/main" xmlns:p15="http://schemas.microsoft.com/office/powerpoint/2012/main" xmlns:mc="http://schemas.openxmlformats.org/markup-compatibility/2006" type="blank" preserve="1">
+  <p:cSld name="MAIN_POINT">
     <p:bg>
       <p:bgPr>
         <a:solidFill>
@@ -2780,8 +2780,8 @@
         </p:nvSpPr>
         <p:spPr>
           <a:xfrm>
-            <a:off x="311760" y="744480"/>
-            <a:ext cx="8520120" cy="2052360"/>
+            <a:off x="490320" y="450000"/>
+            <a:ext cx="6366960" cy="4089960"/>
           </a:xfrm>
           <a:prstGeom prst="rect">
             <a:avLst/>
@@ -2792,13 +2792,19 @@
           </a:ln>
         </p:spPr>
         <p:txBody>
-          <a:bodyPr lIns="91440" tIns="91440" rIns="91440" bIns="91440" anchor="b">
+          <a:bodyPr lIns="91440" tIns="91440" rIns="91440" bIns="91440" anchor="ctr">
             <a:normAutofit/>
           </a:bodyPr>
           <a:lstStyle>
             <a:lvl1pPr indent="0" algn="l">
+              <a:lnSpc>
+                <a:spcPct val="100000"/>
+              </a:lnSpc>
               <a:buNone/>
-              <a:defRPr lang="pt-BR" sz="5200" b="0" u="none" strike="noStrike">
+              <a:tabLst>
+                <a:tab pos="0" algn="l"/>
+              </a:tabLst>
+              <a:defRPr lang="pt-BR" sz="4800" b="0" u="none" strike="noStrike">
                 <a:solidFill>
                   <a:srgbClr val="000000"/>
                 </a:solidFill>
@@ -2810,10 +2816,16 @@
           </a:lstStyle>
           <a:p>
             <a:pPr indent="0" algn="l">
+              <a:lnSpc>
+                <a:spcPct val="100000"/>
+              </a:lnSpc>
               <a:buNone/>
-            </a:pPr>
-            <a:r>
-              <a:rPr lang="pt-BR" sz="5200" b="0" u="none" strike="noStrike">
+              <a:tabLst>
+                <a:tab pos="0" algn="l"/>
+              </a:tabLst>
+            </a:pPr>
+            <a:r>
+              <a:rPr lang="pt-BR" sz="4800" b="0" u="none" strike="noStrike">
                 <a:solidFill>
                   <a:srgbClr val="000000"/>
                 </a:solidFill>
@@ -2823,7 +2835,7 @@
               </a:rPr>
               <a:t>Clique para editar o formato do texto do título</a:t>
             </a:r>
-            <a:endParaRPr lang="pt-BR" sz="5200" b="0" u="none" strike="noStrike">
+            <a:endParaRPr lang="pt-BR" sz="4800" b="0" u="none" strike="noStrike">
               <a:solidFill>
                 <a:srgbClr val="000000"/>
               </a:solidFill>
@@ -2847,7 +2859,7 @@
         <p:spPr>
           <a:xfrm>
             <a:off x="8472600" y="4663080"/>
-            <a:ext cx="548280" cy="393120"/>
+            <a:ext cx="547920" cy="392760"/>
           </a:xfrm>
           <a:prstGeom prst="rect">
             <a:avLst/>
@@ -2891,7 +2903,7 @@
                 <a:tab pos="0" algn="l"/>
               </a:tabLst>
             </a:pPr>
-            <a:fld id="{D8E6553E-155D-437D-B1C5-B24C332D7F4D}" type="slidenum">
+            <a:fld id="{539728CC-56D0-4211-9374-E793579AF645}" type="slidenum">
               <a:rPr lang="pt-BR" sz="1000" b="0" u="none" strike="noStrike">
                 <a:solidFill>
                   <a:schemeClr val="dk2"/>
@@ -2920,8 +2932,8 @@
 </file>
 
 <file path=ppt/slideLayouts/slideLayout10.xml><?xml version="1.0" encoding="utf-8"?>
-<p:sldLayout xmlns:a="http://schemas.openxmlformats.org/drawingml/2006/main" xmlns:p="http://schemas.openxmlformats.org/presentationml/2006/main" xmlns:r="http://schemas.openxmlformats.org/officeDocument/2006/relationships" xmlns:p14="http://schemas.microsoft.com/office/powerpoint/2010/main" xmlns:p15="http://schemas.microsoft.com/office/powerpoint/2012/main" xmlns:mc="http://schemas.openxmlformats.org/markup-compatibility/2006" type="blank" preserve="1">
-  <p:cSld name="SECTION_TITLE_AND_DESCRIPTION">
+<p:sldLayout xmlns:a="http://schemas.openxmlformats.org/drawingml/2006/main" xmlns:p="http://schemas.openxmlformats.org/presentationml/2006/main" xmlns:r="http://schemas.openxmlformats.org/officeDocument/2006/relationships" xmlns:p14="http://schemas.microsoft.com/office/powerpoint/2010/main" xmlns:p15="http://schemas.microsoft.com/office/powerpoint/2012/main" xmlns:mc="http://schemas.openxmlformats.org/markup-compatibility/2006" type="titleOnly" preserve="1">
+  <p:cSld name="TITLE_ONLY">
     <p:bg>
       <p:bgPr>
         <a:solidFill>
@@ -2945,49 +2957,6 @@
       </p:grpSpPr>
       <p:sp>
         <p:nvSpPr>
-          <p:cNvPr id="24" name="Google Shape;36;p9"/>
-          <p:cNvSpPr/>
-          <p:nvPr/>
-        </p:nvSpPr>
-        <p:spPr>
-          <a:xfrm>
-            <a:off x="4572000" y="0"/>
-            <a:ext cx="4571640" cy="5143320"/>
-          </a:xfrm>
-          <a:prstGeom prst="rect">
-            <a:avLst/>
-          </a:prstGeom>
-          <a:solidFill>
-            <a:schemeClr val="lt2"/>
-          </a:solidFill>
-          <a:ln w="0">
-            <a:noFill/>
-          </a:ln>
-        </p:spPr>
-        <p:style>
-          <a:lnRef idx="0"/>
-          <a:fillRef idx="0"/>
-          <a:effectRef idx="0"/>
-          <a:fontRef idx="minor"/>
-        </p:style>
-        <p:txBody>
-          <a:bodyPr tIns="91440" bIns="91440" anchor="ctr">
-            <a:noAutofit/>
-          </a:bodyPr>
-          <a:p>
-            <a:endParaRPr lang="pt-BR" sz="1400" b="0" u="none" strike="noStrike">
-              <a:solidFill>
-                <a:srgbClr val="000000"/>
-              </a:solidFill>
-              <a:effectLst/>
-              <a:uFillTx/>
-              <a:latin typeface="Arial"/>
-            </a:endParaRPr>
-          </a:p>
-        </p:txBody>
-      </p:sp>
-      <p:sp>
-        <p:nvSpPr>
           <p:cNvPr id="25" name="PlaceHolder 1"/>
           <p:cNvSpPr>
             <a:spLocks noGrp="1"/>
@@ -2998,8 +2967,8 @@
         </p:nvSpPr>
         <p:spPr>
           <a:xfrm>
-            <a:off x="265680" y="1233000"/>
-            <a:ext cx="4044960" cy="1482120"/>
+            <a:off x="311760" y="444960"/>
+            <a:ext cx="8519760" cy="572040"/>
           </a:xfrm>
           <a:prstGeom prst="rect">
             <a:avLst/>
@@ -3010,13 +2979,19 @@
           </a:ln>
         </p:spPr>
         <p:txBody>
-          <a:bodyPr lIns="91440" tIns="91440" rIns="91440" bIns="91440" anchor="b">
-            <a:normAutofit fontScale="77500" lnSpcReduction="19999"/>
+          <a:bodyPr lIns="91440" tIns="91440" rIns="91440" bIns="91440" anchor="t">
+            <a:normAutofit lnSpcReduction="9999"/>
           </a:bodyPr>
           <a:lstStyle>
             <a:lvl1pPr indent="0" algn="l">
+              <a:lnSpc>
+                <a:spcPct val="100000"/>
+              </a:lnSpc>
               <a:buNone/>
-              <a:defRPr lang="pt-BR" sz="4200" b="0" u="none" strike="noStrike">
+              <a:tabLst>
+                <a:tab pos="0" algn="l"/>
+              </a:tabLst>
+              <a:defRPr lang="pt-BR" sz="2800" b="0" u="none" strike="noStrike">
                 <a:solidFill>
                   <a:srgbClr val="000000"/>
                 </a:solidFill>
@@ -3028,10 +3003,16 @@
           </a:lstStyle>
           <a:p>
             <a:pPr indent="0" algn="l">
+              <a:lnSpc>
+                <a:spcPct val="100000"/>
+              </a:lnSpc>
               <a:buNone/>
-            </a:pPr>
-            <a:r>
-              <a:rPr lang="pt-BR" sz="4200" b="0" u="none" strike="noStrike">
+              <a:tabLst>
+                <a:tab pos="0" algn="l"/>
+              </a:tabLst>
+            </a:pPr>
+            <a:r>
+              <a:rPr lang="pt-BR" sz="2800" b="0" u="none" strike="noStrike">
                 <a:solidFill>
                   <a:srgbClr val="000000"/>
                 </a:solidFill>
@@ -3041,7 +3022,7 @@
               </a:rPr>
               <a:t>Clique para editar o formato do texto do título</a:t>
             </a:r>
-            <a:endParaRPr lang="pt-BR" sz="4200" b="0" u="none" strike="noStrike">
+            <a:endParaRPr lang="pt-BR" sz="2800" b="0" u="none" strike="noStrike">
               <a:solidFill>
                 <a:srgbClr val="000000"/>
               </a:solidFill>
@@ -3055,394 +3036,6 @@
       <p:sp>
         <p:nvSpPr>
           <p:cNvPr id="26" name="PlaceHolder 2"/>
-          <p:cNvSpPr>
-            <a:spLocks noGrp="1"/>
-          </p:cNvSpPr>
-          <p:nvPr>
-            <p:ph type="body"/>
-          </p:nvPr>
-        </p:nvSpPr>
-        <p:spPr>
-          <a:xfrm>
-            <a:off x="4939560" y="723960"/>
-            <a:ext cx="3836520" cy="3694680"/>
-          </a:xfrm>
-          <a:prstGeom prst="rect">
-            <a:avLst/>
-          </a:prstGeom>
-          <a:noFill/>
-          <a:ln w="0">
-            <a:noFill/>
-          </a:ln>
-        </p:spPr>
-        <p:txBody>
-          <a:bodyPr lIns="91440" tIns="91440" rIns="91440" bIns="91440" anchor="ctr">
-            <a:normAutofit fontScale="85000" lnSpcReduction="9999"/>
-          </a:bodyPr>
-          <a:lstStyle>
-            <a:lvl1pPr algn="l">
-              <a:spcBef>
-                <a:spcPts val="1417"/>
-              </a:spcBef>
-              <a:buClr>
-                <a:srgbClr val="000000"/>
-              </a:buClr>
-              <a:buSzPct val="45000"/>
-              <a:buFont typeface="Wingdings" charset="2"/>
-              <a:buChar char=""/>
-              <a:defRPr lang="pt-BR" sz="1800" b="0" u="none" strike="noStrike">
-                <a:solidFill>
-                  <a:srgbClr val="000000"/>
-                </a:solidFill>
-                <a:effectLst/>
-                <a:uFillTx/>
-                <a:latin typeface="Arial"/>
-              </a:defRPr>
-            </a:lvl1pPr>
-            <a:lvl2pPr lvl="1" algn="l">
-              <a:spcBef>
-                <a:spcPts val="1134"/>
-              </a:spcBef>
-              <a:buClr>
-                <a:srgbClr val="000000"/>
-              </a:buClr>
-              <a:buSzPct val="75000"/>
-              <a:buFont typeface="Symbol" charset="2"/>
-              <a:buChar char=""/>
-              <a:defRPr lang="pt-BR" sz="1800" b="0" u="none" strike="noStrike">
-                <a:solidFill>
-                  <a:srgbClr val="000000"/>
-                </a:solidFill>
-                <a:effectLst/>
-                <a:uFillTx/>
-                <a:latin typeface="Arial"/>
-              </a:defRPr>
-            </a:lvl2pPr>
-            <a:lvl3pPr lvl="2" algn="l">
-              <a:spcBef>
-                <a:spcPts val="850"/>
-              </a:spcBef>
-              <a:buClr>
-                <a:srgbClr val="000000"/>
-              </a:buClr>
-              <a:buSzPct val="45000"/>
-              <a:buFont typeface="Wingdings" charset="2"/>
-              <a:buChar char=""/>
-              <a:defRPr lang="pt-BR" sz="1800" b="0" u="none" strike="noStrike">
-                <a:solidFill>
-                  <a:srgbClr val="000000"/>
-                </a:solidFill>
-                <a:effectLst/>
-                <a:uFillTx/>
-                <a:latin typeface="Arial"/>
-              </a:defRPr>
-            </a:lvl3pPr>
-            <a:lvl4pPr lvl="3" algn="l">
-              <a:spcBef>
-                <a:spcPts val="567"/>
-              </a:spcBef>
-              <a:buClr>
-                <a:srgbClr val="000000"/>
-              </a:buClr>
-              <a:buSzPct val="75000"/>
-              <a:buFont typeface="Symbol" charset="2"/>
-              <a:buChar char=""/>
-              <a:defRPr lang="pt-BR" sz="1800" b="0" u="none" strike="noStrike">
-                <a:solidFill>
-                  <a:srgbClr val="000000"/>
-                </a:solidFill>
-                <a:effectLst/>
-                <a:uFillTx/>
-                <a:latin typeface="Arial"/>
-              </a:defRPr>
-            </a:lvl4pPr>
-            <a:lvl5pPr lvl="4" algn="l">
-              <a:spcBef>
-                <a:spcPts val="283"/>
-              </a:spcBef>
-              <a:buClr>
-                <a:srgbClr val="000000"/>
-              </a:buClr>
-              <a:buSzPct val="45000"/>
-              <a:buFont typeface="Wingdings" charset="2"/>
-              <a:buChar char=""/>
-              <a:defRPr lang="pt-BR" sz="1800" b="0" u="none" strike="noStrike">
-                <a:solidFill>
-                  <a:srgbClr val="000000"/>
-                </a:solidFill>
-                <a:effectLst/>
-                <a:uFillTx/>
-                <a:latin typeface="Arial"/>
-              </a:defRPr>
-            </a:lvl5pPr>
-            <a:lvl6pPr lvl="5" algn="l">
-              <a:spcBef>
-                <a:spcPts val="283"/>
-              </a:spcBef>
-              <a:buClr>
-                <a:srgbClr val="000000"/>
-              </a:buClr>
-              <a:buSzPct val="45000"/>
-              <a:buFont typeface="Wingdings" charset="2"/>
-              <a:buChar char=""/>
-              <a:defRPr lang="pt-BR" sz="1800" b="0" u="none" strike="noStrike">
-                <a:solidFill>
-                  <a:srgbClr val="000000"/>
-                </a:solidFill>
-                <a:effectLst/>
-                <a:uFillTx/>
-                <a:latin typeface="Arial"/>
-              </a:defRPr>
-            </a:lvl6pPr>
-            <a:lvl7pPr lvl="6" algn="l">
-              <a:spcBef>
-                <a:spcPts val="283"/>
-              </a:spcBef>
-              <a:buClr>
-                <a:srgbClr val="000000"/>
-              </a:buClr>
-              <a:buSzPct val="45000"/>
-              <a:buFont typeface="Wingdings" charset="2"/>
-              <a:buChar char=""/>
-              <a:defRPr lang="pt-BR" sz="1800" b="0" u="none" strike="noStrike">
-                <a:solidFill>
-                  <a:srgbClr val="000000"/>
-                </a:solidFill>
-                <a:effectLst/>
-                <a:uFillTx/>
-                <a:latin typeface="Arial"/>
-              </a:defRPr>
-            </a:lvl7pPr>
-          </a:lstStyle>
-          <a:p>
-            <a:pPr marL="457200" indent="-343080" algn="l">
-              <a:spcBef>
-                <a:spcPts val="1417"/>
-              </a:spcBef>
-              <a:buClr>
-                <a:srgbClr val="000000"/>
-              </a:buClr>
-              <a:buSzPct val="45000"/>
-              <a:buFont typeface="Wingdings" charset="2"/>
-              <a:buChar char=""/>
-            </a:pPr>
-            <a:r>
-              <a:rPr lang="pt-BR" sz="1800" b="0" u="none" strike="noStrike">
-                <a:solidFill>
-                  <a:srgbClr val="000000"/>
-                </a:solidFill>
-                <a:effectLst/>
-                <a:uFillTx/>
-                <a:latin typeface="Arial"/>
-              </a:rPr>
-              <a:t>Clique para editar o formato de texto dos tópicos</a:t>
-            </a:r>
-            <a:endParaRPr lang="pt-BR" sz="1800" b="0" u="none" strike="noStrike">
-              <a:solidFill>
-                <a:srgbClr val="000000"/>
-              </a:solidFill>
-              <a:effectLst/>
-              <a:uFillTx/>
-              <a:latin typeface="Arial"/>
-            </a:endParaRPr>
-          </a:p>
-          <a:p>
-            <a:pPr marL="914400" lvl="1" indent="-317520" algn="l">
-              <a:spcBef>
-                <a:spcPts val="1134"/>
-              </a:spcBef>
-              <a:buClr>
-                <a:srgbClr val="000000"/>
-              </a:buClr>
-              <a:buSzPct val="75000"/>
-              <a:buFont typeface="Symbol" charset="2"/>
-              <a:buChar char=""/>
-            </a:pPr>
-            <a:r>
-              <a:rPr lang="pt-BR" sz="1800" b="0" u="none" strike="noStrike">
-                <a:solidFill>
-                  <a:srgbClr val="000000"/>
-                </a:solidFill>
-                <a:effectLst/>
-                <a:uFillTx/>
-                <a:latin typeface="Arial"/>
-              </a:rPr>
-              <a:t>2.º nível de tópicos</a:t>
-            </a:r>
-            <a:endParaRPr lang="pt-BR" sz="1800" b="0" u="none" strike="noStrike">
-              <a:solidFill>
-                <a:srgbClr val="000000"/>
-              </a:solidFill>
-              <a:effectLst/>
-              <a:uFillTx/>
-              <a:latin typeface="Arial"/>
-            </a:endParaRPr>
-          </a:p>
-          <a:p>
-            <a:pPr marL="1371600" lvl="2" indent="-317520" algn="l">
-              <a:spcBef>
-                <a:spcPts val="850"/>
-              </a:spcBef>
-              <a:buClr>
-                <a:srgbClr val="000000"/>
-              </a:buClr>
-              <a:buSzPct val="45000"/>
-              <a:buFont typeface="Wingdings" charset="2"/>
-              <a:buChar char=""/>
-            </a:pPr>
-            <a:r>
-              <a:rPr lang="pt-BR" sz="1800" b="0" u="none" strike="noStrike">
-                <a:solidFill>
-                  <a:srgbClr val="000000"/>
-                </a:solidFill>
-                <a:effectLst/>
-                <a:uFillTx/>
-                <a:latin typeface="Arial"/>
-              </a:rPr>
-              <a:t>3.º nível de tópicos</a:t>
-            </a:r>
-            <a:endParaRPr lang="pt-BR" sz="1800" b="0" u="none" strike="noStrike">
-              <a:solidFill>
-                <a:srgbClr val="000000"/>
-              </a:solidFill>
-              <a:effectLst/>
-              <a:uFillTx/>
-              <a:latin typeface="Arial"/>
-            </a:endParaRPr>
-          </a:p>
-          <a:p>
-            <a:pPr marL="1828800" lvl="3" indent="-317520" algn="l">
-              <a:spcBef>
-                <a:spcPts val="567"/>
-              </a:spcBef>
-              <a:buClr>
-                <a:srgbClr val="000000"/>
-              </a:buClr>
-              <a:buSzPct val="75000"/>
-              <a:buFont typeface="Symbol" charset="2"/>
-              <a:buChar char=""/>
-            </a:pPr>
-            <a:r>
-              <a:rPr lang="pt-BR" sz="1800" b="0" u="none" strike="noStrike">
-                <a:solidFill>
-                  <a:srgbClr val="000000"/>
-                </a:solidFill>
-                <a:effectLst/>
-                <a:uFillTx/>
-                <a:latin typeface="Arial"/>
-              </a:rPr>
-              <a:t>4.º nível de tópicos</a:t>
-            </a:r>
-            <a:endParaRPr lang="pt-BR" sz="1800" b="0" u="none" strike="noStrike">
-              <a:solidFill>
-                <a:srgbClr val="000000"/>
-              </a:solidFill>
-              <a:effectLst/>
-              <a:uFillTx/>
-              <a:latin typeface="Arial"/>
-            </a:endParaRPr>
-          </a:p>
-          <a:p>
-            <a:pPr marL="2286000" lvl="4" indent="-317520" algn="l">
-              <a:spcBef>
-                <a:spcPts val="283"/>
-              </a:spcBef>
-              <a:buClr>
-                <a:srgbClr val="000000"/>
-              </a:buClr>
-              <a:buSzPct val="45000"/>
-              <a:buFont typeface="Wingdings" charset="2"/>
-              <a:buChar char=""/>
-            </a:pPr>
-            <a:r>
-              <a:rPr lang="pt-BR" sz="1800" b="0" u="none" strike="noStrike">
-                <a:solidFill>
-                  <a:srgbClr val="000000"/>
-                </a:solidFill>
-                <a:effectLst/>
-                <a:uFillTx/>
-                <a:latin typeface="Arial"/>
-              </a:rPr>
-              <a:t>5.º nível de tópicos</a:t>
-            </a:r>
-            <a:endParaRPr lang="pt-BR" sz="1800" b="0" u="none" strike="noStrike">
-              <a:solidFill>
-                <a:srgbClr val="000000"/>
-              </a:solidFill>
-              <a:effectLst/>
-              <a:uFillTx/>
-              <a:latin typeface="Arial"/>
-            </a:endParaRPr>
-          </a:p>
-          <a:p>
-            <a:pPr marL="2743200" lvl="5" indent="-317520" algn="l">
-              <a:spcBef>
-                <a:spcPts val="283"/>
-              </a:spcBef>
-              <a:buClr>
-                <a:srgbClr val="000000"/>
-              </a:buClr>
-              <a:buSzPct val="45000"/>
-              <a:buFont typeface="Wingdings" charset="2"/>
-              <a:buChar char=""/>
-            </a:pPr>
-            <a:r>
-              <a:rPr lang="pt-BR" sz="1800" b="0" u="none" strike="noStrike">
-                <a:solidFill>
-                  <a:srgbClr val="000000"/>
-                </a:solidFill>
-                <a:effectLst/>
-                <a:uFillTx/>
-                <a:latin typeface="Arial"/>
-              </a:rPr>
-              <a:t>6.º nível de tópicos</a:t>
-            </a:r>
-            <a:endParaRPr lang="pt-BR" sz="1800" b="0" u="none" strike="noStrike">
-              <a:solidFill>
-                <a:srgbClr val="000000"/>
-              </a:solidFill>
-              <a:effectLst/>
-              <a:uFillTx/>
-              <a:latin typeface="Arial"/>
-            </a:endParaRPr>
-          </a:p>
-          <a:p>
-            <a:pPr marL="3200400" lvl="6" indent="-317520" algn="l">
-              <a:spcBef>
-                <a:spcPts val="283"/>
-              </a:spcBef>
-              <a:buClr>
-                <a:srgbClr val="000000"/>
-              </a:buClr>
-              <a:buSzPct val="45000"/>
-              <a:buFont typeface="Wingdings" charset="2"/>
-              <a:buChar char=""/>
-            </a:pPr>
-            <a:r>
-              <a:rPr lang="pt-BR" sz="1800" b="0" u="none" strike="noStrike">
-                <a:solidFill>
-                  <a:srgbClr val="000000"/>
-                </a:solidFill>
-                <a:effectLst/>
-                <a:uFillTx/>
-                <a:latin typeface="Arial"/>
-              </a:rPr>
-              <a:t>7.º nível de tópicos</a:t>
-            </a:r>
-            <a:endParaRPr lang="pt-BR" sz="1800" b="0" u="none" strike="noStrike">
-              <a:solidFill>
-                <a:srgbClr val="000000"/>
-              </a:solidFill>
-              <a:effectLst/>
-              <a:uFillTx/>
-              <a:latin typeface="Arial"/>
-            </a:endParaRPr>
-          </a:p>
-        </p:txBody>
-      </p:sp>
-      <p:sp>
-        <p:nvSpPr>
-          <p:cNvPr id="27" name="PlaceHolder 3"/>
           <p:cNvSpPr>
             <a:spLocks noGrp="1"/>
           </p:cNvSpPr>
@@ -3453,7 +3046,7 @@
         <p:spPr>
           <a:xfrm>
             <a:off x="8472600" y="4663080"/>
-            <a:ext cx="548280" cy="393120"/>
+            <a:ext cx="547920" cy="392760"/>
           </a:xfrm>
           <a:prstGeom prst="rect">
             <a:avLst/>
@@ -3497,7 +3090,7 @@
                 <a:tab pos="0" algn="l"/>
               </a:tabLst>
             </a:pPr>
-            <a:fld id="{93FC7AD2-13C1-43FD-9B10-1A975C3EA7E4}" type="slidenum">
+            <a:fld id="{C6DB6EF6-C37C-4A34-9625-7954EAAA256A}" type="slidenum">
               <a:rPr lang="pt-BR" sz="1000" b="0" u="none" strike="noStrike">
                 <a:solidFill>
                   <a:schemeClr val="dk2"/>
@@ -3527,7 +3120,7 @@
 
 <file path=ppt/slideLayouts/slideLayout11.xml><?xml version="1.0" encoding="utf-8"?>
 <p:sldLayout xmlns:a="http://schemas.openxmlformats.org/drawingml/2006/main" xmlns:p="http://schemas.openxmlformats.org/presentationml/2006/main" xmlns:r="http://schemas.openxmlformats.org/officeDocument/2006/relationships" xmlns:p14="http://schemas.microsoft.com/office/powerpoint/2010/main" xmlns:p15="http://schemas.microsoft.com/office/powerpoint/2012/main" xmlns:mc="http://schemas.openxmlformats.org/markup-compatibility/2006" type="blank" preserve="1">
-  <p:cSld name="CAPTION_ONLY">
+  <p:cSld name="ONE_COLUMN_TEXT">
     <p:bg>
       <p:bgPr>
         <a:solidFill>
@@ -3551,7 +3144,85 @@
       </p:grpSpPr>
       <p:sp>
         <p:nvSpPr>
-          <p:cNvPr id="28" name="PlaceHolder 1"/>
+          <p:cNvPr id="27" name="PlaceHolder 1"/>
+          <p:cNvSpPr>
+            <a:spLocks noGrp="1"/>
+          </p:cNvSpPr>
+          <p:nvPr>
+            <p:ph type="title"/>
+          </p:nvPr>
+        </p:nvSpPr>
+        <p:spPr>
+          <a:xfrm>
+            <a:off x="311760" y="555480"/>
+            <a:ext cx="2807280" cy="754920"/>
+          </a:xfrm>
+          <a:prstGeom prst="rect">
+            <a:avLst/>
+          </a:prstGeom>
+          <a:noFill/>
+          <a:ln w="0">
+            <a:noFill/>
+          </a:ln>
+        </p:spPr>
+        <p:txBody>
+          <a:bodyPr lIns="91440" tIns="91440" rIns="91440" bIns="91440" anchor="b">
+            <a:normAutofit fontScale="70000" lnSpcReduction="19999"/>
+          </a:bodyPr>
+          <a:lstStyle>
+            <a:lvl1pPr indent="0" algn="l">
+              <a:lnSpc>
+                <a:spcPct val="100000"/>
+              </a:lnSpc>
+              <a:buNone/>
+              <a:tabLst>
+                <a:tab pos="0" algn="l"/>
+              </a:tabLst>
+              <a:defRPr lang="pt-BR" sz="2400" b="0" u="none" strike="noStrike">
+                <a:solidFill>
+                  <a:srgbClr val="000000"/>
+                </a:solidFill>
+                <a:effectLst/>
+                <a:uFillTx/>
+                <a:latin typeface="Arial"/>
+              </a:defRPr>
+            </a:lvl1pPr>
+          </a:lstStyle>
+          <a:p>
+            <a:pPr indent="0" algn="l">
+              <a:lnSpc>
+                <a:spcPct val="100000"/>
+              </a:lnSpc>
+              <a:buNone/>
+              <a:tabLst>
+                <a:tab pos="0" algn="l"/>
+              </a:tabLst>
+            </a:pPr>
+            <a:r>
+              <a:rPr lang="pt-BR" sz="2400" b="0" u="none" strike="noStrike">
+                <a:solidFill>
+                  <a:srgbClr val="000000"/>
+                </a:solidFill>
+                <a:effectLst/>
+                <a:uFillTx/>
+                <a:latin typeface="Arial"/>
+              </a:rPr>
+              <a:t>Clique para editar o formato do texto do título</a:t>
+            </a:r>
+            <a:endParaRPr lang="pt-BR" sz="2400" b="0" u="none" strike="noStrike">
+              <a:solidFill>
+                <a:srgbClr val="000000"/>
+              </a:solidFill>
+              <a:effectLst/>
+              <a:uFillTx/>
+              <a:latin typeface="Arial"/>
+            </a:endParaRPr>
+          </a:p>
+        </p:txBody>
+      </p:sp>
+      <p:sp>
+        <p:nvSpPr>
+          <p:cNvPr id="28" name="PlaceHolder 2"/>
           <p:cNvSpPr>
             <a:spLocks noGrp="1"/>
           </p:cNvSpPr>
@@ -3561,8 +3232,8 @@
         </p:nvSpPr>
         <p:spPr>
           <a:xfrm>
-            <a:off x="311760" y="4230720"/>
-            <a:ext cx="5998320" cy="604800"/>
+            <a:off x="311760" y="1389600"/>
+            <a:ext cx="2807280" cy="3178800"/>
           </a:xfrm>
           <a:prstGeom prst="rect">
             <a:avLst/>
@@ -3573,11 +3244,14 @@
           </a:ln>
         </p:spPr>
         <p:txBody>
-          <a:bodyPr lIns="91440" tIns="91440" rIns="91440" bIns="91440" anchor="ctr">
-            <a:normAutofit fontScale="25000" lnSpcReduction="19999"/>
+          <a:bodyPr lIns="91440" tIns="91440" rIns="91440" bIns="91440" anchor="t">
+            <a:normAutofit fontScale="32500" lnSpcReduction="19999"/>
           </a:bodyPr>
           <a:lstStyle>
             <a:lvl1pPr algn="l">
+              <a:lnSpc>
+                <a:spcPct val="100000"/>
+              </a:lnSpc>
               <a:spcBef>
                 <a:spcPts val="1417"/>
               </a:spcBef>
@@ -3587,7 +3261,7 @@
               <a:buSzPct val="45000"/>
               <a:buFont typeface="Wingdings" charset="2"/>
               <a:buChar char=""/>
-              <a:defRPr lang="pt-BR" sz="1800" b="0" u="none" strike="noStrike">
+              <a:defRPr lang="pt-BR" sz="1200" b="0" u="none" strike="noStrike">
                 <a:solidFill>
                   <a:srgbClr val="000000"/>
                 </a:solidFill>
@@ -3597,6 +3271,9 @@
               </a:defRPr>
             </a:lvl1pPr>
             <a:lvl2pPr lvl="1" algn="l">
+              <a:lnSpc>
+                <a:spcPct val="100000"/>
+              </a:lnSpc>
               <a:spcBef>
                 <a:spcPts val="1134"/>
               </a:spcBef>
@@ -3606,7 +3283,7 @@
               <a:buSzPct val="75000"/>
               <a:buFont typeface="Symbol" charset="2"/>
               <a:buChar char=""/>
-              <a:defRPr lang="pt-BR" sz="1800" b="0" u="none" strike="noStrike">
+              <a:defRPr lang="pt-BR" sz="1200" b="0" u="none" strike="noStrike">
                 <a:solidFill>
                   <a:srgbClr val="000000"/>
                 </a:solidFill>
@@ -3616,6 +3293,9 @@
               </a:defRPr>
             </a:lvl2pPr>
             <a:lvl3pPr lvl="2" algn="l">
+              <a:lnSpc>
+                <a:spcPct val="100000"/>
+              </a:lnSpc>
               <a:spcBef>
                 <a:spcPts val="850"/>
               </a:spcBef>
@@ -3625,7 +3305,7 @@
               <a:buSzPct val="45000"/>
               <a:buFont typeface="Wingdings" charset="2"/>
               <a:buChar char=""/>
-              <a:defRPr lang="pt-BR" sz="1800" b="0" u="none" strike="noStrike">
+              <a:defRPr lang="pt-BR" sz="1200" b="0" u="none" strike="noStrike">
                 <a:solidFill>
                   <a:srgbClr val="000000"/>
                 </a:solidFill>
@@ -3635,6 +3315,9 @@
               </a:defRPr>
             </a:lvl3pPr>
             <a:lvl4pPr lvl="3" algn="l">
+              <a:lnSpc>
+                <a:spcPct val="100000"/>
+              </a:lnSpc>
               <a:spcBef>
                 <a:spcPts val="567"/>
               </a:spcBef>
@@ -3644,7 +3327,7 @@
               <a:buSzPct val="75000"/>
               <a:buFont typeface="Symbol" charset="2"/>
               <a:buChar char=""/>
-              <a:defRPr lang="pt-BR" sz="1800" b="0" u="none" strike="noStrike">
+              <a:defRPr lang="pt-BR" sz="1200" b="0" u="none" strike="noStrike">
                 <a:solidFill>
                   <a:srgbClr val="000000"/>
                 </a:solidFill>
@@ -3654,6 +3337,9 @@
               </a:defRPr>
             </a:lvl4pPr>
             <a:lvl5pPr lvl="4" algn="l">
+              <a:lnSpc>
+                <a:spcPct val="100000"/>
+              </a:lnSpc>
               <a:spcBef>
                 <a:spcPts val="283"/>
               </a:spcBef>
@@ -3663,7 +3349,7 @@
               <a:buSzPct val="45000"/>
               <a:buFont typeface="Wingdings" charset="2"/>
               <a:buChar char=""/>
-              <a:defRPr lang="pt-BR" sz="1800" b="0" u="none" strike="noStrike">
+              <a:defRPr lang="pt-BR" sz="1200" b="0" u="none" strike="noStrike">
                 <a:solidFill>
                   <a:srgbClr val="000000"/>
                 </a:solidFill>
@@ -3673,6 +3359,9 @@
               </a:defRPr>
             </a:lvl5pPr>
             <a:lvl6pPr lvl="5" algn="l">
+              <a:lnSpc>
+                <a:spcPct val="100000"/>
+              </a:lnSpc>
               <a:spcBef>
                 <a:spcPts val="283"/>
               </a:spcBef>
@@ -3682,7 +3371,7 @@
               <a:buSzPct val="45000"/>
               <a:buFont typeface="Wingdings" charset="2"/>
               <a:buChar char=""/>
-              <a:defRPr lang="pt-BR" sz="1800" b="0" u="none" strike="noStrike">
+              <a:defRPr lang="pt-BR" sz="1200" b="0" u="none" strike="noStrike">
                 <a:solidFill>
                   <a:srgbClr val="000000"/>
                 </a:solidFill>
@@ -3692,6 +3381,9 @@
               </a:defRPr>
             </a:lvl6pPr>
             <a:lvl7pPr lvl="6" algn="l">
+              <a:lnSpc>
+                <a:spcPct val="100000"/>
+              </a:lnSpc>
               <a:spcBef>
                 <a:spcPts val="283"/>
               </a:spcBef>
@@ -3701,7 +3393,7 @@
               <a:buSzPct val="45000"/>
               <a:buFont typeface="Wingdings" charset="2"/>
               <a:buChar char=""/>
-              <a:defRPr lang="pt-BR" sz="1800" b="0" u="none" strike="noStrike">
+              <a:defRPr lang="pt-BR" sz="1200" b="0" u="none" strike="noStrike">
                 <a:solidFill>
                   <a:srgbClr val="000000"/>
                 </a:solidFill>
@@ -3712,7 +3404,10 @@
             </a:lvl7pPr>
           </a:lstStyle>
           <a:p>
-            <a:pPr marL="457200" indent="-228600" algn="l">
+            <a:pPr marL="457200" indent="-304920" algn="l">
+              <a:lnSpc>
+                <a:spcPct val="100000"/>
+              </a:lnSpc>
               <a:spcBef>
                 <a:spcPts val="1417"/>
               </a:spcBef>
@@ -3724,7 +3419,7 @@
               <a:buChar char=""/>
             </a:pPr>
             <a:r>
-              <a:rPr lang="pt-BR" sz="1800" b="0" u="none" strike="noStrike">
+              <a:rPr lang="pt-BR" sz="1200" b="0" u="none" strike="noStrike">
                 <a:solidFill>
                   <a:srgbClr val="000000"/>
                 </a:solidFill>
@@ -3734,17 +3429,20 @@
               </a:rPr>
               <a:t>Clique para editar o formato de texto dos tópicos</a:t>
             </a:r>
-            <a:endParaRPr lang="pt-BR" sz="1800" b="0" u="none" strike="noStrike">
-              <a:solidFill>
-                <a:srgbClr val="000000"/>
-              </a:solidFill>
-              <a:effectLst/>
-              <a:uFillTx/>
-              <a:latin typeface="Arial"/>
-            </a:endParaRPr>
-          </a:p>
-          <a:p>
-            <a:pPr marL="914400" lvl="1" indent="-317520" algn="l">
+            <a:endParaRPr lang="pt-BR" sz="1200" b="0" u="none" strike="noStrike">
+              <a:solidFill>
+                <a:srgbClr val="000000"/>
+              </a:solidFill>
+              <a:effectLst/>
+              <a:uFillTx/>
+              <a:latin typeface="Arial"/>
+            </a:endParaRPr>
+          </a:p>
+          <a:p>
+            <a:pPr marL="914400" lvl="1" indent="-304920" algn="l">
+              <a:lnSpc>
+                <a:spcPct val="100000"/>
+              </a:lnSpc>
               <a:spcBef>
                 <a:spcPts val="1134"/>
               </a:spcBef>
@@ -3756,7 +3454,7 @@
               <a:buChar char=""/>
             </a:pPr>
             <a:r>
-              <a:rPr lang="pt-BR" sz="1800" b="0" u="none" strike="noStrike">
+              <a:rPr lang="pt-BR" sz="1200" b="0" u="none" strike="noStrike">
                 <a:solidFill>
                   <a:srgbClr val="000000"/>
                 </a:solidFill>
@@ -3766,17 +3464,20 @@
               </a:rPr>
               <a:t>2.º nível de tópicos</a:t>
             </a:r>
-            <a:endParaRPr lang="pt-BR" sz="1800" b="0" u="none" strike="noStrike">
-              <a:solidFill>
-                <a:srgbClr val="000000"/>
-              </a:solidFill>
-              <a:effectLst/>
-              <a:uFillTx/>
-              <a:latin typeface="Arial"/>
-            </a:endParaRPr>
-          </a:p>
-          <a:p>
-            <a:pPr marL="1371600" lvl="2" indent="-317520" algn="l">
+            <a:endParaRPr lang="pt-BR" sz="1200" b="0" u="none" strike="noStrike">
+              <a:solidFill>
+                <a:srgbClr val="000000"/>
+              </a:solidFill>
+              <a:effectLst/>
+              <a:uFillTx/>
+              <a:latin typeface="Arial"/>
+            </a:endParaRPr>
+          </a:p>
+          <a:p>
+            <a:pPr marL="1371600" lvl="2" indent="-304920" algn="l">
+              <a:lnSpc>
+                <a:spcPct val="100000"/>
+              </a:lnSpc>
               <a:spcBef>
                 <a:spcPts val="850"/>
               </a:spcBef>
@@ -3788,7 +3489,7 @@
               <a:buChar char=""/>
             </a:pPr>
             <a:r>
-              <a:rPr lang="pt-BR" sz="1800" b="0" u="none" strike="noStrike">
+              <a:rPr lang="pt-BR" sz="1200" b="0" u="none" strike="noStrike">
                 <a:solidFill>
                   <a:srgbClr val="000000"/>
                 </a:solidFill>
@@ -3798,17 +3499,20 @@
               </a:rPr>
               <a:t>3.º nível de tópicos</a:t>
             </a:r>
-            <a:endParaRPr lang="pt-BR" sz="1800" b="0" u="none" strike="noStrike">
-              <a:solidFill>
-                <a:srgbClr val="000000"/>
-              </a:solidFill>
-              <a:effectLst/>
-              <a:uFillTx/>
-              <a:latin typeface="Arial"/>
-            </a:endParaRPr>
-          </a:p>
-          <a:p>
-            <a:pPr marL="1828800" lvl="3" indent="-317520" algn="l">
+            <a:endParaRPr lang="pt-BR" sz="1200" b="0" u="none" strike="noStrike">
+              <a:solidFill>
+                <a:srgbClr val="000000"/>
+              </a:solidFill>
+              <a:effectLst/>
+              <a:uFillTx/>
+              <a:latin typeface="Arial"/>
+            </a:endParaRPr>
+          </a:p>
+          <a:p>
+            <a:pPr marL="1828800" lvl="3" indent="-304920" algn="l">
+              <a:lnSpc>
+                <a:spcPct val="100000"/>
+              </a:lnSpc>
               <a:spcBef>
                 <a:spcPts val="567"/>
               </a:spcBef>
@@ -3820,7 +3524,7 @@
               <a:buChar char=""/>
             </a:pPr>
             <a:r>
-              <a:rPr lang="pt-BR" sz="1800" b="0" u="none" strike="noStrike">
+              <a:rPr lang="pt-BR" sz="1200" b="0" u="none" strike="noStrike">
                 <a:solidFill>
                   <a:srgbClr val="000000"/>
                 </a:solidFill>
@@ -3830,17 +3534,20 @@
               </a:rPr>
               <a:t>4.º nível de tópicos</a:t>
             </a:r>
-            <a:endParaRPr lang="pt-BR" sz="1800" b="0" u="none" strike="noStrike">
-              <a:solidFill>
-                <a:srgbClr val="000000"/>
-              </a:solidFill>
-              <a:effectLst/>
-              <a:uFillTx/>
-              <a:latin typeface="Arial"/>
-            </a:endParaRPr>
-          </a:p>
-          <a:p>
-            <a:pPr marL="2286000" lvl="4" indent="-317520" algn="l">
+            <a:endParaRPr lang="pt-BR" sz="1200" b="0" u="none" strike="noStrike">
+              <a:solidFill>
+                <a:srgbClr val="000000"/>
+              </a:solidFill>
+              <a:effectLst/>
+              <a:uFillTx/>
+              <a:latin typeface="Arial"/>
+            </a:endParaRPr>
+          </a:p>
+          <a:p>
+            <a:pPr marL="2286000" lvl="4" indent="-304920" algn="l">
+              <a:lnSpc>
+                <a:spcPct val="100000"/>
+              </a:lnSpc>
               <a:spcBef>
                 <a:spcPts val="283"/>
               </a:spcBef>
@@ -3852,7 +3559,7 @@
               <a:buChar char=""/>
             </a:pPr>
             <a:r>
-              <a:rPr lang="pt-BR" sz="1800" b="0" u="none" strike="noStrike">
+              <a:rPr lang="pt-BR" sz="1200" b="0" u="none" strike="noStrike">
                 <a:solidFill>
                   <a:srgbClr val="000000"/>
                 </a:solidFill>
@@ -3862,17 +3569,20 @@
               </a:rPr>
               <a:t>5.º nível de tópicos</a:t>
             </a:r>
-            <a:endParaRPr lang="pt-BR" sz="1800" b="0" u="none" strike="noStrike">
-              <a:solidFill>
-                <a:srgbClr val="000000"/>
-              </a:solidFill>
-              <a:effectLst/>
-              <a:uFillTx/>
-              <a:latin typeface="Arial"/>
-            </a:endParaRPr>
-          </a:p>
-          <a:p>
-            <a:pPr marL="2743200" lvl="5" indent="-317520" algn="l">
+            <a:endParaRPr lang="pt-BR" sz="1200" b="0" u="none" strike="noStrike">
+              <a:solidFill>
+                <a:srgbClr val="000000"/>
+              </a:solidFill>
+              <a:effectLst/>
+              <a:uFillTx/>
+              <a:latin typeface="Arial"/>
+            </a:endParaRPr>
+          </a:p>
+          <a:p>
+            <a:pPr marL="2743200" lvl="5" indent="-304920" algn="l">
+              <a:lnSpc>
+                <a:spcPct val="100000"/>
+              </a:lnSpc>
               <a:spcBef>
                 <a:spcPts val="283"/>
               </a:spcBef>
@@ -3884,7 +3594,7 @@
               <a:buChar char=""/>
             </a:pPr>
             <a:r>
-              <a:rPr lang="pt-BR" sz="1800" b="0" u="none" strike="noStrike">
+              <a:rPr lang="pt-BR" sz="1200" b="0" u="none" strike="noStrike">
                 <a:solidFill>
                   <a:srgbClr val="000000"/>
                 </a:solidFill>
@@ -3894,17 +3604,20 @@
               </a:rPr>
               <a:t>6.º nível de tópicos</a:t>
             </a:r>
-            <a:endParaRPr lang="pt-BR" sz="1800" b="0" u="none" strike="noStrike">
-              <a:solidFill>
-                <a:srgbClr val="000000"/>
-              </a:solidFill>
-              <a:effectLst/>
-              <a:uFillTx/>
-              <a:latin typeface="Arial"/>
-            </a:endParaRPr>
-          </a:p>
-          <a:p>
-            <a:pPr marL="3200400" lvl="6" indent="-317520" algn="l">
+            <a:endParaRPr lang="pt-BR" sz="1200" b="0" u="none" strike="noStrike">
+              <a:solidFill>
+                <a:srgbClr val="000000"/>
+              </a:solidFill>
+              <a:effectLst/>
+              <a:uFillTx/>
+              <a:latin typeface="Arial"/>
+            </a:endParaRPr>
+          </a:p>
+          <a:p>
+            <a:pPr marL="3200400" lvl="6" indent="-304920" algn="l">
+              <a:lnSpc>
+                <a:spcPct val="100000"/>
+              </a:lnSpc>
               <a:spcBef>
                 <a:spcPts val="283"/>
               </a:spcBef>
@@ -3916,7 +3629,7 @@
               <a:buChar char=""/>
             </a:pPr>
             <a:r>
-              <a:rPr lang="pt-BR" sz="1800" b="0" u="none" strike="noStrike">
+              <a:rPr lang="pt-BR" sz="1200" b="0" u="none" strike="noStrike">
                 <a:solidFill>
                   <a:srgbClr val="000000"/>
                 </a:solidFill>
@@ -3926,20 +3639,20 @@
               </a:rPr>
               <a:t>7.º nível de tópicos</a:t>
             </a:r>
-            <a:endParaRPr lang="pt-BR" sz="1800" b="0" u="none" strike="noStrike">
-              <a:solidFill>
-                <a:srgbClr val="000000"/>
-              </a:solidFill>
-              <a:effectLst/>
-              <a:uFillTx/>
-              <a:latin typeface="Arial"/>
-            </a:endParaRPr>
-          </a:p>
-        </p:txBody>
-      </p:sp>
-      <p:sp>
-        <p:nvSpPr>
-          <p:cNvPr id="29" name="PlaceHolder 2"/>
+            <a:endParaRPr lang="pt-BR" sz="1200" b="0" u="none" strike="noStrike">
+              <a:solidFill>
+                <a:srgbClr val="000000"/>
+              </a:solidFill>
+              <a:effectLst/>
+              <a:uFillTx/>
+              <a:latin typeface="Arial"/>
+            </a:endParaRPr>
+          </a:p>
+        </p:txBody>
+      </p:sp>
+      <p:sp>
+        <p:nvSpPr>
+          <p:cNvPr id="29" name="PlaceHolder 3"/>
           <p:cNvSpPr>
             <a:spLocks noGrp="1"/>
           </p:cNvSpPr>
@@ -3950,7 +3663,7 @@
         <p:spPr>
           <a:xfrm>
             <a:off x="8472600" y="4663080"/>
-            <a:ext cx="548280" cy="393120"/>
+            <a:ext cx="547920" cy="392760"/>
           </a:xfrm>
           <a:prstGeom prst="rect">
             <a:avLst/>
@@ -3994,7 +3707,7 @@
                 <a:tab pos="0" algn="l"/>
               </a:tabLst>
             </a:pPr>
-            <a:fld id="{E5F15754-1B59-48E3-A0AA-3B2D70AC4997}" type="slidenum">
+            <a:fld id="{5926AA56-4501-4899-BB5A-86FB87769040}" type="slidenum">
               <a:rPr lang="pt-BR" sz="1000" b="0" u="none" strike="noStrike">
                 <a:solidFill>
                   <a:schemeClr val="dk2"/>
@@ -4046,6 +3759,1392 @@
 
 <file path=ppt/slideLayouts/slideLayout2.xml><?xml version="1.0" encoding="utf-8"?>
 <p:sldLayout xmlns:a="http://schemas.openxmlformats.org/drawingml/2006/main" xmlns:p="http://schemas.openxmlformats.org/presentationml/2006/main" xmlns:r="http://schemas.openxmlformats.org/officeDocument/2006/relationships" xmlns:p14="http://schemas.microsoft.com/office/powerpoint/2010/main" xmlns:p15="http://schemas.microsoft.com/office/powerpoint/2012/main" xmlns:mc="http://schemas.openxmlformats.org/markup-compatibility/2006" type="blank" preserve="1">
+  <p:cSld name="SECTION_TITLE_AND_DESCRIPTION">
+    <p:bg>
+      <p:bgPr>
+        <a:solidFill>
+          <a:schemeClr val="lt1"/>
+        </a:solidFill>
+      </p:bgPr>
+    </p:bg>
+    <p:spTree>
+      <p:nvGrpSpPr>
+        <p:cNvPr id="1" name=""/>
+        <p:cNvGrpSpPr/>
+        <p:nvPr/>
+      </p:nvGrpSpPr>
+      <p:grpSpPr>
+        <a:xfrm>
+          <a:off x="0" y="0"/>
+          <a:ext cx="0" cy="0"/>
+          <a:chOff x="0" y="0"/>
+          <a:chExt cx="0" cy="0"/>
+        </a:xfrm>
+      </p:grpSpPr>
+      <p:sp>
+        <p:nvSpPr>
+          <p:cNvPr id="4" name="Google Shape;36;p9"/>
+          <p:cNvSpPr/>
+          <p:nvPr/>
+        </p:nvSpPr>
+        <p:spPr>
+          <a:xfrm>
+            <a:off x="4572000" y="0"/>
+            <a:ext cx="4571280" cy="5142960"/>
+          </a:xfrm>
+          <a:prstGeom prst="rect">
+            <a:avLst/>
+          </a:prstGeom>
+          <a:solidFill>
+            <a:schemeClr val="lt2"/>
+          </a:solidFill>
+          <a:ln w="0">
+            <a:noFill/>
+          </a:ln>
+        </p:spPr>
+        <p:style>
+          <a:lnRef idx="0"/>
+          <a:fillRef idx="0"/>
+          <a:effectRef idx="0"/>
+          <a:fontRef idx="minor"/>
+        </p:style>
+        <p:txBody>
+          <a:bodyPr lIns="90000" tIns="91440" rIns="90000" bIns="91440" anchor="ctr">
+            <a:noAutofit/>
+          </a:bodyPr>
+          <a:p>
+            <a:endParaRPr lang="pt-BR" sz="1400" b="0" u="none" strike="noStrike">
+              <a:solidFill>
+                <a:srgbClr val="000000"/>
+              </a:solidFill>
+              <a:effectLst/>
+              <a:uFillTx/>
+              <a:latin typeface="Arial"/>
+            </a:endParaRPr>
+          </a:p>
+        </p:txBody>
+      </p:sp>
+      <p:sp>
+        <p:nvSpPr>
+          <p:cNvPr id="5" name="PlaceHolder 1"/>
+          <p:cNvSpPr>
+            <a:spLocks noGrp="1"/>
+          </p:cNvSpPr>
+          <p:nvPr>
+            <p:ph type="title"/>
+          </p:nvPr>
+        </p:nvSpPr>
+        <p:spPr>
+          <a:xfrm>
+            <a:off x="265680" y="1233000"/>
+            <a:ext cx="4044600" cy="1481760"/>
+          </a:xfrm>
+          <a:prstGeom prst="rect">
+            <a:avLst/>
+          </a:prstGeom>
+          <a:noFill/>
+          <a:ln w="0">
+            <a:noFill/>
+          </a:ln>
+        </p:spPr>
+        <p:txBody>
+          <a:bodyPr lIns="91440" tIns="91440" rIns="91440" bIns="91440" anchor="b">
+            <a:normAutofit fontScale="77500" lnSpcReduction="19999"/>
+          </a:bodyPr>
+          <a:lstStyle>
+            <a:lvl1pPr indent="0" algn="l">
+              <a:lnSpc>
+                <a:spcPct val="100000"/>
+              </a:lnSpc>
+              <a:buNone/>
+              <a:tabLst>
+                <a:tab pos="0" algn="l"/>
+              </a:tabLst>
+              <a:defRPr lang="pt-BR" sz="4200" b="0" u="none" strike="noStrike">
+                <a:solidFill>
+                  <a:srgbClr val="000000"/>
+                </a:solidFill>
+                <a:effectLst/>
+                <a:uFillTx/>
+                <a:latin typeface="Arial"/>
+              </a:defRPr>
+            </a:lvl1pPr>
+          </a:lstStyle>
+          <a:p>
+            <a:pPr indent="0" algn="l">
+              <a:lnSpc>
+                <a:spcPct val="100000"/>
+              </a:lnSpc>
+              <a:buNone/>
+              <a:tabLst>
+                <a:tab pos="0" algn="l"/>
+              </a:tabLst>
+            </a:pPr>
+            <a:r>
+              <a:rPr lang="pt-BR" sz="4200" b="0" u="none" strike="noStrike">
+                <a:solidFill>
+                  <a:srgbClr val="000000"/>
+                </a:solidFill>
+                <a:effectLst/>
+                <a:uFillTx/>
+                <a:latin typeface="Arial"/>
+              </a:rPr>
+              <a:t>Clique para editar o formato do texto do título</a:t>
+            </a:r>
+            <a:endParaRPr lang="pt-BR" sz="4200" b="0" u="none" strike="noStrike">
+              <a:solidFill>
+                <a:srgbClr val="000000"/>
+              </a:solidFill>
+              <a:effectLst/>
+              <a:uFillTx/>
+              <a:latin typeface="Arial"/>
+            </a:endParaRPr>
+          </a:p>
+        </p:txBody>
+      </p:sp>
+      <p:sp>
+        <p:nvSpPr>
+          <p:cNvPr id="6" name="PlaceHolder 2"/>
+          <p:cNvSpPr>
+            <a:spLocks noGrp="1"/>
+          </p:cNvSpPr>
+          <p:nvPr>
+            <p:ph type="body"/>
+          </p:nvPr>
+        </p:nvSpPr>
+        <p:spPr>
+          <a:xfrm>
+            <a:off x="4939560" y="723960"/>
+            <a:ext cx="3836160" cy="3694320"/>
+          </a:xfrm>
+          <a:prstGeom prst="rect">
+            <a:avLst/>
+          </a:prstGeom>
+          <a:noFill/>
+          <a:ln w="0">
+            <a:noFill/>
+          </a:ln>
+        </p:spPr>
+        <p:txBody>
+          <a:bodyPr lIns="91440" tIns="91440" rIns="91440" bIns="91440" anchor="ctr">
+            <a:normAutofit fontScale="85000" lnSpcReduction="9999"/>
+          </a:bodyPr>
+          <a:lstStyle>
+            <a:lvl1pPr algn="l">
+              <a:lnSpc>
+                <a:spcPct val="100000"/>
+              </a:lnSpc>
+              <a:spcBef>
+                <a:spcPts val="1417"/>
+              </a:spcBef>
+              <a:buClr>
+                <a:srgbClr val="000000"/>
+              </a:buClr>
+              <a:buSzPct val="45000"/>
+              <a:buFont typeface="Wingdings" charset="2"/>
+              <a:buChar char=""/>
+              <a:defRPr lang="pt-BR" sz="1800" b="0" u="none" strike="noStrike">
+                <a:solidFill>
+                  <a:srgbClr val="000000"/>
+                </a:solidFill>
+                <a:effectLst/>
+                <a:uFillTx/>
+                <a:latin typeface="Arial"/>
+              </a:defRPr>
+            </a:lvl1pPr>
+            <a:lvl2pPr lvl="1" algn="l">
+              <a:lnSpc>
+                <a:spcPct val="100000"/>
+              </a:lnSpc>
+              <a:spcBef>
+                <a:spcPts val="1134"/>
+              </a:spcBef>
+              <a:buClr>
+                <a:srgbClr val="000000"/>
+              </a:buClr>
+              <a:buSzPct val="75000"/>
+              <a:buFont typeface="Symbol" charset="2"/>
+              <a:buChar char=""/>
+              <a:defRPr lang="pt-BR" sz="1800" b="0" u="none" strike="noStrike">
+                <a:solidFill>
+                  <a:srgbClr val="000000"/>
+                </a:solidFill>
+                <a:effectLst/>
+                <a:uFillTx/>
+                <a:latin typeface="Arial"/>
+              </a:defRPr>
+            </a:lvl2pPr>
+            <a:lvl3pPr lvl="2" algn="l">
+              <a:lnSpc>
+                <a:spcPct val="100000"/>
+              </a:lnSpc>
+              <a:spcBef>
+                <a:spcPts val="850"/>
+              </a:spcBef>
+              <a:buClr>
+                <a:srgbClr val="000000"/>
+              </a:buClr>
+              <a:buSzPct val="45000"/>
+              <a:buFont typeface="Wingdings" charset="2"/>
+              <a:buChar char=""/>
+              <a:defRPr lang="pt-BR" sz="1800" b="0" u="none" strike="noStrike">
+                <a:solidFill>
+                  <a:srgbClr val="000000"/>
+                </a:solidFill>
+                <a:effectLst/>
+                <a:uFillTx/>
+                <a:latin typeface="Arial"/>
+              </a:defRPr>
+            </a:lvl3pPr>
+            <a:lvl4pPr lvl="3" algn="l">
+              <a:lnSpc>
+                <a:spcPct val="100000"/>
+              </a:lnSpc>
+              <a:spcBef>
+                <a:spcPts val="567"/>
+              </a:spcBef>
+              <a:buClr>
+                <a:srgbClr val="000000"/>
+              </a:buClr>
+              <a:buSzPct val="75000"/>
+              <a:buFont typeface="Symbol" charset="2"/>
+              <a:buChar char=""/>
+              <a:defRPr lang="pt-BR" sz="1800" b="0" u="none" strike="noStrike">
+                <a:solidFill>
+                  <a:srgbClr val="000000"/>
+                </a:solidFill>
+                <a:effectLst/>
+                <a:uFillTx/>
+                <a:latin typeface="Arial"/>
+              </a:defRPr>
+            </a:lvl4pPr>
+            <a:lvl5pPr lvl="4" algn="l">
+              <a:lnSpc>
+                <a:spcPct val="100000"/>
+              </a:lnSpc>
+              <a:spcBef>
+                <a:spcPts val="283"/>
+              </a:spcBef>
+              <a:buClr>
+                <a:srgbClr val="000000"/>
+              </a:buClr>
+              <a:buSzPct val="45000"/>
+              <a:buFont typeface="Wingdings" charset="2"/>
+              <a:buChar char=""/>
+              <a:defRPr lang="pt-BR" sz="1800" b="0" u="none" strike="noStrike">
+                <a:solidFill>
+                  <a:srgbClr val="000000"/>
+                </a:solidFill>
+                <a:effectLst/>
+                <a:uFillTx/>
+                <a:latin typeface="Arial"/>
+              </a:defRPr>
+            </a:lvl5pPr>
+            <a:lvl6pPr lvl="5" algn="l">
+              <a:lnSpc>
+                <a:spcPct val="100000"/>
+              </a:lnSpc>
+              <a:spcBef>
+                <a:spcPts val="283"/>
+              </a:spcBef>
+              <a:buClr>
+                <a:srgbClr val="000000"/>
+              </a:buClr>
+              <a:buSzPct val="45000"/>
+              <a:buFont typeface="Wingdings" charset="2"/>
+              <a:buChar char=""/>
+              <a:defRPr lang="pt-BR" sz="1800" b="0" u="none" strike="noStrike">
+                <a:solidFill>
+                  <a:srgbClr val="000000"/>
+                </a:solidFill>
+                <a:effectLst/>
+                <a:uFillTx/>
+                <a:latin typeface="Arial"/>
+              </a:defRPr>
+            </a:lvl6pPr>
+            <a:lvl7pPr lvl="6" algn="l">
+              <a:lnSpc>
+                <a:spcPct val="100000"/>
+              </a:lnSpc>
+              <a:spcBef>
+                <a:spcPts val="283"/>
+              </a:spcBef>
+              <a:buClr>
+                <a:srgbClr val="000000"/>
+              </a:buClr>
+              <a:buSzPct val="45000"/>
+              <a:buFont typeface="Wingdings" charset="2"/>
+              <a:buChar char=""/>
+              <a:defRPr lang="pt-BR" sz="1800" b="0" u="none" strike="noStrike">
+                <a:solidFill>
+                  <a:srgbClr val="000000"/>
+                </a:solidFill>
+                <a:effectLst/>
+                <a:uFillTx/>
+                <a:latin typeface="Arial"/>
+              </a:defRPr>
+            </a:lvl7pPr>
+          </a:lstStyle>
+          <a:p>
+            <a:pPr marL="457200" indent="-343080" algn="l">
+              <a:lnSpc>
+                <a:spcPct val="100000"/>
+              </a:lnSpc>
+              <a:spcBef>
+                <a:spcPts val="1417"/>
+              </a:spcBef>
+              <a:buClr>
+                <a:srgbClr val="000000"/>
+              </a:buClr>
+              <a:buSzPct val="45000"/>
+              <a:buFont typeface="Wingdings" charset="2"/>
+              <a:buChar char=""/>
+            </a:pPr>
+            <a:r>
+              <a:rPr lang="pt-BR" sz="1800" b="0" u="none" strike="noStrike">
+                <a:solidFill>
+                  <a:srgbClr val="000000"/>
+                </a:solidFill>
+                <a:effectLst/>
+                <a:uFillTx/>
+                <a:latin typeface="Arial"/>
+              </a:rPr>
+              <a:t>Clique para editar o formato de texto dos tópicos</a:t>
+            </a:r>
+            <a:endParaRPr lang="pt-BR" sz="1800" b="0" u="none" strike="noStrike">
+              <a:solidFill>
+                <a:srgbClr val="000000"/>
+              </a:solidFill>
+              <a:effectLst/>
+              <a:uFillTx/>
+              <a:latin typeface="Arial"/>
+            </a:endParaRPr>
+          </a:p>
+          <a:p>
+            <a:pPr marL="914400" lvl="1" indent="-317520" algn="l">
+              <a:lnSpc>
+                <a:spcPct val="100000"/>
+              </a:lnSpc>
+              <a:spcBef>
+                <a:spcPts val="1134"/>
+              </a:spcBef>
+              <a:buClr>
+                <a:srgbClr val="000000"/>
+              </a:buClr>
+              <a:buSzPct val="75000"/>
+              <a:buFont typeface="Symbol" charset="2"/>
+              <a:buChar char=""/>
+            </a:pPr>
+            <a:r>
+              <a:rPr lang="pt-BR" sz="1800" b="0" u="none" strike="noStrike">
+                <a:solidFill>
+                  <a:srgbClr val="000000"/>
+                </a:solidFill>
+                <a:effectLst/>
+                <a:uFillTx/>
+                <a:latin typeface="Arial"/>
+              </a:rPr>
+              <a:t>2.º nível de tópicos</a:t>
+            </a:r>
+            <a:endParaRPr lang="pt-BR" sz="1800" b="0" u="none" strike="noStrike">
+              <a:solidFill>
+                <a:srgbClr val="000000"/>
+              </a:solidFill>
+              <a:effectLst/>
+              <a:uFillTx/>
+              <a:latin typeface="Arial"/>
+            </a:endParaRPr>
+          </a:p>
+          <a:p>
+            <a:pPr marL="1371600" lvl="2" indent="-317520" algn="l">
+              <a:lnSpc>
+                <a:spcPct val="100000"/>
+              </a:lnSpc>
+              <a:spcBef>
+                <a:spcPts val="850"/>
+              </a:spcBef>
+              <a:buClr>
+                <a:srgbClr val="000000"/>
+              </a:buClr>
+              <a:buSzPct val="45000"/>
+              <a:buFont typeface="Wingdings" charset="2"/>
+              <a:buChar char=""/>
+            </a:pPr>
+            <a:r>
+              <a:rPr lang="pt-BR" sz="1800" b="0" u="none" strike="noStrike">
+                <a:solidFill>
+                  <a:srgbClr val="000000"/>
+                </a:solidFill>
+                <a:effectLst/>
+                <a:uFillTx/>
+                <a:latin typeface="Arial"/>
+              </a:rPr>
+              <a:t>3.º nível de tópicos</a:t>
+            </a:r>
+            <a:endParaRPr lang="pt-BR" sz="1800" b="0" u="none" strike="noStrike">
+              <a:solidFill>
+                <a:srgbClr val="000000"/>
+              </a:solidFill>
+              <a:effectLst/>
+              <a:uFillTx/>
+              <a:latin typeface="Arial"/>
+            </a:endParaRPr>
+          </a:p>
+          <a:p>
+            <a:pPr marL="1828800" lvl="3" indent="-317520" algn="l">
+              <a:lnSpc>
+                <a:spcPct val="100000"/>
+              </a:lnSpc>
+              <a:spcBef>
+                <a:spcPts val="567"/>
+              </a:spcBef>
+              <a:buClr>
+                <a:srgbClr val="000000"/>
+              </a:buClr>
+              <a:buSzPct val="75000"/>
+              <a:buFont typeface="Symbol" charset="2"/>
+              <a:buChar char=""/>
+            </a:pPr>
+            <a:r>
+              <a:rPr lang="pt-BR" sz="1800" b="0" u="none" strike="noStrike">
+                <a:solidFill>
+                  <a:srgbClr val="000000"/>
+                </a:solidFill>
+                <a:effectLst/>
+                <a:uFillTx/>
+                <a:latin typeface="Arial"/>
+              </a:rPr>
+              <a:t>4.º nível de tópicos</a:t>
+            </a:r>
+            <a:endParaRPr lang="pt-BR" sz="1800" b="0" u="none" strike="noStrike">
+              <a:solidFill>
+                <a:srgbClr val="000000"/>
+              </a:solidFill>
+              <a:effectLst/>
+              <a:uFillTx/>
+              <a:latin typeface="Arial"/>
+            </a:endParaRPr>
+          </a:p>
+          <a:p>
+            <a:pPr marL="2286000" lvl="4" indent="-317520" algn="l">
+              <a:lnSpc>
+                <a:spcPct val="100000"/>
+              </a:lnSpc>
+              <a:spcBef>
+                <a:spcPts val="283"/>
+              </a:spcBef>
+              <a:buClr>
+                <a:srgbClr val="000000"/>
+              </a:buClr>
+              <a:buSzPct val="45000"/>
+              <a:buFont typeface="Wingdings" charset="2"/>
+              <a:buChar char=""/>
+            </a:pPr>
+            <a:r>
+              <a:rPr lang="pt-BR" sz="1800" b="0" u="none" strike="noStrike">
+                <a:solidFill>
+                  <a:srgbClr val="000000"/>
+                </a:solidFill>
+                <a:effectLst/>
+                <a:uFillTx/>
+                <a:latin typeface="Arial"/>
+              </a:rPr>
+              <a:t>5.º nível de tópicos</a:t>
+            </a:r>
+            <a:endParaRPr lang="pt-BR" sz="1800" b="0" u="none" strike="noStrike">
+              <a:solidFill>
+                <a:srgbClr val="000000"/>
+              </a:solidFill>
+              <a:effectLst/>
+              <a:uFillTx/>
+              <a:latin typeface="Arial"/>
+            </a:endParaRPr>
+          </a:p>
+          <a:p>
+            <a:pPr marL="2743200" lvl="5" indent="-317520" algn="l">
+              <a:lnSpc>
+                <a:spcPct val="100000"/>
+              </a:lnSpc>
+              <a:spcBef>
+                <a:spcPts val="283"/>
+              </a:spcBef>
+              <a:buClr>
+                <a:srgbClr val="000000"/>
+              </a:buClr>
+              <a:buSzPct val="45000"/>
+              <a:buFont typeface="Wingdings" charset="2"/>
+              <a:buChar char=""/>
+            </a:pPr>
+            <a:r>
+              <a:rPr lang="pt-BR" sz="1800" b="0" u="none" strike="noStrike">
+                <a:solidFill>
+                  <a:srgbClr val="000000"/>
+                </a:solidFill>
+                <a:effectLst/>
+                <a:uFillTx/>
+                <a:latin typeface="Arial"/>
+              </a:rPr>
+              <a:t>6.º nível de tópicos</a:t>
+            </a:r>
+            <a:endParaRPr lang="pt-BR" sz="1800" b="0" u="none" strike="noStrike">
+              <a:solidFill>
+                <a:srgbClr val="000000"/>
+              </a:solidFill>
+              <a:effectLst/>
+              <a:uFillTx/>
+              <a:latin typeface="Arial"/>
+            </a:endParaRPr>
+          </a:p>
+          <a:p>
+            <a:pPr marL="3200400" lvl="6" indent="-317520" algn="l">
+              <a:lnSpc>
+                <a:spcPct val="100000"/>
+              </a:lnSpc>
+              <a:spcBef>
+                <a:spcPts val="283"/>
+              </a:spcBef>
+              <a:buClr>
+                <a:srgbClr val="000000"/>
+              </a:buClr>
+              <a:buSzPct val="45000"/>
+              <a:buFont typeface="Wingdings" charset="2"/>
+              <a:buChar char=""/>
+            </a:pPr>
+            <a:r>
+              <a:rPr lang="pt-BR" sz="1800" b="0" u="none" strike="noStrike">
+                <a:solidFill>
+                  <a:srgbClr val="000000"/>
+                </a:solidFill>
+                <a:effectLst/>
+                <a:uFillTx/>
+                <a:latin typeface="Arial"/>
+              </a:rPr>
+              <a:t>7.º nível de tópicos</a:t>
+            </a:r>
+            <a:endParaRPr lang="pt-BR" sz="1800" b="0" u="none" strike="noStrike">
+              <a:solidFill>
+                <a:srgbClr val="000000"/>
+              </a:solidFill>
+              <a:effectLst/>
+              <a:uFillTx/>
+              <a:latin typeface="Arial"/>
+            </a:endParaRPr>
+          </a:p>
+        </p:txBody>
+      </p:sp>
+      <p:sp>
+        <p:nvSpPr>
+          <p:cNvPr id="7" name="PlaceHolder 3"/>
+          <p:cNvSpPr>
+            <a:spLocks noGrp="1"/>
+          </p:cNvSpPr>
+          <p:nvPr>
+            <p:ph type="sldNum" idx="2"/>
+          </p:nvPr>
+        </p:nvSpPr>
+        <p:spPr>
+          <a:xfrm>
+            <a:off x="8472600" y="4663080"/>
+            <a:ext cx="547920" cy="392760"/>
+          </a:xfrm>
+          <a:prstGeom prst="rect">
+            <a:avLst/>
+          </a:prstGeom>
+          <a:noFill/>
+          <a:ln w="0">
+            <a:noFill/>
+          </a:ln>
+        </p:spPr>
+        <p:txBody>
+          <a:bodyPr lIns="91440" tIns="91440" rIns="91440" bIns="91440" anchor="ctr">
+            <a:normAutofit/>
+          </a:bodyPr>
+          <a:lstStyle>
+            <a:lvl1pPr indent="0" algn="r">
+              <a:lnSpc>
+                <a:spcPct val="100000"/>
+              </a:lnSpc>
+              <a:buNone/>
+              <a:tabLst>
+                <a:tab pos="0" algn="l"/>
+              </a:tabLst>
+              <a:defRPr lang="pt-BR" sz="1000" b="0" u="none" strike="noStrike">
+                <a:solidFill>
+                  <a:schemeClr val="dk2"/>
+                </a:solidFill>
+                <a:effectLst/>
+                <a:uFillTx/>
+                <a:latin typeface="Arial"/>
+                <a:ea typeface="Arial"/>
+              </a:defRPr>
+            </a:lvl1pPr>
+          </a:lstStyle>
+          <a:p>
+            <a:pPr indent="0" algn="r">
+              <a:lnSpc>
+                <a:spcPct val="100000"/>
+              </a:lnSpc>
+              <a:buNone/>
+              <a:tabLst>
+                <a:tab pos="0" algn="l"/>
+              </a:tabLst>
+            </a:pPr>
+            <a:fld id="{A06B3888-2B42-43E1-AD31-1C0382D1F1B9}" type="slidenum">
+              <a:rPr lang="pt-BR" sz="1000" b="0" u="none" strike="noStrike">
+                <a:solidFill>
+                  <a:schemeClr val="dk2"/>
+                </a:solidFill>
+                <a:effectLst/>
+                <a:uFillTx/>
+                <a:latin typeface="Arial"/>
+                <a:ea typeface="Arial"/>
+              </a:rPr>
+              <a:t>&lt;número&gt;</a:t>
+            </a:fld>
+            <a:endParaRPr lang="pt-BR" sz="1000" b="0" u="none" strike="noStrike">
+              <a:solidFill>
+                <a:srgbClr val="000000"/>
+              </a:solidFill>
+              <a:effectLst/>
+              <a:uFillTx/>
+              <a:latin typeface="Times New Roman"/>
+            </a:endParaRPr>
+          </a:p>
+        </p:txBody>
+      </p:sp>
+    </p:spTree>
+  </p:cSld>
+</p:sldLayout>
+</file>
+
+<file path=ppt/slideLayouts/slideLayout3.xml><?xml version="1.0" encoding="utf-8"?>
+<p:sldLayout xmlns:a="http://schemas.openxmlformats.org/drawingml/2006/main" xmlns:p="http://schemas.openxmlformats.org/presentationml/2006/main" xmlns:r="http://schemas.openxmlformats.org/officeDocument/2006/relationships" xmlns:p14="http://schemas.microsoft.com/office/powerpoint/2010/main" xmlns:p15="http://schemas.microsoft.com/office/powerpoint/2012/main" xmlns:mc="http://schemas.openxmlformats.org/markup-compatibility/2006" type="blank" preserve="1">
+  <p:cSld name="CAPTION_ONLY">
+    <p:bg>
+      <p:bgPr>
+        <a:solidFill>
+          <a:schemeClr val="lt1"/>
+        </a:solidFill>
+      </p:bgPr>
+    </p:bg>
+    <p:spTree>
+      <p:nvGrpSpPr>
+        <p:cNvPr id="1" name=""/>
+        <p:cNvGrpSpPr/>
+        <p:nvPr/>
+      </p:nvGrpSpPr>
+      <p:grpSpPr>
+        <a:xfrm>
+          <a:off x="0" y="0"/>
+          <a:ext cx="0" cy="0"/>
+          <a:chOff x="0" y="0"/>
+          <a:chExt cx="0" cy="0"/>
+        </a:xfrm>
+      </p:grpSpPr>
+      <p:sp>
+        <p:nvSpPr>
+          <p:cNvPr id="8" name="PlaceHolder 1"/>
+          <p:cNvSpPr>
+            <a:spLocks noGrp="1"/>
+          </p:cNvSpPr>
+          <p:nvPr>
+            <p:ph type="body"/>
+          </p:nvPr>
+        </p:nvSpPr>
+        <p:spPr>
+          <a:xfrm>
+            <a:off x="311760" y="4230720"/>
+            <a:ext cx="5997960" cy="604440"/>
+          </a:xfrm>
+          <a:prstGeom prst="rect">
+            <a:avLst/>
+          </a:prstGeom>
+          <a:noFill/>
+          <a:ln w="0">
+            <a:noFill/>
+          </a:ln>
+        </p:spPr>
+        <p:txBody>
+          <a:bodyPr lIns="91440" tIns="91440" rIns="91440" bIns="91440" anchor="ctr">
+            <a:normAutofit fontScale="25000" lnSpcReduction="19999"/>
+          </a:bodyPr>
+          <a:lstStyle>
+            <a:lvl1pPr algn="l">
+              <a:lnSpc>
+                <a:spcPct val="100000"/>
+              </a:lnSpc>
+              <a:spcBef>
+                <a:spcPts val="1417"/>
+              </a:spcBef>
+              <a:buClr>
+                <a:srgbClr val="000000"/>
+              </a:buClr>
+              <a:buSzPct val="45000"/>
+              <a:buFont typeface="Wingdings" charset="2"/>
+              <a:buChar char=""/>
+              <a:defRPr lang="pt-BR" sz="1800" b="0" u="none" strike="noStrike">
+                <a:solidFill>
+                  <a:srgbClr val="000000"/>
+                </a:solidFill>
+                <a:effectLst/>
+                <a:uFillTx/>
+                <a:latin typeface="Arial"/>
+              </a:defRPr>
+            </a:lvl1pPr>
+            <a:lvl2pPr lvl="1" algn="l">
+              <a:lnSpc>
+                <a:spcPct val="100000"/>
+              </a:lnSpc>
+              <a:spcBef>
+                <a:spcPts val="1134"/>
+              </a:spcBef>
+              <a:buClr>
+                <a:srgbClr val="000000"/>
+              </a:buClr>
+              <a:buSzPct val="75000"/>
+              <a:buFont typeface="Symbol" charset="2"/>
+              <a:buChar char=""/>
+              <a:defRPr lang="pt-BR" sz="1800" b="0" u="none" strike="noStrike">
+                <a:solidFill>
+                  <a:srgbClr val="000000"/>
+                </a:solidFill>
+                <a:effectLst/>
+                <a:uFillTx/>
+                <a:latin typeface="Arial"/>
+              </a:defRPr>
+            </a:lvl2pPr>
+            <a:lvl3pPr lvl="2" algn="l">
+              <a:lnSpc>
+                <a:spcPct val="100000"/>
+              </a:lnSpc>
+              <a:spcBef>
+                <a:spcPts val="850"/>
+              </a:spcBef>
+              <a:buClr>
+                <a:srgbClr val="000000"/>
+              </a:buClr>
+              <a:buSzPct val="45000"/>
+              <a:buFont typeface="Wingdings" charset="2"/>
+              <a:buChar char=""/>
+              <a:defRPr lang="pt-BR" sz="1800" b="0" u="none" strike="noStrike">
+                <a:solidFill>
+                  <a:srgbClr val="000000"/>
+                </a:solidFill>
+                <a:effectLst/>
+                <a:uFillTx/>
+                <a:latin typeface="Arial"/>
+              </a:defRPr>
+            </a:lvl3pPr>
+            <a:lvl4pPr lvl="3" algn="l">
+              <a:lnSpc>
+                <a:spcPct val="100000"/>
+              </a:lnSpc>
+              <a:spcBef>
+                <a:spcPts val="567"/>
+              </a:spcBef>
+              <a:buClr>
+                <a:srgbClr val="000000"/>
+              </a:buClr>
+              <a:buSzPct val="75000"/>
+              <a:buFont typeface="Symbol" charset="2"/>
+              <a:buChar char=""/>
+              <a:defRPr lang="pt-BR" sz="1800" b="0" u="none" strike="noStrike">
+                <a:solidFill>
+                  <a:srgbClr val="000000"/>
+                </a:solidFill>
+                <a:effectLst/>
+                <a:uFillTx/>
+                <a:latin typeface="Arial"/>
+              </a:defRPr>
+            </a:lvl4pPr>
+            <a:lvl5pPr lvl="4" algn="l">
+              <a:lnSpc>
+                <a:spcPct val="100000"/>
+              </a:lnSpc>
+              <a:spcBef>
+                <a:spcPts val="283"/>
+              </a:spcBef>
+              <a:buClr>
+                <a:srgbClr val="000000"/>
+              </a:buClr>
+              <a:buSzPct val="45000"/>
+              <a:buFont typeface="Wingdings" charset="2"/>
+              <a:buChar char=""/>
+              <a:defRPr lang="pt-BR" sz="1800" b="0" u="none" strike="noStrike">
+                <a:solidFill>
+                  <a:srgbClr val="000000"/>
+                </a:solidFill>
+                <a:effectLst/>
+                <a:uFillTx/>
+                <a:latin typeface="Arial"/>
+              </a:defRPr>
+            </a:lvl5pPr>
+            <a:lvl6pPr lvl="5" algn="l">
+              <a:lnSpc>
+                <a:spcPct val="100000"/>
+              </a:lnSpc>
+              <a:spcBef>
+                <a:spcPts val="283"/>
+              </a:spcBef>
+              <a:buClr>
+                <a:srgbClr val="000000"/>
+              </a:buClr>
+              <a:buSzPct val="45000"/>
+              <a:buFont typeface="Wingdings" charset="2"/>
+              <a:buChar char=""/>
+              <a:defRPr lang="pt-BR" sz="1800" b="0" u="none" strike="noStrike">
+                <a:solidFill>
+                  <a:srgbClr val="000000"/>
+                </a:solidFill>
+                <a:effectLst/>
+                <a:uFillTx/>
+                <a:latin typeface="Arial"/>
+              </a:defRPr>
+            </a:lvl6pPr>
+            <a:lvl7pPr lvl="6" algn="l">
+              <a:lnSpc>
+                <a:spcPct val="100000"/>
+              </a:lnSpc>
+              <a:spcBef>
+                <a:spcPts val="283"/>
+              </a:spcBef>
+              <a:buClr>
+                <a:srgbClr val="000000"/>
+              </a:buClr>
+              <a:buSzPct val="45000"/>
+              <a:buFont typeface="Wingdings" charset="2"/>
+              <a:buChar char=""/>
+              <a:defRPr lang="pt-BR" sz="1800" b="0" u="none" strike="noStrike">
+                <a:solidFill>
+                  <a:srgbClr val="000000"/>
+                </a:solidFill>
+                <a:effectLst/>
+                <a:uFillTx/>
+                <a:latin typeface="Arial"/>
+              </a:defRPr>
+            </a:lvl7pPr>
+          </a:lstStyle>
+          <a:p>
+            <a:pPr marL="457200" indent="-228600" algn="l">
+              <a:lnSpc>
+                <a:spcPct val="100000"/>
+              </a:lnSpc>
+              <a:spcBef>
+                <a:spcPts val="1417"/>
+              </a:spcBef>
+              <a:buClr>
+                <a:srgbClr val="000000"/>
+              </a:buClr>
+              <a:buSzPct val="45000"/>
+              <a:buFont typeface="Wingdings" charset="2"/>
+              <a:buChar char=""/>
+            </a:pPr>
+            <a:r>
+              <a:rPr lang="pt-BR" sz="1800" b="0" u="none" strike="noStrike">
+                <a:solidFill>
+                  <a:srgbClr val="000000"/>
+                </a:solidFill>
+                <a:effectLst/>
+                <a:uFillTx/>
+                <a:latin typeface="Arial"/>
+              </a:rPr>
+              <a:t>Clique para editar o formato de texto dos tópicos</a:t>
+            </a:r>
+            <a:endParaRPr lang="pt-BR" sz="1800" b="0" u="none" strike="noStrike">
+              <a:solidFill>
+                <a:srgbClr val="000000"/>
+              </a:solidFill>
+              <a:effectLst/>
+              <a:uFillTx/>
+              <a:latin typeface="Arial"/>
+            </a:endParaRPr>
+          </a:p>
+          <a:p>
+            <a:pPr marL="914400" lvl="1" indent="-317520" algn="l">
+              <a:lnSpc>
+                <a:spcPct val="100000"/>
+              </a:lnSpc>
+              <a:spcBef>
+                <a:spcPts val="1134"/>
+              </a:spcBef>
+              <a:buClr>
+                <a:srgbClr val="000000"/>
+              </a:buClr>
+              <a:buSzPct val="75000"/>
+              <a:buFont typeface="Symbol" charset="2"/>
+              <a:buChar char=""/>
+            </a:pPr>
+            <a:r>
+              <a:rPr lang="pt-BR" sz="1800" b="0" u="none" strike="noStrike">
+                <a:solidFill>
+                  <a:srgbClr val="000000"/>
+                </a:solidFill>
+                <a:effectLst/>
+                <a:uFillTx/>
+                <a:latin typeface="Arial"/>
+              </a:rPr>
+              <a:t>2.º nível de tópicos</a:t>
+            </a:r>
+            <a:endParaRPr lang="pt-BR" sz="1800" b="0" u="none" strike="noStrike">
+              <a:solidFill>
+                <a:srgbClr val="000000"/>
+              </a:solidFill>
+              <a:effectLst/>
+              <a:uFillTx/>
+              <a:latin typeface="Arial"/>
+            </a:endParaRPr>
+          </a:p>
+          <a:p>
+            <a:pPr marL="1371600" lvl="2" indent="-317520" algn="l">
+              <a:lnSpc>
+                <a:spcPct val="100000"/>
+              </a:lnSpc>
+              <a:spcBef>
+                <a:spcPts val="850"/>
+              </a:spcBef>
+              <a:buClr>
+                <a:srgbClr val="000000"/>
+              </a:buClr>
+              <a:buSzPct val="45000"/>
+              <a:buFont typeface="Wingdings" charset="2"/>
+              <a:buChar char=""/>
+            </a:pPr>
+            <a:r>
+              <a:rPr lang="pt-BR" sz="1800" b="0" u="none" strike="noStrike">
+                <a:solidFill>
+                  <a:srgbClr val="000000"/>
+                </a:solidFill>
+                <a:effectLst/>
+                <a:uFillTx/>
+                <a:latin typeface="Arial"/>
+              </a:rPr>
+              <a:t>3.º nível de tópicos</a:t>
+            </a:r>
+            <a:endParaRPr lang="pt-BR" sz="1800" b="0" u="none" strike="noStrike">
+              <a:solidFill>
+                <a:srgbClr val="000000"/>
+              </a:solidFill>
+              <a:effectLst/>
+              <a:uFillTx/>
+              <a:latin typeface="Arial"/>
+            </a:endParaRPr>
+          </a:p>
+          <a:p>
+            <a:pPr marL="1828800" lvl="3" indent="-317520" algn="l">
+              <a:lnSpc>
+                <a:spcPct val="100000"/>
+              </a:lnSpc>
+              <a:spcBef>
+                <a:spcPts val="567"/>
+              </a:spcBef>
+              <a:buClr>
+                <a:srgbClr val="000000"/>
+              </a:buClr>
+              <a:buSzPct val="75000"/>
+              <a:buFont typeface="Symbol" charset="2"/>
+              <a:buChar char=""/>
+            </a:pPr>
+            <a:r>
+              <a:rPr lang="pt-BR" sz="1800" b="0" u="none" strike="noStrike">
+                <a:solidFill>
+                  <a:srgbClr val="000000"/>
+                </a:solidFill>
+                <a:effectLst/>
+                <a:uFillTx/>
+                <a:latin typeface="Arial"/>
+              </a:rPr>
+              <a:t>4.º nível de tópicos</a:t>
+            </a:r>
+            <a:endParaRPr lang="pt-BR" sz="1800" b="0" u="none" strike="noStrike">
+              <a:solidFill>
+                <a:srgbClr val="000000"/>
+              </a:solidFill>
+              <a:effectLst/>
+              <a:uFillTx/>
+              <a:latin typeface="Arial"/>
+            </a:endParaRPr>
+          </a:p>
+          <a:p>
+            <a:pPr marL="2286000" lvl="4" indent="-317520" algn="l">
+              <a:lnSpc>
+                <a:spcPct val="100000"/>
+              </a:lnSpc>
+              <a:spcBef>
+                <a:spcPts val="283"/>
+              </a:spcBef>
+              <a:buClr>
+                <a:srgbClr val="000000"/>
+              </a:buClr>
+              <a:buSzPct val="45000"/>
+              <a:buFont typeface="Wingdings" charset="2"/>
+              <a:buChar char=""/>
+            </a:pPr>
+            <a:r>
+              <a:rPr lang="pt-BR" sz="1800" b="0" u="none" strike="noStrike">
+                <a:solidFill>
+                  <a:srgbClr val="000000"/>
+                </a:solidFill>
+                <a:effectLst/>
+                <a:uFillTx/>
+                <a:latin typeface="Arial"/>
+              </a:rPr>
+              <a:t>5.º nível de tópicos</a:t>
+            </a:r>
+            <a:endParaRPr lang="pt-BR" sz="1800" b="0" u="none" strike="noStrike">
+              <a:solidFill>
+                <a:srgbClr val="000000"/>
+              </a:solidFill>
+              <a:effectLst/>
+              <a:uFillTx/>
+              <a:latin typeface="Arial"/>
+            </a:endParaRPr>
+          </a:p>
+          <a:p>
+            <a:pPr marL="2743200" lvl="5" indent="-317520" algn="l">
+              <a:lnSpc>
+                <a:spcPct val="100000"/>
+              </a:lnSpc>
+              <a:spcBef>
+                <a:spcPts val="283"/>
+              </a:spcBef>
+              <a:buClr>
+                <a:srgbClr val="000000"/>
+              </a:buClr>
+              <a:buSzPct val="45000"/>
+              <a:buFont typeface="Wingdings" charset="2"/>
+              <a:buChar char=""/>
+            </a:pPr>
+            <a:r>
+              <a:rPr lang="pt-BR" sz="1800" b="0" u="none" strike="noStrike">
+                <a:solidFill>
+                  <a:srgbClr val="000000"/>
+                </a:solidFill>
+                <a:effectLst/>
+                <a:uFillTx/>
+                <a:latin typeface="Arial"/>
+              </a:rPr>
+              <a:t>6.º nível de tópicos</a:t>
+            </a:r>
+            <a:endParaRPr lang="pt-BR" sz="1800" b="0" u="none" strike="noStrike">
+              <a:solidFill>
+                <a:srgbClr val="000000"/>
+              </a:solidFill>
+              <a:effectLst/>
+              <a:uFillTx/>
+              <a:latin typeface="Arial"/>
+            </a:endParaRPr>
+          </a:p>
+          <a:p>
+            <a:pPr marL="3200400" lvl="6" indent="-317520" algn="l">
+              <a:lnSpc>
+                <a:spcPct val="100000"/>
+              </a:lnSpc>
+              <a:spcBef>
+                <a:spcPts val="283"/>
+              </a:spcBef>
+              <a:buClr>
+                <a:srgbClr val="000000"/>
+              </a:buClr>
+              <a:buSzPct val="45000"/>
+              <a:buFont typeface="Wingdings" charset="2"/>
+              <a:buChar char=""/>
+            </a:pPr>
+            <a:r>
+              <a:rPr lang="pt-BR" sz="1800" b="0" u="none" strike="noStrike">
+                <a:solidFill>
+                  <a:srgbClr val="000000"/>
+                </a:solidFill>
+                <a:effectLst/>
+                <a:uFillTx/>
+                <a:latin typeface="Arial"/>
+              </a:rPr>
+              <a:t>7.º nível de tópicos</a:t>
+            </a:r>
+            <a:endParaRPr lang="pt-BR" sz="1800" b="0" u="none" strike="noStrike">
+              <a:solidFill>
+                <a:srgbClr val="000000"/>
+              </a:solidFill>
+              <a:effectLst/>
+              <a:uFillTx/>
+              <a:latin typeface="Arial"/>
+            </a:endParaRPr>
+          </a:p>
+        </p:txBody>
+      </p:sp>
+      <p:sp>
+        <p:nvSpPr>
+          <p:cNvPr id="9" name="PlaceHolder 2"/>
+          <p:cNvSpPr>
+            <a:spLocks noGrp="1"/>
+          </p:cNvSpPr>
+          <p:nvPr>
+            <p:ph type="sldNum" idx="3"/>
+          </p:nvPr>
+        </p:nvSpPr>
+        <p:spPr>
+          <a:xfrm>
+            <a:off x="8472600" y="4663080"/>
+            <a:ext cx="547920" cy="392760"/>
+          </a:xfrm>
+          <a:prstGeom prst="rect">
+            <a:avLst/>
+          </a:prstGeom>
+          <a:noFill/>
+          <a:ln w="0">
+            <a:noFill/>
+          </a:ln>
+        </p:spPr>
+        <p:txBody>
+          <a:bodyPr lIns="91440" tIns="91440" rIns="91440" bIns="91440" anchor="ctr">
+            <a:normAutofit/>
+          </a:bodyPr>
+          <a:lstStyle>
+            <a:lvl1pPr indent="0" algn="r">
+              <a:lnSpc>
+                <a:spcPct val="100000"/>
+              </a:lnSpc>
+              <a:buNone/>
+              <a:tabLst>
+                <a:tab pos="0" algn="l"/>
+              </a:tabLst>
+              <a:defRPr lang="pt-BR" sz="1000" b="0" u="none" strike="noStrike">
+                <a:solidFill>
+                  <a:schemeClr val="dk2"/>
+                </a:solidFill>
+                <a:effectLst/>
+                <a:uFillTx/>
+                <a:latin typeface="Arial"/>
+                <a:ea typeface="Arial"/>
+              </a:defRPr>
+            </a:lvl1pPr>
+          </a:lstStyle>
+          <a:p>
+            <a:pPr indent="0" algn="r">
+              <a:lnSpc>
+                <a:spcPct val="100000"/>
+              </a:lnSpc>
+              <a:buNone/>
+              <a:tabLst>
+                <a:tab pos="0" algn="l"/>
+              </a:tabLst>
+            </a:pPr>
+            <a:fld id="{E8C3D2C4-6511-4CB9-8EBD-B2E501420431}" type="slidenum">
+              <a:rPr lang="pt-BR" sz="1000" b="0" u="none" strike="noStrike">
+                <a:solidFill>
+                  <a:schemeClr val="dk2"/>
+                </a:solidFill>
+                <a:effectLst/>
+                <a:uFillTx/>
+                <a:latin typeface="Arial"/>
+                <a:ea typeface="Arial"/>
+              </a:rPr>
+              <a:t>&lt;número&gt;</a:t>
+            </a:fld>
+            <a:endParaRPr lang="pt-BR" sz="1000" b="0" u="none" strike="noStrike">
+              <a:solidFill>
+                <a:srgbClr val="000000"/>
+              </a:solidFill>
+              <a:effectLst/>
+              <a:uFillTx/>
+              <a:latin typeface="Times New Roman"/>
+            </a:endParaRPr>
+          </a:p>
+        </p:txBody>
+      </p:sp>
+    </p:spTree>
+  </p:cSld>
+</p:sldLayout>
+</file>
+
+<file path=ppt/slideLayouts/slideLayout4.xml><?xml version="1.0" encoding="utf-8"?>
+<p:sldLayout xmlns:a="http://schemas.openxmlformats.org/drawingml/2006/main" xmlns:p="http://schemas.openxmlformats.org/presentationml/2006/main" xmlns:r="http://schemas.openxmlformats.org/officeDocument/2006/relationships" xmlns:p14="http://schemas.microsoft.com/office/powerpoint/2010/main" xmlns:p15="http://schemas.microsoft.com/office/powerpoint/2012/main" xmlns:mc="http://schemas.openxmlformats.org/markup-compatibility/2006" type="title" preserve="1">
+  <p:cSld name="TITLE">
+    <p:bg>
+      <p:bgPr>
+        <a:solidFill>
+          <a:schemeClr val="lt1"/>
+        </a:solidFill>
+      </p:bgPr>
+    </p:bg>
+    <p:spTree>
+      <p:nvGrpSpPr>
+        <p:cNvPr id="1" name=""/>
+        <p:cNvGrpSpPr/>
+        <p:nvPr/>
+      </p:nvGrpSpPr>
+      <p:grpSpPr>
+        <a:xfrm>
+          <a:off x="0" y="0"/>
+          <a:ext cx="0" cy="0"/>
+          <a:chOff x="0" y="0"/>
+          <a:chExt cx="0" cy="0"/>
+        </a:xfrm>
+      </p:grpSpPr>
+      <p:sp>
+        <p:nvSpPr>
+          <p:cNvPr id="10" name="PlaceHolder 1"/>
+          <p:cNvSpPr>
+            <a:spLocks noGrp="1"/>
+          </p:cNvSpPr>
+          <p:nvPr>
+            <p:ph type="title"/>
+          </p:nvPr>
+        </p:nvSpPr>
+        <p:spPr>
+          <a:xfrm>
+            <a:off x="311760" y="744480"/>
+            <a:ext cx="8519760" cy="2052000"/>
+          </a:xfrm>
+          <a:prstGeom prst="rect">
+            <a:avLst/>
+          </a:prstGeom>
+          <a:noFill/>
+          <a:ln w="0">
+            <a:noFill/>
+          </a:ln>
+        </p:spPr>
+        <p:txBody>
+          <a:bodyPr lIns="91440" tIns="91440" rIns="91440" bIns="91440" anchor="b">
+            <a:normAutofit/>
+          </a:bodyPr>
+          <a:lstStyle>
+            <a:lvl1pPr indent="0" algn="l">
+              <a:lnSpc>
+                <a:spcPct val="100000"/>
+              </a:lnSpc>
+              <a:buNone/>
+              <a:tabLst>
+                <a:tab pos="0" algn="l"/>
+              </a:tabLst>
+              <a:defRPr lang="pt-BR" sz="5200" b="0" u="none" strike="noStrike">
+                <a:solidFill>
+                  <a:srgbClr val="000000"/>
+                </a:solidFill>
+                <a:effectLst/>
+                <a:uFillTx/>
+                <a:latin typeface="Arial"/>
+              </a:defRPr>
+            </a:lvl1pPr>
+          </a:lstStyle>
+          <a:p>
+            <a:pPr indent="0" algn="l">
+              <a:lnSpc>
+                <a:spcPct val="100000"/>
+              </a:lnSpc>
+              <a:buNone/>
+              <a:tabLst>
+                <a:tab pos="0" algn="l"/>
+              </a:tabLst>
+            </a:pPr>
+            <a:r>
+              <a:rPr lang="pt-BR" sz="5200" b="0" u="none" strike="noStrike">
+                <a:solidFill>
+                  <a:srgbClr val="000000"/>
+                </a:solidFill>
+                <a:effectLst/>
+                <a:uFillTx/>
+                <a:latin typeface="Arial"/>
+              </a:rPr>
+              <a:t>Clique para editar o formato do texto do título</a:t>
+            </a:r>
+            <a:endParaRPr lang="pt-BR" sz="5200" b="0" u="none" strike="noStrike">
+              <a:solidFill>
+                <a:srgbClr val="000000"/>
+              </a:solidFill>
+              <a:effectLst/>
+              <a:uFillTx/>
+              <a:latin typeface="Arial"/>
+            </a:endParaRPr>
+          </a:p>
+        </p:txBody>
+      </p:sp>
+      <p:sp>
+        <p:nvSpPr>
+          <p:cNvPr id="11" name="PlaceHolder 2"/>
+          <p:cNvSpPr>
+            <a:spLocks noGrp="1"/>
+          </p:cNvSpPr>
+          <p:nvPr>
+            <p:ph type="sldNum" idx="4"/>
+          </p:nvPr>
+        </p:nvSpPr>
+        <p:spPr>
+          <a:xfrm>
+            <a:off x="8472600" y="4663080"/>
+            <a:ext cx="547920" cy="392760"/>
+          </a:xfrm>
+          <a:prstGeom prst="rect">
+            <a:avLst/>
+          </a:prstGeom>
+          <a:noFill/>
+          <a:ln w="0">
+            <a:noFill/>
+          </a:ln>
+        </p:spPr>
+        <p:txBody>
+          <a:bodyPr lIns="91440" tIns="91440" rIns="91440" bIns="91440" anchor="ctr">
+            <a:normAutofit/>
+          </a:bodyPr>
+          <a:lstStyle>
+            <a:lvl1pPr indent="0" algn="r">
+              <a:lnSpc>
+                <a:spcPct val="100000"/>
+              </a:lnSpc>
+              <a:buNone/>
+              <a:tabLst>
+                <a:tab pos="0" algn="l"/>
+              </a:tabLst>
+              <a:defRPr lang="pt-BR" sz="1000" b="0" u="none" strike="noStrike">
+                <a:solidFill>
+                  <a:schemeClr val="dk2"/>
+                </a:solidFill>
+                <a:effectLst/>
+                <a:uFillTx/>
+                <a:latin typeface="Arial"/>
+                <a:ea typeface="Arial"/>
+              </a:defRPr>
+            </a:lvl1pPr>
+          </a:lstStyle>
+          <a:p>
+            <a:pPr indent="0" algn="r">
+              <a:lnSpc>
+                <a:spcPct val="100000"/>
+              </a:lnSpc>
+              <a:buNone/>
+              <a:tabLst>
+                <a:tab pos="0" algn="l"/>
+              </a:tabLst>
+            </a:pPr>
+            <a:fld id="{15070338-258F-4B12-93D4-966A9FECF64B}" type="slidenum">
+              <a:rPr lang="pt-BR" sz="1000" b="0" u="none" strike="noStrike">
+                <a:solidFill>
+                  <a:schemeClr val="dk2"/>
+                </a:solidFill>
+                <a:effectLst/>
+                <a:uFillTx/>
+                <a:latin typeface="Arial"/>
+                <a:ea typeface="Arial"/>
+              </a:rPr>
+              <a:t>&lt;número&gt;</a:t>
+            </a:fld>
+            <a:endParaRPr lang="pt-BR" sz="1000" b="0" u="none" strike="noStrike">
+              <a:solidFill>
+                <a:srgbClr val="000000"/>
+              </a:solidFill>
+              <a:effectLst/>
+              <a:uFillTx/>
+              <a:latin typeface="Times New Roman"/>
+            </a:endParaRPr>
+          </a:p>
+        </p:txBody>
+      </p:sp>
+    </p:spTree>
+  </p:cSld>
+</p:sldLayout>
+</file>
+
+<file path=ppt/slideLayouts/slideLayout5.xml><?xml version="1.0" encoding="utf-8"?>
+<p:sldLayout xmlns:a="http://schemas.openxmlformats.org/drawingml/2006/main" xmlns:p="http://schemas.openxmlformats.org/presentationml/2006/main" xmlns:r="http://schemas.openxmlformats.org/officeDocument/2006/relationships" xmlns:p14="http://schemas.microsoft.com/office/powerpoint/2010/main" xmlns:p15="http://schemas.microsoft.com/office/powerpoint/2012/main" xmlns:mc="http://schemas.openxmlformats.org/markup-compatibility/2006" type="blank" preserve="1">
   <p:cSld name="BIG_NUMBER">
     <p:bg>
       <p:bgPr>
@@ -4070,7 +5169,7 @@
       </p:grpSpPr>
       <p:sp>
         <p:nvSpPr>
-          <p:cNvPr id="4" name="PlaceHolder 1"/>
+          <p:cNvPr id="12" name="PlaceHolder 1"/>
           <p:cNvSpPr>
             <a:spLocks noGrp="1"/>
           </p:cNvSpPr>
@@ -4081,7 +5180,7 @@
         <p:spPr>
           <a:xfrm>
             <a:off x="311760" y="1106280"/>
-            <a:ext cx="8520120" cy="1963080"/>
+            <a:ext cx="8519760" cy="1962720"/>
           </a:xfrm>
           <a:prstGeom prst="rect">
             <a:avLst/>
@@ -4101,6 +5200,9 @@
                 <a:spcPct val="100000"/>
               </a:lnSpc>
               <a:buNone/>
+              <a:tabLst>
+                <a:tab pos="0" algn="l"/>
+              </a:tabLst>
               <a:defRPr lang="pt-BR" sz="12000" b="0" u="none" strike="noStrike">
                 <a:solidFill>
                   <a:schemeClr val="dk1"/>
@@ -4118,6 +5220,9 @@
                 <a:spcPct val="100000"/>
               </a:lnSpc>
               <a:buNone/>
+              <a:tabLst>
+                <a:tab pos="0" algn="l"/>
+              </a:tabLst>
             </a:pPr>
             <a:r>
               <a:rPr lang="pt-BR" sz="12000" b="0" u="none" strike="noStrike">
@@ -4144,7 +5249,7 @@
       </p:sp>
       <p:sp>
         <p:nvSpPr>
-          <p:cNvPr id="5" name="PlaceHolder 2"/>
+          <p:cNvPr id="13" name="PlaceHolder 2"/>
           <p:cNvSpPr>
             <a:spLocks noGrp="1"/>
           </p:cNvSpPr>
@@ -4155,7 +5260,7 @@
         <p:spPr>
           <a:xfrm>
             <a:off x="311760" y="3152160"/>
-            <a:ext cx="8520120" cy="1300320"/>
+            <a:ext cx="8519760" cy="1299960"/>
           </a:xfrm>
           <a:prstGeom prst="rect">
             <a:avLst/>
@@ -4171,6 +5276,9 @@
           </a:bodyPr>
           <a:lstStyle>
             <a:lvl1pPr algn="l">
+              <a:lnSpc>
+                <a:spcPct val="100000"/>
+              </a:lnSpc>
               <a:spcBef>
                 <a:spcPts val="1417"/>
               </a:spcBef>
@@ -4190,6 +5298,9 @@
               </a:defRPr>
             </a:lvl1pPr>
             <a:lvl2pPr lvl="1" algn="l">
+              <a:lnSpc>
+                <a:spcPct val="100000"/>
+              </a:lnSpc>
               <a:spcBef>
                 <a:spcPts val="1134"/>
               </a:spcBef>
@@ -4209,6 +5320,9 @@
               </a:defRPr>
             </a:lvl2pPr>
             <a:lvl3pPr lvl="2" algn="l">
+              <a:lnSpc>
+                <a:spcPct val="100000"/>
+              </a:lnSpc>
               <a:spcBef>
                 <a:spcPts val="850"/>
               </a:spcBef>
@@ -4228,6 +5342,9 @@
               </a:defRPr>
             </a:lvl3pPr>
             <a:lvl4pPr lvl="3" algn="l">
+              <a:lnSpc>
+                <a:spcPct val="100000"/>
+              </a:lnSpc>
               <a:spcBef>
                 <a:spcPts val="567"/>
               </a:spcBef>
@@ -4247,6 +5364,9 @@
               </a:defRPr>
             </a:lvl4pPr>
             <a:lvl5pPr lvl="4" algn="l">
+              <a:lnSpc>
+                <a:spcPct val="100000"/>
+              </a:lnSpc>
               <a:spcBef>
                 <a:spcPts val="283"/>
               </a:spcBef>
@@ -4266,6 +5386,9 @@
               </a:defRPr>
             </a:lvl5pPr>
             <a:lvl6pPr lvl="5" algn="l">
+              <a:lnSpc>
+                <a:spcPct val="100000"/>
+              </a:lnSpc>
               <a:spcBef>
                 <a:spcPts val="283"/>
               </a:spcBef>
@@ -4285,6 +5408,9 @@
               </a:defRPr>
             </a:lvl6pPr>
             <a:lvl7pPr lvl="6" algn="l">
+              <a:lnSpc>
+                <a:spcPct val="100000"/>
+              </a:lnSpc>
               <a:spcBef>
                 <a:spcPts val="283"/>
               </a:spcBef>
@@ -4306,6 +5432,9 @@
           </a:lstStyle>
           <a:p>
             <a:pPr marL="457200" indent="-343080" algn="l">
+              <a:lnSpc>
+                <a:spcPct val="100000"/>
+              </a:lnSpc>
               <a:spcBef>
                 <a:spcPts val="1417"/>
               </a:spcBef>
@@ -4338,6 +5467,9 @@
           </a:p>
           <a:p>
             <a:pPr marL="914400" lvl="1" indent="-317520" algn="l">
+              <a:lnSpc>
+                <a:spcPct val="100000"/>
+              </a:lnSpc>
               <a:spcBef>
                 <a:spcPts val="1134"/>
               </a:spcBef>
@@ -4370,6 +5502,9 @@
           </a:p>
           <a:p>
             <a:pPr marL="1371600" lvl="2" indent="-317520" algn="l">
+              <a:lnSpc>
+                <a:spcPct val="100000"/>
+              </a:lnSpc>
               <a:spcBef>
                 <a:spcPts val="850"/>
               </a:spcBef>
@@ -4402,6 +5537,9 @@
           </a:p>
           <a:p>
             <a:pPr marL="1828800" lvl="3" indent="-317520" algn="l">
+              <a:lnSpc>
+                <a:spcPct val="100000"/>
+              </a:lnSpc>
               <a:spcBef>
                 <a:spcPts val="567"/>
               </a:spcBef>
@@ -4434,6 +5572,9 @@
           </a:p>
           <a:p>
             <a:pPr marL="2286000" lvl="4" indent="-317520" algn="l">
+              <a:lnSpc>
+                <a:spcPct val="100000"/>
+              </a:lnSpc>
               <a:spcBef>
                 <a:spcPts val="283"/>
               </a:spcBef>
@@ -4466,6 +5607,9 @@
           </a:p>
           <a:p>
             <a:pPr marL="2743200" lvl="5" indent="-317520" algn="l">
+              <a:lnSpc>
+                <a:spcPct val="100000"/>
+              </a:lnSpc>
               <a:spcBef>
                 <a:spcPts val="283"/>
               </a:spcBef>
@@ -4498,6 +5642,9 @@
           </a:p>
           <a:p>
             <a:pPr marL="3200400" lvl="6" indent="-317520" algn="l">
+              <a:lnSpc>
+                <a:spcPct val="100000"/>
+              </a:lnSpc>
               <a:spcBef>
                 <a:spcPts val="283"/>
               </a:spcBef>
@@ -4532,18 +5679,18 @@
       </p:sp>
       <p:sp>
         <p:nvSpPr>
-          <p:cNvPr id="6" name="PlaceHolder 3"/>
+          <p:cNvPr id="14" name="PlaceHolder 3"/>
           <p:cNvSpPr>
             <a:spLocks noGrp="1"/>
           </p:cNvSpPr>
           <p:nvPr>
-            <p:ph type="sldNum" idx="2"/>
+            <p:ph type="sldNum" idx="5"/>
           </p:nvPr>
         </p:nvSpPr>
         <p:spPr>
           <a:xfrm>
             <a:off x="8472600" y="4663080"/>
-            <a:ext cx="548280" cy="393120"/>
+            <a:ext cx="547920" cy="392760"/>
           </a:xfrm>
           <a:prstGeom prst="rect">
             <a:avLst/>
@@ -4587,7 +5734,7 @@
                 <a:tab pos="0" algn="l"/>
               </a:tabLst>
             </a:pPr>
-            <a:fld id="{7286D4F6-5E7D-4311-B772-D97306A74E11}" type="slidenum">
+            <a:fld id="{D3BFE720-3D06-42FA-B264-F854CCF21E58}" type="slidenum">
               <a:rPr lang="pt-BR" sz="1000" b="0" u="none" strike="noStrike">
                 <a:solidFill>
                   <a:schemeClr val="dk2"/>
@@ -4615,7 +5762,7 @@
 </p:sldLayout>
 </file>
 
-<file path=ppt/slideLayouts/slideLayout3.xml><?xml version="1.0" encoding="utf-8"?>
+<file path=ppt/slideLayouts/slideLayout6.xml><?xml version="1.0" encoding="utf-8"?>
 <p:sldLayout xmlns:a="http://schemas.openxmlformats.org/drawingml/2006/main" xmlns:p="http://schemas.openxmlformats.org/presentationml/2006/main" xmlns:r="http://schemas.openxmlformats.org/officeDocument/2006/relationships" xmlns:p14="http://schemas.microsoft.com/office/powerpoint/2010/main" xmlns:p15="http://schemas.microsoft.com/office/powerpoint/2012/main" xmlns:mc="http://schemas.openxmlformats.org/markup-compatibility/2006" type="blank" preserve="1">
   <p:cSld name="BLANK">
     <p:bg>
@@ -4641,18 +5788,18 @@
       </p:grpSpPr>
       <p:sp>
         <p:nvSpPr>
-          <p:cNvPr id="7" name="PlaceHolder 1"/>
+          <p:cNvPr id="15" name="PlaceHolder 1"/>
           <p:cNvSpPr>
             <a:spLocks noGrp="1"/>
           </p:cNvSpPr>
           <p:nvPr>
-            <p:ph type="sldNum" idx="3"/>
+            <p:ph type="sldNum" idx="6"/>
           </p:nvPr>
         </p:nvSpPr>
         <p:spPr>
           <a:xfrm>
             <a:off x="8472600" y="4663080"/>
-            <a:ext cx="548280" cy="393120"/>
+            <a:ext cx="547920" cy="392760"/>
           </a:xfrm>
           <a:prstGeom prst="rect">
             <a:avLst/>
@@ -4696,7 +5843,7 @@
                 <a:tab pos="0" algn="l"/>
               </a:tabLst>
             </a:pPr>
-            <a:fld id="{19D7DDA4-10A9-4E36-89E7-A78C5949BA30}" type="slidenum">
+            <a:fld id="{9B60FB1E-4F0F-476E-9489-0EE10282E31B}" type="slidenum">
               <a:rPr lang="pt-BR" sz="1000" b="0" u="none" strike="noStrike">
                 <a:solidFill>
                   <a:schemeClr val="dk2"/>
@@ -4724,7 +5871,7 @@
 </p:sldLayout>
 </file>
 
-<file path=ppt/slideLayouts/slideLayout4.xml><?xml version="1.0" encoding="utf-8"?>
+<file path=ppt/slideLayouts/slideLayout7.xml><?xml version="1.0" encoding="utf-8"?>
 <p:sldLayout xmlns:a="http://schemas.openxmlformats.org/drawingml/2006/main" xmlns:p="http://schemas.openxmlformats.org/presentationml/2006/main" xmlns:r="http://schemas.openxmlformats.org/officeDocument/2006/relationships" xmlns:p14="http://schemas.microsoft.com/office/powerpoint/2010/main" xmlns:p15="http://schemas.microsoft.com/office/powerpoint/2012/main" xmlns:mc="http://schemas.openxmlformats.org/markup-compatibility/2006" type="blank" preserve="1">
   <p:cSld name="SECTION_HEADER">
     <p:bg>
@@ -4750,7 +5897,7 @@
       </p:grpSpPr>
       <p:sp>
         <p:nvSpPr>
-          <p:cNvPr id="8" name="PlaceHolder 1"/>
+          <p:cNvPr id="16" name="PlaceHolder 1"/>
           <p:cNvSpPr>
             <a:spLocks noGrp="1"/>
           </p:cNvSpPr>
@@ -4761,7 +5908,7 @@
         <p:spPr>
           <a:xfrm>
             <a:off x="311760" y="2151000"/>
-            <a:ext cx="8520120" cy="841320"/>
+            <a:ext cx="8519760" cy="840960"/>
           </a:xfrm>
           <a:prstGeom prst="rect">
             <a:avLst/>
@@ -4777,7 +5924,13 @@
           </a:bodyPr>
           <a:lstStyle>
             <a:lvl1pPr indent="0" algn="l">
+              <a:lnSpc>
+                <a:spcPct val="100000"/>
+              </a:lnSpc>
               <a:buNone/>
+              <a:tabLst>
+                <a:tab pos="0" algn="l"/>
+              </a:tabLst>
               <a:defRPr lang="pt-BR" sz="3600" b="0" u="none" strike="noStrike">
                 <a:solidFill>
                   <a:srgbClr val="000000"/>
@@ -4790,7 +5943,13 @@
           </a:lstStyle>
           <a:p>
             <a:pPr indent="0" algn="l">
+              <a:lnSpc>
+                <a:spcPct val="100000"/>
+              </a:lnSpc>
               <a:buNone/>
+              <a:tabLst>
+                <a:tab pos="0" algn="l"/>
+              </a:tabLst>
             </a:pPr>
             <a:r>
               <a:rPr lang="pt-BR" sz="3600" b="0" u="none" strike="noStrike">
@@ -4816,18 +5975,18 @@
       </p:sp>
       <p:sp>
         <p:nvSpPr>
-          <p:cNvPr id="9" name="PlaceHolder 2"/>
+          <p:cNvPr id="17" name="PlaceHolder 2"/>
           <p:cNvSpPr>
             <a:spLocks noGrp="1"/>
           </p:cNvSpPr>
           <p:nvPr>
-            <p:ph type="sldNum" idx="4"/>
+            <p:ph type="sldNum" idx="7"/>
           </p:nvPr>
         </p:nvSpPr>
         <p:spPr>
           <a:xfrm>
             <a:off x="8472600" y="4663080"/>
-            <a:ext cx="548280" cy="393120"/>
+            <a:ext cx="547920" cy="392760"/>
           </a:xfrm>
           <a:prstGeom prst="rect">
             <a:avLst/>
@@ -4871,7 +6030,7 @@
                 <a:tab pos="0" algn="l"/>
               </a:tabLst>
             </a:pPr>
-            <a:fld id="{878DCA86-11F4-4826-836D-EECC8345C731}" type="slidenum">
+            <a:fld id="{E5D9C3D7-64B9-47AE-A42D-600115BD4D6A}" type="slidenum">
               <a:rPr lang="pt-BR" sz="1000" b="0" u="none" strike="noStrike">
                 <a:solidFill>
                   <a:schemeClr val="dk2"/>
@@ -4899,7 +6058,7 @@
 </p:sldLayout>
 </file>
 
-<file path=ppt/slideLayouts/slideLayout5.xml><?xml version="1.0" encoding="utf-8"?>
+<file path=ppt/slideLayouts/slideLayout8.xml><?xml version="1.0" encoding="utf-8"?>
 <p:sldLayout xmlns:a="http://schemas.openxmlformats.org/drawingml/2006/main" xmlns:p="http://schemas.openxmlformats.org/presentationml/2006/main" xmlns:r="http://schemas.openxmlformats.org/officeDocument/2006/relationships" xmlns:p14="http://schemas.microsoft.com/office/powerpoint/2010/main" xmlns:p15="http://schemas.microsoft.com/office/powerpoint/2012/main" xmlns:mc="http://schemas.openxmlformats.org/markup-compatibility/2006" type="tx" preserve="1">
   <p:cSld name="TITLE_AND_BODY">
     <p:bg>
@@ -4925,7 +6084,7 @@
       </p:grpSpPr>
       <p:sp>
         <p:nvSpPr>
-          <p:cNvPr id="10" name="PlaceHolder 1"/>
+          <p:cNvPr id="18" name="PlaceHolder 1"/>
           <p:cNvSpPr>
             <a:spLocks noGrp="1"/>
           </p:cNvSpPr>
@@ -4936,7 +6095,7 @@
         <p:spPr>
           <a:xfrm>
             <a:off x="311760" y="444960"/>
-            <a:ext cx="8520120" cy="572400"/>
+            <a:ext cx="8519760" cy="572040"/>
           </a:xfrm>
           <a:prstGeom prst="rect">
             <a:avLst/>
@@ -4952,7 +6111,13 @@
           </a:bodyPr>
           <a:lstStyle>
             <a:lvl1pPr indent="0" algn="l">
+              <a:lnSpc>
+                <a:spcPct val="100000"/>
+              </a:lnSpc>
               <a:buNone/>
+              <a:tabLst>
+                <a:tab pos="0" algn="l"/>
+              </a:tabLst>
               <a:defRPr lang="pt-BR" sz="2800" b="0" u="none" strike="noStrike">
                 <a:solidFill>
                   <a:srgbClr val="000000"/>
@@ -4965,7 +6130,13 @@
           </a:lstStyle>
           <a:p>
             <a:pPr indent="0" algn="l">
+              <a:lnSpc>
+                <a:spcPct val="100000"/>
+              </a:lnSpc>
               <a:buNone/>
+              <a:tabLst>
+                <a:tab pos="0" algn="l"/>
+              </a:tabLst>
             </a:pPr>
             <a:r>
               <a:rPr lang="pt-BR" sz="2800" b="0" u="none" strike="noStrike">
@@ -4991,7 +6162,7 @@
       </p:sp>
       <p:sp>
         <p:nvSpPr>
-          <p:cNvPr id="11" name="PlaceHolder 2"/>
+          <p:cNvPr id="19" name="PlaceHolder 2"/>
           <p:cNvSpPr>
             <a:spLocks noGrp="1"/>
           </p:cNvSpPr>
@@ -5002,7 +6173,7 @@
         <p:spPr>
           <a:xfrm>
             <a:off x="311760" y="1152360"/>
-            <a:ext cx="8520120" cy="3416040"/>
+            <a:ext cx="8519760" cy="3415680"/>
           </a:xfrm>
           <a:prstGeom prst="rect">
             <a:avLst/>
@@ -5018,6 +6189,9 @@
           </a:bodyPr>
           <a:lstStyle>
             <a:lvl1pPr algn="l">
+              <a:lnSpc>
+                <a:spcPct val="100000"/>
+              </a:lnSpc>
               <a:spcBef>
                 <a:spcPts val="1417"/>
               </a:spcBef>
@@ -5037,6 +6211,9 @@
               </a:defRPr>
             </a:lvl1pPr>
             <a:lvl2pPr lvl="1" algn="l">
+              <a:lnSpc>
+                <a:spcPct val="100000"/>
+              </a:lnSpc>
               <a:spcBef>
                 <a:spcPts val="1134"/>
               </a:spcBef>
@@ -5056,6 +6233,9 @@
               </a:defRPr>
             </a:lvl2pPr>
             <a:lvl3pPr lvl="2" algn="l">
+              <a:lnSpc>
+                <a:spcPct val="100000"/>
+              </a:lnSpc>
               <a:spcBef>
                 <a:spcPts val="850"/>
               </a:spcBef>
@@ -5075,6 +6255,9 @@
               </a:defRPr>
             </a:lvl3pPr>
             <a:lvl4pPr lvl="3" algn="l">
+              <a:lnSpc>
+                <a:spcPct val="100000"/>
+              </a:lnSpc>
               <a:spcBef>
                 <a:spcPts val="567"/>
               </a:spcBef>
@@ -5094,6 +6277,9 @@
               </a:defRPr>
             </a:lvl4pPr>
             <a:lvl5pPr lvl="4" algn="l">
+              <a:lnSpc>
+                <a:spcPct val="100000"/>
+              </a:lnSpc>
               <a:spcBef>
                 <a:spcPts val="283"/>
               </a:spcBef>
@@ -5113,6 +6299,9 @@
               </a:defRPr>
             </a:lvl5pPr>
             <a:lvl6pPr lvl="5" algn="l">
+              <a:lnSpc>
+                <a:spcPct val="100000"/>
+              </a:lnSpc>
               <a:spcBef>
                 <a:spcPts val="283"/>
               </a:spcBef>
@@ -5132,6 +6321,9 @@
               </a:defRPr>
             </a:lvl6pPr>
             <a:lvl7pPr lvl="6" algn="l">
+              <a:lnSpc>
+                <a:spcPct val="100000"/>
+              </a:lnSpc>
               <a:spcBef>
                 <a:spcPts val="283"/>
               </a:spcBef>
@@ -5153,6 +6345,9 @@
           </a:lstStyle>
           <a:p>
             <a:pPr marL="457200" indent="-343080" algn="l">
+              <a:lnSpc>
+                <a:spcPct val="100000"/>
+              </a:lnSpc>
               <a:spcBef>
                 <a:spcPts val="1417"/>
               </a:spcBef>
@@ -5185,6 +6380,9 @@
           </a:p>
           <a:p>
             <a:pPr marL="914400" lvl="1" indent="-317520" algn="l">
+              <a:lnSpc>
+                <a:spcPct val="100000"/>
+              </a:lnSpc>
               <a:spcBef>
                 <a:spcPts val="1134"/>
               </a:spcBef>
@@ -5217,6 +6415,9 @@
           </a:p>
           <a:p>
             <a:pPr marL="1371600" lvl="2" indent="-317520" algn="l">
+              <a:lnSpc>
+                <a:spcPct val="100000"/>
+              </a:lnSpc>
               <a:spcBef>
                 <a:spcPts val="850"/>
               </a:spcBef>
@@ -5249,6 +6450,9 @@
           </a:p>
           <a:p>
             <a:pPr marL="1828800" lvl="3" indent="-317520" algn="l">
+              <a:lnSpc>
+                <a:spcPct val="100000"/>
+              </a:lnSpc>
               <a:spcBef>
                 <a:spcPts val="567"/>
               </a:spcBef>
@@ -5281,6 +6485,9 @@
           </a:p>
           <a:p>
             <a:pPr marL="2286000" lvl="4" indent="-317520" algn="l">
+              <a:lnSpc>
+                <a:spcPct val="100000"/>
+              </a:lnSpc>
               <a:spcBef>
                 <a:spcPts val="283"/>
               </a:spcBef>
@@ -5313,6 +6520,9 @@
           </a:p>
           <a:p>
             <a:pPr marL="2743200" lvl="5" indent="-317520" algn="l">
+              <a:lnSpc>
+                <a:spcPct val="100000"/>
+              </a:lnSpc>
               <a:spcBef>
                 <a:spcPts val="283"/>
               </a:spcBef>
@@ -5345,6 +6555,9 @@
           </a:p>
           <a:p>
             <a:pPr marL="3200400" lvl="6" indent="-317520" algn="l">
+              <a:lnSpc>
+                <a:spcPct val="100000"/>
+              </a:lnSpc>
               <a:spcBef>
                 <a:spcPts val="283"/>
               </a:spcBef>
@@ -5379,18 +6592,18 @@
       </p:sp>
       <p:sp>
         <p:nvSpPr>
-          <p:cNvPr id="12" name="PlaceHolder 3"/>
+          <p:cNvPr id="20" name="PlaceHolder 3"/>
           <p:cNvSpPr>
             <a:spLocks noGrp="1"/>
           </p:cNvSpPr>
           <p:nvPr>
-            <p:ph type="sldNum" idx="5"/>
+            <p:ph type="sldNum" idx="8"/>
           </p:nvPr>
         </p:nvSpPr>
         <p:spPr>
           <a:xfrm>
             <a:off x="8472600" y="4663080"/>
-            <a:ext cx="548280" cy="393120"/>
+            <a:ext cx="547920" cy="392760"/>
           </a:xfrm>
           <a:prstGeom prst="rect">
             <a:avLst/>
@@ -5434,7 +6647,7 @@
                 <a:tab pos="0" algn="l"/>
               </a:tabLst>
             </a:pPr>
-            <a:fld id="{CE4DA9B4-2B4A-4568-A4D1-93063C2CA93C}" type="slidenum">
+            <a:fld id="{FB2018E0-E822-4870-91F6-E8C3CB6DB68E}" type="slidenum">
               <a:rPr lang="pt-BR" sz="1000" b="0" u="none" strike="noStrike">
                 <a:solidFill>
                   <a:schemeClr val="dk2"/>
@@ -5462,7 +6675,7 @@
 </p:sldLayout>
 </file>
 
-<file path=ppt/slideLayouts/slideLayout6.xml><?xml version="1.0" encoding="utf-8"?>
+<file path=ppt/slideLayouts/slideLayout9.xml><?xml version="1.0" encoding="utf-8"?>
 <p:sldLayout xmlns:a="http://schemas.openxmlformats.org/drawingml/2006/main" xmlns:p="http://schemas.openxmlformats.org/presentationml/2006/main" xmlns:r="http://schemas.openxmlformats.org/officeDocument/2006/relationships" xmlns:p14="http://schemas.microsoft.com/office/powerpoint/2010/main" xmlns:p15="http://schemas.microsoft.com/office/powerpoint/2012/main" xmlns:mc="http://schemas.openxmlformats.org/markup-compatibility/2006" type="twoObj" preserve="1">
   <p:cSld name="TITLE_AND_TWO_COLUMNS">
     <p:bg>
@@ -5488,7 +6701,7 @@
       </p:grpSpPr>
       <p:sp>
         <p:nvSpPr>
-          <p:cNvPr id="13" name="PlaceHolder 1"/>
+          <p:cNvPr id="21" name="PlaceHolder 1"/>
           <p:cNvSpPr>
             <a:spLocks noGrp="1"/>
           </p:cNvSpPr>
@@ -5499,7 +6712,7 @@
         <p:spPr>
           <a:xfrm>
             <a:off x="311760" y="444960"/>
-            <a:ext cx="8520120" cy="572400"/>
+            <a:ext cx="8519760" cy="572040"/>
           </a:xfrm>
           <a:prstGeom prst="rect">
             <a:avLst/>
@@ -5515,7 +6728,13 @@
           </a:bodyPr>
           <a:lstStyle>
             <a:lvl1pPr indent="0" algn="l">
+              <a:lnSpc>
+                <a:spcPct val="100000"/>
+              </a:lnSpc>
               <a:buNone/>
+              <a:tabLst>
+                <a:tab pos="0" algn="l"/>
+              </a:tabLst>
               <a:defRPr lang="pt-BR" sz="2800" b="0" u="none" strike="noStrike">
                 <a:solidFill>
                   <a:srgbClr val="000000"/>
@@ -5528,7 +6747,13 @@
           </a:lstStyle>
           <a:p>
             <a:pPr indent="0" algn="l">
+              <a:lnSpc>
+                <a:spcPct val="100000"/>
+              </a:lnSpc>
               <a:buNone/>
+              <a:tabLst>
+                <a:tab pos="0" algn="l"/>
+              </a:tabLst>
             </a:pPr>
             <a:r>
               <a:rPr lang="pt-BR" sz="2800" b="0" u="none" strike="noStrike">
@@ -5554,7 +6779,7 @@
       </p:sp>
       <p:sp>
         <p:nvSpPr>
-          <p:cNvPr id="14" name="PlaceHolder 2"/>
+          <p:cNvPr id="22" name="PlaceHolder 2"/>
           <p:cNvSpPr>
             <a:spLocks noGrp="1"/>
           </p:cNvSpPr>
@@ -5565,7 +6790,7 @@
         <p:spPr>
           <a:xfrm>
             <a:off x="311760" y="1152360"/>
-            <a:ext cx="3999600" cy="3416040"/>
+            <a:ext cx="3999240" cy="3415680"/>
           </a:xfrm>
           <a:prstGeom prst="rect">
             <a:avLst/>
@@ -5581,6 +6806,9 @@
           </a:bodyPr>
           <a:lstStyle>
             <a:lvl1pPr algn="l">
+              <a:lnSpc>
+                <a:spcPct val="100000"/>
+              </a:lnSpc>
               <a:spcBef>
                 <a:spcPts val="1417"/>
               </a:spcBef>
@@ -5600,6 +6828,9 @@
               </a:defRPr>
             </a:lvl1pPr>
             <a:lvl2pPr lvl="1" algn="l">
+              <a:lnSpc>
+                <a:spcPct val="100000"/>
+              </a:lnSpc>
               <a:spcBef>
                 <a:spcPts val="1134"/>
               </a:spcBef>
@@ -5619,6 +6850,9 @@
               </a:defRPr>
             </a:lvl2pPr>
             <a:lvl3pPr lvl="2" algn="l">
+              <a:lnSpc>
+                <a:spcPct val="100000"/>
+              </a:lnSpc>
               <a:spcBef>
                 <a:spcPts val="850"/>
               </a:spcBef>
@@ -5638,6 +6872,9 @@
               </a:defRPr>
             </a:lvl3pPr>
             <a:lvl4pPr lvl="3" algn="l">
+              <a:lnSpc>
+                <a:spcPct val="100000"/>
+              </a:lnSpc>
               <a:spcBef>
                 <a:spcPts val="567"/>
               </a:spcBef>
@@ -5657,6 +6894,9 @@
               </a:defRPr>
             </a:lvl4pPr>
             <a:lvl5pPr lvl="4" algn="l">
+              <a:lnSpc>
+                <a:spcPct val="100000"/>
+              </a:lnSpc>
               <a:spcBef>
                 <a:spcPts val="283"/>
               </a:spcBef>
@@ -5676,6 +6916,9 @@
               </a:defRPr>
             </a:lvl5pPr>
             <a:lvl6pPr lvl="5" algn="l">
+              <a:lnSpc>
+                <a:spcPct val="100000"/>
+              </a:lnSpc>
               <a:spcBef>
                 <a:spcPts val="283"/>
               </a:spcBef>
@@ -5695,6 +6938,9 @@
               </a:defRPr>
             </a:lvl6pPr>
             <a:lvl7pPr lvl="6" algn="l">
+              <a:lnSpc>
+                <a:spcPct val="100000"/>
+              </a:lnSpc>
               <a:spcBef>
                 <a:spcPts val="283"/>
               </a:spcBef>
@@ -5716,6 +6962,9 @@
           </a:lstStyle>
           <a:p>
             <a:pPr marL="457200" indent="-317520" algn="l">
+              <a:lnSpc>
+                <a:spcPct val="100000"/>
+              </a:lnSpc>
               <a:spcBef>
                 <a:spcPts val="1417"/>
               </a:spcBef>
@@ -5748,6 +6997,9 @@
           </a:p>
           <a:p>
             <a:pPr marL="914400" lvl="1" indent="-304920" algn="l">
+              <a:lnSpc>
+                <a:spcPct val="100000"/>
+              </a:lnSpc>
               <a:spcBef>
                 <a:spcPts val="1134"/>
               </a:spcBef>
@@ -5780,6 +7032,9 @@
           </a:p>
           <a:p>
             <a:pPr marL="1371600" lvl="2" indent="-304920" algn="l">
+              <a:lnSpc>
+                <a:spcPct val="100000"/>
+              </a:lnSpc>
               <a:spcBef>
                 <a:spcPts val="850"/>
               </a:spcBef>
@@ -5812,6 +7067,9 @@
           </a:p>
           <a:p>
             <a:pPr marL="1828800" lvl="3" indent="-304920" algn="l">
+              <a:lnSpc>
+                <a:spcPct val="100000"/>
+              </a:lnSpc>
               <a:spcBef>
                 <a:spcPts val="567"/>
               </a:spcBef>
@@ -5844,6 +7102,9 @@
           </a:p>
           <a:p>
             <a:pPr marL="2286000" lvl="4" indent="-304920" algn="l">
+              <a:lnSpc>
+                <a:spcPct val="100000"/>
+              </a:lnSpc>
               <a:spcBef>
                 <a:spcPts val="283"/>
               </a:spcBef>
@@ -5876,6 +7137,9 @@
           </a:p>
           <a:p>
             <a:pPr marL="2743200" lvl="5" indent="-304920" algn="l">
+              <a:lnSpc>
+                <a:spcPct val="100000"/>
+              </a:lnSpc>
               <a:spcBef>
                 <a:spcPts val="283"/>
               </a:spcBef>
@@ -5908,6 +7172,9 @@
           </a:p>
           <a:p>
             <a:pPr marL="3200400" lvl="6" indent="-304920" algn="l">
+              <a:lnSpc>
+                <a:spcPct val="100000"/>
+              </a:lnSpc>
               <a:spcBef>
                 <a:spcPts val="283"/>
               </a:spcBef>
@@ -5942,7 +7209,7 @@
       </p:sp>
       <p:sp>
         <p:nvSpPr>
-          <p:cNvPr id="15" name="PlaceHolder 3"/>
+          <p:cNvPr id="23" name="PlaceHolder 3"/>
           <p:cNvSpPr>
             <a:spLocks noGrp="1"/>
           </p:cNvSpPr>
@@ -5953,7 +7220,7 @@
         <p:spPr>
           <a:xfrm>
             <a:off x="4832280" y="1152360"/>
-            <a:ext cx="3999600" cy="3416040"/>
+            <a:ext cx="3999240" cy="3415680"/>
           </a:xfrm>
           <a:prstGeom prst="rect">
             <a:avLst/>
@@ -5969,6 +7236,9 @@
           </a:bodyPr>
           <a:lstStyle>
             <a:lvl1pPr algn="l">
+              <a:lnSpc>
+                <a:spcPct val="100000"/>
+              </a:lnSpc>
               <a:spcBef>
                 <a:spcPts val="1417"/>
               </a:spcBef>
@@ -5988,6 +7258,9 @@
               </a:defRPr>
             </a:lvl1pPr>
             <a:lvl2pPr lvl="1" algn="l">
+              <a:lnSpc>
+                <a:spcPct val="100000"/>
+              </a:lnSpc>
               <a:spcBef>
                 <a:spcPts val="1134"/>
               </a:spcBef>
@@ -6007,6 +7280,9 @@
               </a:defRPr>
             </a:lvl2pPr>
             <a:lvl3pPr lvl="2" algn="l">
+              <a:lnSpc>
+                <a:spcPct val="100000"/>
+              </a:lnSpc>
               <a:spcBef>
                 <a:spcPts val="850"/>
               </a:spcBef>
@@ -6026,6 +7302,9 @@
               </a:defRPr>
             </a:lvl3pPr>
             <a:lvl4pPr lvl="3" algn="l">
+              <a:lnSpc>
+                <a:spcPct val="100000"/>
+              </a:lnSpc>
               <a:spcBef>
                 <a:spcPts val="567"/>
               </a:spcBef>
@@ -6045,6 +7324,9 @@
               </a:defRPr>
             </a:lvl4pPr>
             <a:lvl5pPr lvl="4" algn="l">
+              <a:lnSpc>
+                <a:spcPct val="100000"/>
+              </a:lnSpc>
               <a:spcBef>
                 <a:spcPts val="283"/>
               </a:spcBef>
@@ -6064,6 +7346,9 @@
               </a:defRPr>
             </a:lvl5pPr>
             <a:lvl6pPr lvl="5" algn="l">
+              <a:lnSpc>
+                <a:spcPct val="100000"/>
+              </a:lnSpc>
               <a:spcBef>
                 <a:spcPts val="283"/>
               </a:spcBef>
@@ -6083,6 +7368,9 @@
               </a:defRPr>
             </a:lvl6pPr>
             <a:lvl7pPr lvl="6" algn="l">
+              <a:lnSpc>
+                <a:spcPct val="100000"/>
+              </a:lnSpc>
               <a:spcBef>
                 <a:spcPts val="283"/>
               </a:spcBef>
@@ -6104,6 +7392,9 @@
           </a:lstStyle>
           <a:p>
             <a:pPr marL="457200" indent="-317520" algn="l">
+              <a:lnSpc>
+                <a:spcPct val="100000"/>
+              </a:lnSpc>
               <a:spcBef>
                 <a:spcPts val="1417"/>
               </a:spcBef>
@@ -6136,6 +7427,9 @@
           </a:p>
           <a:p>
             <a:pPr marL="914400" lvl="1" indent="-304920" algn="l">
+              <a:lnSpc>
+                <a:spcPct val="100000"/>
+              </a:lnSpc>
               <a:spcBef>
                 <a:spcPts val="1134"/>
               </a:spcBef>
@@ -6168,6 +7462,9 @@
           </a:p>
           <a:p>
             <a:pPr marL="1371600" lvl="2" indent="-304920" algn="l">
+              <a:lnSpc>
+                <a:spcPct val="100000"/>
+              </a:lnSpc>
               <a:spcBef>
                 <a:spcPts val="850"/>
               </a:spcBef>
@@ -6200,6 +7497,9 @@
           </a:p>
           <a:p>
             <a:pPr marL="1828800" lvl="3" indent="-304920" algn="l">
+              <a:lnSpc>
+                <a:spcPct val="100000"/>
+              </a:lnSpc>
               <a:spcBef>
                 <a:spcPts val="567"/>
               </a:spcBef>
@@ -6232,6 +7532,9 @@
           </a:p>
           <a:p>
             <a:pPr marL="2286000" lvl="4" indent="-304920" algn="l">
+              <a:lnSpc>
+                <a:spcPct val="100000"/>
+              </a:lnSpc>
               <a:spcBef>
                 <a:spcPts val="283"/>
               </a:spcBef>
@@ -6264,6 +7567,9 @@
           </a:p>
           <a:p>
             <a:pPr marL="2743200" lvl="5" indent="-304920" algn="l">
+              <a:lnSpc>
+                <a:spcPct val="100000"/>
+              </a:lnSpc>
               <a:spcBef>
                 <a:spcPts val="283"/>
               </a:spcBef>
@@ -6296,6 +7602,9 @@
           </a:p>
           <a:p>
             <a:pPr marL="3200400" lvl="6" indent="-304920" algn="l">
+              <a:lnSpc>
+                <a:spcPct val="100000"/>
+              </a:lnSpc>
               <a:spcBef>
                 <a:spcPts val="283"/>
               </a:spcBef>
@@ -6330,920 +7639,7 @@
       </p:sp>
       <p:sp>
         <p:nvSpPr>
-          <p:cNvPr id="16" name="PlaceHolder 4"/>
-          <p:cNvSpPr>
-            <a:spLocks noGrp="1"/>
-          </p:cNvSpPr>
-          <p:nvPr>
-            <p:ph type="sldNum" idx="6"/>
-          </p:nvPr>
-        </p:nvSpPr>
-        <p:spPr>
-          <a:xfrm>
-            <a:off x="8472600" y="4663080"/>
-            <a:ext cx="548280" cy="393120"/>
-          </a:xfrm>
-          <a:prstGeom prst="rect">
-            <a:avLst/>
-          </a:prstGeom>
-          <a:noFill/>
-          <a:ln w="0">
-            <a:noFill/>
-          </a:ln>
-        </p:spPr>
-        <p:txBody>
-          <a:bodyPr lIns="91440" tIns="91440" rIns="91440" bIns="91440" anchor="ctr">
-            <a:normAutofit/>
-          </a:bodyPr>
-          <a:lstStyle>
-            <a:lvl1pPr indent="0" algn="r">
-              <a:lnSpc>
-                <a:spcPct val="100000"/>
-              </a:lnSpc>
-              <a:buNone/>
-              <a:tabLst>
-                <a:tab pos="0" algn="l"/>
-              </a:tabLst>
-              <a:defRPr lang="pt-BR" sz="1000" b="0" u="none" strike="noStrike">
-                <a:solidFill>
-                  <a:schemeClr val="dk2"/>
-                </a:solidFill>
-                <a:effectLst/>
-                <a:uFillTx/>
-                <a:latin typeface="Arial"/>
-                <a:ea typeface="Arial"/>
-              </a:defRPr>
-            </a:lvl1pPr>
-          </a:lstStyle>
-          <a:p>
-            <a:pPr indent="0" algn="r">
-              <a:lnSpc>
-                <a:spcPct val="100000"/>
-              </a:lnSpc>
-              <a:buNone/>
-              <a:tabLst>
-                <a:tab pos="0" algn="l"/>
-              </a:tabLst>
-            </a:pPr>
-            <a:fld id="{F2EC418C-F2F7-4BFB-925C-2420FD17A25C}" type="slidenum">
-              <a:rPr lang="pt-BR" sz="1000" b="0" u="none" strike="noStrike">
-                <a:solidFill>
-                  <a:schemeClr val="dk2"/>
-                </a:solidFill>
-                <a:effectLst/>
-                <a:uFillTx/>
-                <a:latin typeface="Arial"/>
-                <a:ea typeface="Arial"/>
-              </a:rPr>
-              <a:t>&lt;número&gt;</a:t>
-            </a:fld>
-            <a:endParaRPr lang="pt-BR" sz="1000" b="0" u="none" strike="noStrike">
-              <a:solidFill>
-                <a:srgbClr val="000000"/>
-              </a:solidFill>
-              <a:effectLst/>
-              <a:uFillTx/>
-              <a:latin typeface="Times New Roman"/>
-            </a:endParaRPr>
-          </a:p>
-        </p:txBody>
-      </p:sp>
-    </p:spTree>
-  </p:cSld>
-</p:sldLayout>
-</file>
-
-<file path=ppt/slideLayouts/slideLayout7.xml><?xml version="1.0" encoding="utf-8"?>
-<p:sldLayout xmlns:a="http://schemas.openxmlformats.org/drawingml/2006/main" xmlns:p="http://schemas.openxmlformats.org/presentationml/2006/main" xmlns:r="http://schemas.openxmlformats.org/officeDocument/2006/relationships" xmlns:p14="http://schemas.microsoft.com/office/powerpoint/2010/main" xmlns:p15="http://schemas.microsoft.com/office/powerpoint/2012/main" xmlns:mc="http://schemas.openxmlformats.org/markup-compatibility/2006" type="titleOnly" preserve="1">
-  <p:cSld name="TITLE_ONLY">
-    <p:bg>
-      <p:bgPr>
-        <a:solidFill>
-          <a:schemeClr val="lt1"/>
-        </a:solidFill>
-      </p:bgPr>
-    </p:bg>
-    <p:spTree>
-      <p:nvGrpSpPr>
-        <p:cNvPr id="1" name=""/>
-        <p:cNvGrpSpPr/>
-        <p:nvPr/>
-      </p:nvGrpSpPr>
-      <p:grpSpPr>
-        <a:xfrm>
-          <a:off x="0" y="0"/>
-          <a:ext cx="0" cy="0"/>
-          <a:chOff x="0" y="0"/>
-          <a:chExt cx="0" cy="0"/>
-        </a:xfrm>
-      </p:grpSpPr>
-      <p:sp>
-        <p:nvSpPr>
-          <p:cNvPr id="17" name="PlaceHolder 1"/>
-          <p:cNvSpPr>
-            <a:spLocks noGrp="1"/>
-          </p:cNvSpPr>
-          <p:nvPr>
-            <p:ph type="title"/>
-          </p:nvPr>
-        </p:nvSpPr>
-        <p:spPr>
-          <a:xfrm>
-            <a:off x="311760" y="444960"/>
-            <a:ext cx="8520120" cy="572400"/>
-          </a:xfrm>
-          <a:prstGeom prst="rect">
-            <a:avLst/>
-          </a:prstGeom>
-          <a:noFill/>
-          <a:ln w="0">
-            <a:noFill/>
-          </a:ln>
-        </p:spPr>
-        <p:txBody>
-          <a:bodyPr lIns="91440" tIns="91440" rIns="91440" bIns="91440" anchor="t">
-            <a:normAutofit lnSpcReduction="9999"/>
-          </a:bodyPr>
-          <a:lstStyle>
-            <a:lvl1pPr indent="0" algn="l">
-              <a:buNone/>
-              <a:defRPr lang="pt-BR" sz="2800" b="0" u="none" strike="noStrike">
-                <a:solidFill>
-                  <a:srgbClr val="000000"/>
-                </a:solidFill>
-                <a:effectLst/>
-                <a:uFillTx/>
-                <a:latin typeface="Arial"/>
-              </a:defRPr>
-            </a:lvl1pPr>
-          </a:lstStyle>
-          <a:p>
-            <a:pPr indent="0" algn="l">
-              <a:buNone/>
-            </a:pPr>
-            <a:r>
-              <a:rPr lang="pt-BR" sz="2800" b="0" u="none" strike="noStrike">
-                <a:solidFill>
-                  <a:srgbClr val="000000"/>
-                </a:solidFill>
-                <a:effectLst/>
-                <a:uFillTx/>
-                <a:latin typeface="Arial"/>
-              </a:rPr>
-              <a:t>Clique para editar o formato do texto do título</a:t>
-            </a:r>
-            <a:endParaRPr lang="pt-BR" sz="2800" b="0" u="none" strike="noStrike">
-              <a:solidFill>
-                <a:srgbClr val="000000"/>
-              </a:solidFill>
-              <a:effectLst/>
-              <a:uFillTx/>
-              <a:latin typeface="Arial"/>
-            </a:endParaRPr>
-          </a:p>
-        </p:txBody>
-      </p:sp>
-      <p:sp>
-        <p:nvSpPr>
-          <p:cNvPr id="18" name="PlaceHolder 2"/>
-          <p:cNvSpPr>
-            <a:spLocks noGrp="1"/>
-          </p:cNvSpPr>
-          <p:nvPr>
-            <p:ph type="sldNum" idx="7"/>
-          </p:nvPr>
-        </p:nvSpPr>
-        <p:spPr>
-          <a:xfrm>
-            <a:off x="8472600" y="4663080"/>
-            <a:ext cx="548280" cy="393120"/>
-          </a:xfrm>
-          <a:prstGeom prst="rect">
-            <a:avLst/>
-          </a:prstGeom>
-          <a:noFill/>
-          <a:ln w="0">
-            <a:noFill/>
-          </a:ln>
-        </p:spPr>
-        <p:txBody>
-          <a:bodyPr lIns="91440" tIns="91440" rIns="91440" bIns="91440" anchor="ctr">
-            <a:normAutofit/>
-          </a:bodyPr>
-          <a:lstStyle>
-            <a:lvl1pPr indent="0" algn="r">
-              <a:lnSpc>
-                <a:spcPct val="100000"/>
-              </a:lnSpc>
-              <a:buNone/>
-              <a:tabLst>
-                <a:tab pos="0" algn="l"/>
-              </a:tabLst>
-              <a:defRPr lang="pt-BR" sz="1000" b="0" u="none" strike="noStrike">
-                <a:solidFill>
-                  <a:schemeClr val="dk2"/>
-                </a:solidFill>
-                <a:effectLst/>
-                <a:uFillTx/>
-                <a:latin typeface="Arial"/>
-                <a:ea typeface="Arial"/>
-              </a:defRPr>
-            </a:lvl1pPr>
-          </a:lstStyle>
-          <a:p>
-            <a:pPr indent="0" algn="r">
-              <a:lnSpc>
-                <a:spcPct val="100000"/>
-              </a:lnSpc>
-              <a:buNone/>
-              <a:tabLst>
-                <a:tab pos="0" algn="l"/>
-              </a:tabLst>
-            </a:pPr>
-            <a:fld id="{3FDFF5A3-E8FB-4CDC-B55A-ED09CA394F67}" type="slidenum">
-              <a:rPr lang="pt-BR" sz="1000" b="0" u="none" strike="noStrike">
-                <a:solidFill>
-                  <a:schemeClr val="dk2"/>
-                </a:solidFill>
-                <a:effectLst/>
-                <a:uFillTx/>
-                <a:latin typeface="Arial"/>
-                <a:ea typeface="Arial"/>
-              </a:rPr>
-              <a:t>&lt;número&gt;</a:t>
-            </a:fld>
-            <a:endParaRPr lang="pt-BR" sz="1000" b="0" u="none" strike="noStrike">
-              <a:solidFill>
-                <a:srgbClr val="000000"/>
-              </a:solidFill>
-              <a:effectLst/>
-              <a:uFillTx/>
-              <a:latin typeface="Times New Roman"/>
-            </a:endParaRPr>
-          </a:p>
-        </p:txBody>
-      </p:sp>
-    </p:spTree>
-  </p:cSld>
-</p:sldLayout>
-</file>
-
-<file path=ppt/slideLayouts/slideLayout8.xml><?xml version="1.0" encoding="utf-8"?>
-<p:sldLayout xmlns:a="http://schemas.openxmlformats.org/drawingml/2006/main" xmlns:p="http://schemas.openxmlformats.org/presentationml/2006/main" xmlns:r="http://schemas.openxmlformats.org/officeDocument/2006/relationships" xmlns:p14="http://schemas.microsoft.com/office/powerpoint/2010/main" xmlns:p15="http://schemas.microsoft.com/office/powerpoint/2012/main" xmlns:mc="http://schemas.openxmlformats.org/markup-compatibility/2006" type="blank" preserve="1">
-  <p:cSld name="ONE_COLUMN_TEXT">
-    <p:bg>
-      <p:bgPr>
-        <a:solidFill>
-          <a:schemeClr val="lt1"/>
-        </a:solidFill>
-      </p:bgPr>
-    </p:bg>
-    <p:spTree>
-      <p:nvGrpSpPr>
-        <p:cNvPr id="1" name=""/>
-        <p:cNvGrpSpPr/>
-        <p:nvPr/>
-      </p:nvGrpSpPr>
-      <p:grpSpPr>
-        <a:xfrm>
-          <a:off x="0" y="0"/>
-          <a:ext cx="0" cy="0"/>
-          <a:chOff x="0" y="0"/>
-          <a:chExt cx="0" cy="0"/>
-        </a:xfrm>
-      </p:grpSpPr>
-      <p:sp>
-        <p:nvSpPr>
-          <p:cNvPr id="19" name="PlaceHolder 1"/>
-          <p:cNvSpPr>
-            <a:spLocks noGrp="1"/>
-          </p:cNvSpPr>
-          <p:nvPr>
-            <p:ph type="title"/>
-          </p:nvPr>
-        </p:nvSpPr>
-        <p:spPr>
-          <a:xfrm>
-            <a:off x="311760" y="555480"/>
-            <a:ext cx="2807640" cy="755280"/>
-          </a:xfrm>
-          <a:prstGeom prst="rect">
-            <a:avLst/>
-          </a:prstGeom>
-          <a:noFill/>
-          <a:ln w="0">
-            <a:noFill/>
-          </a:ln>
-        </p:spPr>
-        <p:txBody>
-          <a:bodyPr lIns="91440" tIns="91440" rIns="91440" bIns="91440" anchor="b">
-            <a:normAutofit fontScale="70000" lnSpcReduction="19999"/>
-          </a:bodyPr>
-          <a:lstStyle>
-            <a:lvl1pPr indent="0" algn="l">
-              <a:buNone/>
-              <a:defRPr lang="pt-BR" sz="2400" b="0" u="none" strike="noStrike">
-                <a:solidFill>
-                  <a:srgbClr val="000000"/>
-                </a:solidFill>
-                <a:effectLst/>
-                <a:uFillTx/>
-                <a:latin typeface="Arial"/>
-              </a:defRPr>
-            </a:lvl1pPr>
-          </a:lstStyle>
-          <a:p>
-            <a:pPr indent="0" algn="l">
-              <a:buNone/>
-            </a:pPr>
-            <a:r>
-              <a:rPr lang="pt-BR" sz="2400" b="0" u="none" strike="noStrike">
-                <a:solidFill>
-                  <a:srgbClr val="000000"/>
-                </a:solidFill>
-                <a:effectLst/>
-                <a:uFillTx/>
-                <a:latin typeface="Arial"/>
-              </a:rPr>
-              <a:t>Clique para editar o formato do texto do título</a:t>
-            </a:r>
-            <a:endParaRPr lang="pt-BR" sz="2400" b="0" u="none" strike="noStrike">
-              <a:solidFill>
-                <a:srgbClr val="000000"/>
-              </a:solidFill>
-              <a:effectLst/>
-              <a:uFillTx/>
-              <a:latin typeface="Arial"/>
-            </a:endParaRPr>
-          </a:p>
-        </p:txBody>
-      </p:sp>
-      <p:sp>
-        <p:nvSpPr>
-          <p:cNvPr id="20" name="PlaceHolder 2"/>
-          <p:cNvSpPr>
-            <a:spLocks noGrp="1"/>
-          </p:cNvSpPr>
-          <p:nvPr>
-            <p:ph type="body"/>
-          </p:nvPr>
-        </p:nvSpPr>
-        <p:spPr>
-          <a:xfrm>
-            <a:off x="311760" y="1389600"/>
-            <a:ext cx="2807640" cy="3179160"/>
-          </a:xfrm>
-          <a:prstGeom prst="rect">
-            <a:avLst/>
-          </a:prstGeom>
-          <a:noFill/>
-          <a:ln w="0">
-            <a:noFill/>
-          </a:ln>
-        </p:spPr>
-        <p:txBody>
-          <a:bodyPr lIns="91440" tIns="91440" rIns="91440" bIns="91440" anchor="t">
-            <a:normAutofit fontScale="32500" lnSpcReduction="19999"/>
-          </a:bodyPr>
-          <a:lstStyle>
-            <a:lvl1pPr algn="l">
-              <a:spcBef>
-                <a:spcPts val="1417"/>
-              </a:spcBef>
-              <a:buClr>
-                <a:srgbClr val="000000"/>
-              </a:buClr>
-              <a:buSzPct val="45000"/>
-              <a:buFont typeface="Wingdings" charset="2"/>
-              <a:buChar char=""/>
-              <a:defRPr lang="pt-BR" sz="1200" b="0" u="none" strike="noStrike">
-                <a:solidFill>
-                  <a:srgbClr val="000000"/>
-                </a:solidFill>
-                <a:effectLst/>
-                <a:uFillTx/>
-                <a:latin typeface="Arial"/>
-              </a:defRPr>
-            </a:lvl1pPr>
-            <a:lvl2pPr lvl="1" algn="l">
-              <a:spcBef>
-                <a:spcPts val="1134"/>
-              </a:spcBef>
-              <a:buClr>
-                <a:srgbClr val="000000"/>
-              </a:buClr>
-              <a:buSzPct val="75000"/>
-              <a:buFont typeface="Symbol" charset="2"/>
-              <a:buChar char=""/>
-              <a:defRPr lang="pt-BR" sz="1200" b="0" u="none" strike="noStrike">
-                <a:solidFill>
-                  <a:srgbClr val="000000"/>
-                </a:solidFill>
-                <a:effectLst/>
-                <a:uFillTx/>
-                <a:latin typeface="Arial"/>
-              </a:defRPr>
-            </a:lvl2pPr>
-            <a:lvl3pPr lvl="2" algn="l">
-              <a:spcBef>
-                <a:spcPts val="850"/>
-              </a:spcBef>
-              <a:buClr>
-                <a:srgbClr val="000000"/>
-              </a:buClr>
-              <a:buSzPct val="45000"/>
-              <a:buFont typeface="Wingdings" charset="2"/>
-              <a:buChar char=""/>
-              <a:defRPr lang="pt-BR" sz="1200" b="0" u="none" strike="noStrike">
-                <a:solidFill>
-                  <a:srgbClr val="000000"/>
-                </a:solidFill>
-                <a:effectLst/>
-                <a:uFillTx/>
-                <a:latin typeface="Arial"/>
-              </a:defRPr>
-            </a:lvl3pPr>
-            <a:lvl4pPr lvl="3" algn="l">
-              <a:spcBef>
-                <a:spcPts val="567"/>
-              </a:spcBef>
-              <a:buClr>
-                <a:srgbClr val="000000"/>
-              </a:buClr>
-              <a:buSzPct val="75000"/>
-              <a:buFont typeface="Symbol" charset="2"/>
-              <a:buChar char=""/>
-              <a:defRPr lang="pt-BR" sz="1200" b="0" u="none" strike="noStrike">
-                <a:solidFill>
-                  <a:srgbClr val="000000"/>
-                </a:solidFill>
-                <a:effectLst/>
-                <a:uFillTx/>
-                <a:latin typeface="Arial"/>
-              </a:defRPr>
-            </a:lvl4pPr>
-            <a:lvl5pPr lvl="4" algn="l">
-              <a:spcBef>
-                <a:spcPts val="283"/>
-              </a:spcBef>
-              <a:buClr>
-                <a:srgbClr val="000000"/>
-              </a:buClr>
-              <a:buSzPct val="45000"/>
-              <a:buFont typeface="Wingdings" charset="2"/>
-              <a:buChar char=""/>
-              <a:defRPr lang="pt-BR" sz="1200" b="0" u="none" strike="noStrike">
-                <a:solidFill>
-                  <a:srgbClr val="000000"/>
-                </a:solidFill>
-                <a:effectLst/>
-                <a:uFillTx/>
-                <a:latin typeface="Arial"/>
-              </a:defRPr>
-            </a:lvl5pPr>
-            <a:lvl6pPr lvl="5" algn="l">
-              <a:spcBef>
-                <a:spcPts val="283"/>
-              </a:spcBef>
-              <a:buClr>
-                <a:srgbClr val="000000"/>
-              </a:buClr>
-              <a:buSzPct val="45000"/>
-              <a:buFont typeface="Wingdings" charset="2"/>
-              <a:buChar char=""/>
-              <a:defRPr lang="pt-BR" sz="1200" b="0" u="none" strike="noStrike">
-                <a:solidFill>
-                  <a:srgbClr val="000000"/>
-                </a:solidFill>
-                <a:effectLst/>
-                <a:uFillTx/>
-                <a:latin typeface="Arial"/>
-              </a:defRPr>
-            </a:lvl6pPr>
-            <a:lvl7pPr lvl="6" algn="l">
-              <a:spcBef>
-                <a:spcPts val="283"/>
-              </a:spcBef>
-              <a:buClr>
-                <a:srgbClr val="000000"/>
-              </a:buClr>
-              <a:buSzPct val="45000"/>
-              <a:buFont typeface="Wingdings" charset="2"/>
-              <a:buChar char=""/>
-              <a:defRPr lang="pt-BR" sz="1200" b="0" u="none" strike="noStrike">
-                <a:solidFill>
-                  <a:srgbClr val="000000"/>
-                </a:solidFill>
-                <a:effectLst/>
-                <a:uFillTx/>
-                <a:latin typeface="Arial"/>
-              </a:defRPr>
-            </a:lvl7pPr>
-          </a:lstStyle>
-          <a:p>
-            <a:pPr marL="457200" indent="-304920" algn="l">
-              <a:spcBef>
-                <a:spcPts val="1417"/>
-              </a:spcBef>
-              <a:buClr>
-                <a:srgbClr val="000000"/>
-              </a:buClr>
-              <a:buSzPct val="45000"/>
-              <a:buFont typeface="Wingdings" charset="2"/>
-              <a:buChar char=""/>
-            </a:pPr>
-            <a:r>
-              <a:rPr lang="pt-BR" sz="1200" b="0" u="none" strike="noStrike">
-                <a:solidFill>
-                  <a:srgbClr val="000000"/>
-                </a:solidFill>
-                <a:effectLst/>
-                <a:uFillTx/>
-                <a:latin typeface="Arial"/>
-              </a:rPr>
-              <a:t>Clique para editar o formato de texto dos tópicos</a:t>
-            </a:r>
-            <a:endParaRPr lang="pt-BR" sz="1200" b="0" u="none" strike="noStrike">
-              <a:solidFill>
-                <a:srgbClr val="000000"/>
-              </a:solidFill>
-              <a:effectLst/>
-              <a:uFillTx/>
-              <a:latin typeface="Arial"/>
-            </a:endParaRPr>
-          </a:p>
-          <a:p>
-            <a:pPr marL="914400" lvl="1" indent="-304920" algn="l">
-              <a:spcBef>
-                <a:spcPts val="1134"/>
-              </a:spcBef>
-              <a:buClr>
-                <a:srgbClr val="000000"/>
-              </a:buClr>
-              <a:buSzPct val="75000"/>
-              <a:buFont typeface="Symbol" charset="2"/>
-              <a:buChar char=""/>
-            </a:pPr>
-            <a:r>
-              <a:rPr lang="pt-BR" sz="1200" b="0" u="none" strike="noStrike">
-                <a:solidFill>
-                  <a:srgbClr val="000000"/>
-                </a:solidFill>
-                <a:effectLst/>
-                <a:uFillTx/>
-                <a:latin typeface="Arial"/>
-              </a:rPr>
-              <a:t>2.º nível de tópicos</a:t>
-            </a:r>
-            <a:endParaRPr lang="pt-BR" sz="1200" b="0" u="none" strike="noStrike">
-              <a:solidFill>
-                <a:srgbClr val="000000"/>
-              </a:solidFill>
-              <a:effectLst/>
-              <a:uFillTx/>
-              <a:latin typeface="Arial"/>
-            </a:endParaRPr>
-          </a:p>
-          <a:p>
-            <a:pPr marL="1371600" lvl="2" indent="-304920" algn="l">
-              <a:spcBef>
-                <a:spcPts val="850"/>
-              </a:spcBef>
-              <a:buClr>
-                <a:srgbClr val="000000"/>
-              </a:buClr>
-              <a:buSzPct val="45000"/>
-              <a:buFont typeface="Wingdings" charset="2"/>
-              <a:buChar char=""/>
-            </a:pPr>
-            <a:r>
-              <a:rPr lang="pt-BR" sz="1200" b="0" u="none" strike="noStrike">
-                <a:solidFill>
-                  <a:srgbClr val="000000"/>
-                </a:solidFill>
-                <a:effectLst/>
-                <a:uFillTx/>
-                <a:latin typeface="Arial"/>
-              </a:rPr>
-              <a:t>3.º nível de tópicos</a:t>
-            </a:r>
-            <a:endParaRPr lang="pt-BR" sz="1200" b="0" u="none" strike="noStrike">
-              <a:solidFill>
-                <a:srgbClr val="000000"/>
-              </a:solidFill>
-              <a:effectLst/>
-              <a:uFillTx/>
-              <a:latin typeface="Arial"/>
-            </a:endParaRPr>
-          </a:p>
-          <a:p>
-            <a:pPr marL="1828800" lvl="3" indent="-304920" algn="l">
-              <a:spcBef>
-                <a:spcPts val="567"/>
-              </a:spcBef>
-              <a:buClr>
-                <a:srgbClr val="000000"/>
-              </a:buClr>
-              <a:buSzPct val="75000"/>
-              <a:buFont typeface="Symbol" charset="2"/>
-              <a:buChar char=""/>
-            </a:pPr>
-            <a:r>
-              <a:rPr lang="pt-BR" sz="1200" b="0" u="none" strike="noStrike">
-                <a:solidFill>
-                  <a:srgbClr val="000000"/>
-                </a:solidFill>
-                <a:effectLst/>
-                <a:uFillTx/>
-                <a:latin typeface="Arial"/>
-              </a:rPr>
-              <a:t>4.º nível de tópicos</a:t>
-            </a:r>
-            <a:endParaRPr lang="pt-BR" sz="1200" b="0" u="none" strike="noStrike">
-              <a:solidFill>
-                <a:srgbClr val="000000"/>
-              </a:solidFill>
-              <a:effectLst/>
-              <a:uFillTx/>
-              <a:latin typeface="Arial"/>
-            </a:endParaRPr>
-          </a:p>
-          <a:p>
-            <a:pPr marL="2286000" lvl="4" indent="-304920" algn="l">
-              <a:spcBef>
-                <a:spcPts val="283"/>
-              </a:spcBef>
-              <a:buClr>
-                <a:srgbClr val="000000"/>
-              </a:buClr>
-              <a:buSzPct val="45000"/>
-              <a:buFont typeface="Wingdings" charset="2"/>
-              <a:buChar char=""/>
-            </a:pPr>
-            <a:r>
-              <a:rPr lang="pt-BR" sz="1200" b="0" u="none" strike="noStrike">
-                <a:solidFill>
-                  <a:srgbClr val="000000"/>
-                </a:solidFill>
-                <a:effectLst/>
-                <a:uFillTx/>
-                <a:latin typeface="Arial"/>
-              </a:rPr>
-              <a:t>5.º nível de tópicos</a:t>
-            </a:r>
-            <a:endParaRPr lang="pt-BR" sz="1200" b="0" u="none" strike="noStrike">
-              <a:solidFill>
-                <a:srgbClr val="000000"/>
-              </a:solidFill>
-              <a:effectLst/>
-              <a:uFillTx/>
-              <a:latin typeface="Arial"/>
-            </a:endParaRPr>
-          </a:p>
-          <a:p>
-            <a:pPr marL="2743200" lvl="5" indent="-304920" algn="l">
-              <a:spcBef>
-                <a:spcPts val="283"/>
-              </a:spcBef>
-              <a:buClr>
-                <a:srgbClr val="000000"/>
-              </a:buClr>
-              <a:buSzPct val="45000"/>
-              <a:buFont typeface="Wingdings" charset="2"/>
-              <a:buChar char=""/>
-            </a:pPr>
-            <a:r>
-              <a:rPr lang="pt-BR" sz="1200" b="0" u="none" strike="noStrike">
-                <a:solidFill>
-                  <a:srgbClr val="000000"/>
-                </a:solidFill>
-                <a:effectLst/>
-                <a:uFillTx/>
-                <a:latin typeface="Arial"/>
-              </a:rPr>
-              <a:t>6.º nível de tópicos</a:t>
-            </a:r>
-            <a:endParaRPr lang="pt-BR" sz="1200" b="0" u="none" strike="noStrike">
-              <a:solidFill>
-                <a:srgbClr val="000000"/>
-              </a:solidFill>
-              <a:effectLst/>
-              <a:uFillTx/>
-              <a:latin typeface="Arial"/>
-            </a:endParaRPr>
-          </a:p>
-          <a:p>
-            <a:pPr marL="3200400" lvl="6" indent="-304920" algn="l">
-              <a:spcBef>
-                <a:spcPts val="283"/>
-              </a:spcBef>
-              <a:buClr>
-                <a:srgbClr val="000000"/>
-              </a:buClr>
-              <a:buSzPct val="45000"/>
-              <a:buFont typeface="Wingdings" charset="2"/>
-              <a:buChar char=""/>
-            </a:pPr>
-            <a:r>
-              <a:rPr lang="pt-BR" sz="1200" b="0" u="none" strike="noStrike">
-                <a:solidFill>
-                  <a:srgbClr val="000000"/>
-                </a:solidFill>
-                <a:effectLst/>
-                <a:uFillTx/>
-                <a:latin typeface="Arial"/>
-              </a:rPr>
-              <a:t>7.º nível de tópicos</a:t>
-            </a:r>
-            <a:endParaRPr lang="pt-BR" sz="1200" b="0" u="none" strike="noStrike">
-              <a:solidFill>
-                <a:srgbClr val="000000"/>
-              </a:solidFill>
-              <a:effectLst/>
-              <a:uFillTx/>
-              <a:latin typeface="Arial"/>
-            </a:endParaRPr>
-          </a:p>
-        </p:txBody>
-      </p:sp>
-      <p:sp>
-        <p:nvSpPr>
-          <p:cNvPr id="21" name="PlaceHolder 3"/>
-          <p:cNvSpPr>
-            <a:spLocks noGrp="1"/>
-          </p:cNvSpPr>
-          <p:nvPr>
-            <p:ph type="sldNum" idx="8"/>
-          </p:nvPr>
-        </p:nvSpPr>
-        <p:spPr>
-          <a:xfrm>
-            <a:off x="8472600" y="4663080"/>
-            <a:ext cx="548280" cy="393120"/>
-          </a:xfrm>
-          <a:prstGeom prst="rect">
-            <a:avLst/>
-          </a:prstGeom>
-          <a:noFill/>
-          <a:ln w="0">
-            <a:noFill/>
-          </a:ln>
-        </p:spPr>
-        <p:txBody>
-          <a:bodyPr lIns="91440" tIns="91440" rIns="91440" bIns="91440" anchor="ctr">
-            <a:normAutofit/>
-          </a:bodyPr>
-          <a:lstStyle>
-            <a:lvl1pPr indent="0" algn="r">
-              <a:lnSpc>
-                <a:spcPct val="100000"/>
-              </a:lnSpc>
-              <a:buNone/>
-              <a:tabLst>
-                <a:tab pos="0" algn="l"/>
-              </a:tabLst>
-              <a:defRPr lang="pt-BR" sz="1000" b="0" u="none" strike="noStrike">
-                <a:solidFill>
-                  <a:schemeClr val="dk2"/>
-                </a:solidFill>
-                <a:effectLst/>
-                <a:uFillTx/>
-                <a:latin typeface="Arial"/>
-                <a:ea typeface="Arial"/>
-              </a:defRPr>
-            </a:lvl1pPr>
-          </a:lstStyle>
-          <a:p>
-            <a:pPr indent="0" algn="r">
-              <a:lnSpc>
-                <a:spcPct val="100000"/>
-              </a:lnSpc>
-              <a:buNone/>
-              <a:tabLst>
-                <a:tab pos="0" algn="l"/>
-              </a:tabLst>
-            </a:pPr>
-            <a:fld id="{ECDFA0B7-42D8-4B58-BB83-6E94A92CCEB8}" type="slidenum">
-              <a:rPr lang="pt-BR" sz="1000" b="0" u="none" strike="noStrike">
-                <a:solidFill>
-                  <a:schemeClr val="dk2"/>
-                </a:solidFill>
-                <a:effectLst/>
-                <a:uFillTx/>
-                <a:latin typeface="Arial"/>
-                <a:ea typeface="Arial"/>
-              </a:rPr>
-              <a:t>&lt;número&gt;</a:t>
-            </a:fld>
-            <a:endParaRPr lang="pt-BR" sz="1000" b="0" u="none" strike="noStrike">
-              <a:solidFill>
-                <a:srgbClr val="000000"/>
-              </a:solidFill>
-              <a:effectLst/>
-              <a:uFillTx/>
-              <a:latin typeface="Times New Roman"/>
-            </a:endParaRPr>
-          </a:p>
-        </p:txBody>
-      </p:sp>
-    </p:spTree>
-  </p:cSld>
-</p:sldLayout>
-</file>
-
-<file path=ppt/slideLayouts/slideLayout9.xml><?xml version="1.0" encoding="utf-8"?>
-<p:sldLayout xmlns:a="http://schemas.openxmlformats.org/drawingml/2006/main" xmlns:p="http://schemas.openxmlformats.org/presentationml/2006/main" xmlns:r="http://schemas.openxmlformats.org/officeDocument/2006/relationships" xmlns:p14="http://schemas.microsoft.com/office/powerpoint/2010/main" xmlns:p15="http://schemas.microsoft.com/office/powerpoint/2012/main" xmlns:mc="http://schemas.openxmlformats.org/markup-compatibility/2006" type="blank" preserve="1">
-  <p:cSld name="MAIN_POINT">
-    <p:bg>
-      <p:bgPr>
-        <a:solidFill>
-          <a:schemeClr val="lt1"/>
-        </a:solidFill>
-      </p:bgPr>
-    </p:bg>
-    <p:spTree>
-      <p:nvGrpSpPr>
-        <p:cNvPr id="1" name=""/>
-        <p:cNvGrpSpPr/>
-        <p:nvPr/>
-      </p:nvGrpSpPr>
-      <p:grpSpPr>
-        <a:xfrm>
-          <a:off x="0" y="0"/>
-          <a:ext cx="0" cy="0"/>
-          <a:chOff x="0" y="0"/>
-          <a:chExt cx="0" cy="0"/>
-        </a:xfrm>
-      </p:grpSpPr>
-      <p:sp>
-        <p:nvSpPr>
-          <p:cNvPr id="22" name="PlaceHolder 1"/>
-          <p:cNvSpPr>
-            <a:spLocks noGrp="1"/>
-          </p:cNvSpPr>
-          <p:nvPr>
-            <p:ph type="title"/>
-          </p:nvPr>
-        </p:nvSpPr>
-        <p:spPr>
-          <a:xfrm>
-            <a:off x="490320" y="450000"/>
-            <a:ext cx="6367320" cy="4090320"/>
-          </a:xfrm>
-          <a:prstGeom prst="rect">
-            <a:avLst/>
-          </a:prstGeom>
-          <a:noFill/>
-          <a:ln w="0">
-            <a:noFill/>
-          </a:ln>
-        </p:spPr>
-        <p:txBody>
-          <a:bodyPr lIns="91440" tIns="91440" rIns="91440" bIns="91440" anchor="ctr">
-            <a:normAutofit/>
-          </a:bodyPr>
-          <a:lstStyle>
-            <a:lvl1pPr indent="0" algn="l">
-              <a:buNone/>
-              <a:defRPr lang="pt-BR" sz="4800" b="0" u="none" strike="noStrike">
-                <a:solidFill>
-                  <a:srgbClr val="000000"/>
-                </a:solidFill>
-                <a:effectLst/>
-                <a:uFillTx/>
-                <a:latin typeface="Arial"/>
-              </a:defRPr>
-            </a:lvl1pPr>
-          </a:lstStyle>
-          <a:p>
-            <a:pPr indent="0" algn="l">
-              <a:buNone/>
-            </a:pPr>
-            <a:r>
-              <a:rPr lang="pt-BR" sz="4800" b="0" u="none" strike="noStrike">
-                <a:solidFill>
-                  <a:srgbClr val="000000"/>
-                </a:solidFill>
-                <a:effectLst/>
-                <a:uFillTx/>
-                <a:latin typeface="Arial"/>
-              </a:rPr>
-              <a:t>Clique para editar o formato do texto do título</a:t>
-            </a:r>
-            <a:endParaRPr lang="pt-BR" sz="4800" b="0" u="none" strike="noStrike">
-              <a:solidFill>
-                <a:srgbClr val="000000"/>
-              </a:solidFill>
-              <a:effectLst/>
-              <a:uFillTx/>
-              <a:latin typeface="Arial"/>
-            </a:endParaRPr>
-          </a:p>
-        </p:txBody>
-      </p:sp>
-      <p:sp>
-        <p:nvSpPr>
-          <p:cNvPr id="23" name="PlaceHolder 2"/>
+          <p:cNvPr id="24" name="PlaceHolder 4"/>
           <p:cNvSpPr>
             <a:spLocks noGrp="1"/>
           </p:cNvSpPr>
@@ -7254,7 +7650,7 @@
         <p:spPr>
           <a:xfrm>
             <a:off x="8472600" y="4663080"/>
-            <a:ext cx="548280" cy="393120"/>
+            <a:ext cx="547920" cy="392760"/>
           </a:xfrm>
           <a:prstGeom prst="rect">
             <a:avLst/>
@@ -7298,7 +7694,7 @@
                 <a:tab pos="0" algn="l"/>
               </a:tabLst>
             </a:pPr>
-            <a:fld id="{AE60AAE6-6DBD-4EE1-9196-276F9035D35F}" type="slidenum">
+            <a:fld id="{F89FF72E-5FD2-4CA1-BE3A-922C740CC647}" type="slidenum">
               <a:rPr lang="pt-BR" sz="1000" b="0" u="none" strike="noStrike">
                 <a:solidFill>
                   <a:schemeClr val="dk2"/>
@@ -7416,6 +7812,9 @@
           <a:lstStyle>
             <a:lvl1pPr indent="0" algn="l">
               <a:buNone/>
+              <a:tabLst>
+                <a:tab pos="0" algn="l"/>
+              </a:tabLst>
               <a:defRPr lang="pt-BR" sz="1400" b="0" u="none" strike="noStrike">
                 <a:solidFill>
                   <a:srgbClr val="000000"/>
@@ -7429,6 +7828,9 @@
           <a:p>
             <a:pPr indent="0" algn="l">
               <a:buNone/>
+              <a:tabLst>
+                <a:tab pos="0" algn="l"/>
+              </a:tabLst>
             </a:pPr>
             <a:r>
               <a:rPr lang="pt-BR" sz="1400" b="0" u="none" strike="noStrike">
@@ -7615,7 +8017,7 @@
             </a:lvl7pPr>
           </a:lstStyle>
           <a:p>
-            <a:pPr marL="432000" indent="-324000" algn="l">
+            <a:pPr indent="-324000" algn="l">
               <a:spcBef>
                 <a:spcPts val="1417"/>
               </a:spcBef>
@@ -7882,7 +8284,7 @@
         <p:spPr>
           <a:xfrm>
             <a:off x="617400" y="1474560"/>
-            <a:ext cx="7886520" cy="342720"/>
+            <a:ext cx="7886160" cy="342360"/>
           </a:xfrm>
           <a:prstGeom prst="rect">
             <a:avLst/>
@@ -7943,7 +8345,7 @@
         <p:spPr>
           <a:xfrm>
             <a:off x="617400" y="1817280"/>
-            <a:ext cx="7886520" cy="1302840"/>
+            <a:ext cx="7886160" cy="1302480"/>
           </a:xfrm>
           <a:prstGeom prst="rect">
             <a:avLst/>
@@ -8034,7 +8436,7 @@
         <p:spPr>
           <a:xfrm>
             <a:off x="617400" y="3120480"/>
-            <a:ext cx="7886520" cy="342720"/>
+            <a:ext cx="7886160" cy="342360"/>
           </a:xfrm>
           <a:prstGeom prst="rect">
             <a:avLst/>
@@ -8095,7 +8497,7 @@
         <p:spPr>
           <a:xfrm>
             <a:off x="617040" y="3600360"/>
-            <a:ext cx="1509120" cy="360"/>
+            <a:ext cx="1509480" cy="720"/>
           </a:xfrm>
           <a:prstGeom prst="straightConnector1">
             <a:avLst/>
@@ -8117,7 +8519,7 @@
         <p:spPr>
           <a:xfrm>
             <a:off x="617400" y="3737520"/>
-            <a:ext cx="7886520" cy="273960"/>
+            <a:ext cx="7886160" cy="273600"/>
           </a:xfrm>
           <a:prstGeom prst="rect">
             <a:avLst/>
@@ -8215,7 +8617,7 @@
         <p:spPr>
           <a:xfrm>
             <a:off x="411480" y="274320"/>
-            <a:ext cx="4114440" cy="239760"/>
+            <a:ext cx="4114080" cy="239400"/>
           </a:xfrm>
           <a:prstGeom prst="rect">
             <a:avLst/>
@@ -8276,7 +8678,7 @@
         <p:spPr>
           <a:xfrm>
             <a:off x="411480" y="514440"/>
-            <a:ext cx="8229240" cy="479880"/>
+            <a:ext cx="8228880" cy="479520"/>
           </a:xfrm>
           <a:prstGeom prst="rect">
             <a:avLst/>
@@ -8337,7 +8739,7 @@
         <p:spPr>
           <a:xfrm>
             <a:off x="411480" y="1166040"/>
-            <a:ext cx="2653920" cy="3120120"/>
+            <a:ext cx="2653560" cy="3119760"/>
           </a:xfrm>
           <a:prstGeom prst="roundRect">
             <a:avLst>
@@ -8392,7 +8794,7 @@
         <p:spPr>
           <a:xfrm>
             <a:off x="411480" y="1166040"/>
-            <a:ext cx="2653560" cy="617040"/>
+            <a:ext cx="2653200" cy="616680"/>
           </a:xfrm>
           <a:prstGeom prst="roundRect">
             <a:avLst>
@@ -8437,7 +8839,7 @@
         <p:spPr>
           <a:xfrm>
             <a:off x="411480" y="1542960"/>
-            <a:ext cx="2653560" cy="239760"/>
+            <a:ext cx="2653200" cy="239400"/>
           </a:xfrm>
           <a:prstGeom prst="rect">
             <a:avLst/>
@@ -8480,7 +8882,7 @@
         <p:spPr>
           <a:xfrm>
             <a:off x="582840" y="1166040"/>
-            <a:ext cx="685440" cy="617040"/>
+            <a:ext cx="685080" cy="616680"/>
           </a:xfrm>
           <a:prstGeom prst="rect">
             <a:avLst/>
@@ -8541,7 +8943,7 @@
         <p:spPr>
           <a:xfrm>
             <a:off x="1200240" y="1166040"/>
-            <a:ext cx="1693440" cy="617040"/>
+            <a:ext cx="1693080" cy="616680"/>
           </a:xfrm>
           <a:prstGeom prst="rect">
             <a:avLst/>
@@ -8602,7 +9004,7 @@
         <p:spPr>
           <a:xfrm>
             <a:off x="617400" y="1954440"/>
-            <a:ext cx="2242080" cy="205560"/>
+            <a:ext cx="2241720" cy="205200"/>
           </a:xfrm>
           <a:prstGeom prst="rect">
             <a:avLst/>
@@ -8663,7 +9065,7 @@
         <p:spPr>
           <a:xfrm>
             <a:off x="617400" y="2146680"/>
-            <a:ext cx="2242080" cy="239760"/>
+            <a:ext cx="2241720" cy="239400"/>
           </a:xfrm>
           <a:prstGeom prst="rect">
             <a:avLst/>
@@ -8724,7 +9126,7 @@
         <p:spPr>
           <a:xfrm>
             <a:off x="617400" y="2434680"/>
-            <a:ext cx="2242080" cy="205560"/>
+            <a:ext cx="2241720" cy="205200"/>
           </a:xfrm>
           <a:prstGeom prst="rect">
             <a:avLst/>
@@ -8785,7 +9187,7 @@
         <p:spPr>
           <a:xfrm>
             <a:off x="617400" y="2626560"/>
-            <a:ext cx="2242080" cy="239760"/>
+            <a:ext cx="2241720" cy="239400"/>
           </a:xfrm>
           <a:prstGeom prst="rect">
             <a:avLst/>
@@ -8846,7 +9248,7 @@
         <p:spPr>
           <a:xfrm>
             <a:off x="617400" y="2914560"/>
-            <a:ext cx="2242080" cy="205560"/>
+            <a:ext cx="2241720" cy="205200"/>
           </a:xfrm>
           <a:prstGeom prst="rect">
             <a:avLst/>
@@ -8907,7 +9309,7 @@
         <p:spPr>
           <a:xfrm>
             <a:off x="617400" y="3106800"/>
-            <a:ext cx="2242080" cy="376920"/>
+            <a:ext cx="2241720" cy="376560"/>
           </a:xfrm>
           <a:prstGeom prst="rect">
             <a:avLst/>
@@ -8968,7 +9370,7 @@
         <p:spPr>
           <a:xfrm>
             <a:off x="617400" y="3531960"/>
-            <a:ext cx="2242080" cy="205560"/>
+            <a:ext cx="2241720" cy="205200"/>
           </a:xfrm>
           <a:prstGeom prst="rect">
             <a:avLst/>
@@ -9029,7 +9431,7 @@
         <p:spPr>
           <a:xfrm>
             <a:off x="617400" y="3723840"/>
-            <a:ext cx="2242080" cy="493560"/>
+            <a:ext cx="2241720" cy="493200"/>
           </a:xfrm>
           <a:prstGeom prst="rect">
             <a:avLst/>
@@ -9090,7 +9492,7 @@
         <p:spPr>
           <a:xfrm>
             <a:off x="3195720" y="1166040"/>
-            <a:ext cx="2653560" cy="3120120"/>
+            <a:ext cx="2653200" cy="3119760"/>
           </a:xfrm>
           <a:prstGeom prst="roundRect">
             <a:avLst>
@@ -9145,7 +9547,7 @@
         <p:spPr>
           <a:xfrm>
             <a:off x="3195720" y="1166040"/>
-            <a:ext cx="2653560" cy="617040"/>
+            <a:ext cx="2653200" cy="616680"/>
           </a:xfrm>
           <a:prstGeom prst="roundRect">
             <a:avLst>
@@ -9190,7 +9592,7 @@
         <p:spPr>
           <a:xfrm>
             <a:off x="3195720" y="1542960"/>
-            <a:ext cx="2653560" cy="239760"/>
+            <a:ext cx="2653200" cy="239400"/>
           </a:xfrm>
           <a:prstGeom prst="rect">
             <a:avLst/>
@@ -9233,7 +9635,7 @@
         <p:spPr>
           <a:xfrm>
             <a:off x="3367440" y="1166040"/>
-            <a:ext cx="685440" cy="617040"/>
+            <a:ext cx="685080" cy="616680"/>
           </a:xfrm>
           <a:prstGeom prst="rect">
             <a:avLst/>
@@ -9294,7 +9696,7 @@
         <p:spPr>
           <a:xfrm>
             <a:off x="3860280" y="1165680"/>
-            <a:ext cx="1817640" cy="616680"/>
+            <a:ext cx="1817280" cy="616320"/>
           </a:xfrm>
           <a:prstGeom prst="rect">
             <a:avLst/>
@@ -9355,7 +9757,7 @@
         <p:spPr>
           <a:xfrm>
             <a:off x="3401640" y="1954440"/>
-            <a:ext cx="2242080" cy="205560"/>
+            <a:ext cx="2241720" cy="205200"/>
           </a:xfrm>
           <a:prstGeom prst="rect">
             <a:avLst/>
@@ -9416,7 +9818,7 @@
         <p:spPr>
           <a:xfrm>
             <a:off x="3401640" y="2146680"/>
-            <a:ext cx="2242080" cy="239760"/>
+            <a:ext cx="2241720" cy="239400"/>
           </a:xfrm>
           <a:prstGeom prst="rect">
             <a:avLst/>
@@ -9477,7 +9879,7 @@
         <p:spPr>
           <a:xfrm>
             <a:off x="3401640" y="2434680"/>
-            <a:ext cx="2242080" cy="205560"/>
+            <a:ext cx="2241720" cy="205200"/>
           </a:xfrm>
           <a:prstGeom prst="rect">
             <a:avLst/>
@@ -9538,7 +9940,7 @@
         <p:spPr>
           <a:xfrm>
             <a:off x="3401640" y="2626560"/>
-            <a:ext cx="2242080" cy="239760"/>
+            <a:ext cx="2241720" cy="239400"/>
           </a:xfrm>
           <a:prstGeom prst="rect">
             <a:avLst/>
@@ -9599,7 +10001,7 @@
         <p:spPr>
           <a:xfrm>
             <a:off x="3401640" y="2914560"/>
-            <a:ext cx="2242080" cy="205560"/>
+            <a:ext cx="2241720" cy="205200"/>
           </a:xfrm>
           <a:prstGeom prst="rect">
             <a:avLst/>
@@ -9660,7 +10062,7 @@
         <p:spPr>
           <a:xfrm>
             <a:off x="3401640" y="3106800"/>
-            <a:ext cx="2242080" cy="376920"/>
+            <a:ext cx="2241720" cy="376560"/>
           </a:xfrm>
           <a:prstGeom prst="rect">
             <a:avLst/>
@@ -9721,7 +10123,7 @@
         <p:spPr>
           <a:xfrm>
             <a:off x="3401640" y="3531960"/>
-            <a:ext cx="2242080" cy="205560"/>
+            <a:ext cx="2241720" cy="205200"/>
           </a:xfrm>
           <a:prstGeom prst="rect">
             <a:avLst/>
@@ -9782,7 +10184,7 @@
         <p:spPr>
           <a:xfrm>
             <a:off x="3401640" y="3723840"/>
-            <a:ext cx="2242080" cy="493560"/>
+            <a:ext cx="2241720" cy="493200"/>
           </a:xfrm>
           <a:prstGeom prst="rect">
             <a:avLst/>
@@ -9843,7 +10245,7 @@
         <p:spPr>
           <a:xfrm>
             <a:off x="5980320" y="1166040"/>
-            <a:ext cx="2653560" cy="3120120"/>
+            <a:ext cx="2653200" cy="3119760"/>
           </a:xfrm>
           <a:prstGeom prst="roundRect">
             <a:avLst>
@@ -9898,7 +10300,7 @@
         <p:spPr>
           <a:xfrm>
             <a:off x="5980320" y="1166040"/>
-            <a:ext cx="2653560" cy="617040"/>
+            <a:ext cx="2653200" cy="616680"/>
           </a:xfrm>
           <a:prstGeom prst="roundRect">
             <a:avLst>
@@ -9943,7 +10345,7 @@
         <p:spPr>
           <a:xfrm>
             <a:off x="5980320" y="1542960"/>
-            <a:ext cx="2653560" cy="239760"/>
+            <a:ext cx="2653200" cy="239400"/>
           </a:xfrm>
           <a:prstGeom prst="rect">
             <a:avLst/>
@@ -9986,7 +10388,7 @@
         <p:spPr>
           <a:xfrm>
             <a:off x="6151680" y="1166040"/>
-            <a:ext cx="685440" cy="617040"/>
+            <a:ext cx="685080" cy="616680"/>
           </a:xfrm>
           <a:prstGeom prst="rect">
             <a:avLst/>
@@ -10047,7 +10449,7 @@
         <p:spPr>
           <a:xfrm>
             <a:off x="6768720" y="1166040"/>
-            <a:ext cx="1693440" cy="617040"/>
+            <a:ext cx="1693080" cy="616680"/>
           </a:xfrm>
           <a:prstGeom prst="rect">
             <a:avLst/>
@@ -10108,7 +10510,7 @@
         <p:spPr>
           <a:xfrm>
             <a:off x="6185880" y="1954440"/>
-            <a:ext cx="2242080" cy="205560"/>
+            <a:ext cx="2241720" cy="205200"/>
           </a:xfrm>
           <a:prstGeom prst="rect">
             <a:avLst/>
@@ -10169,7 +10571,7 @@
         <p:spPr>
           <a:xfrm>
             <a:off x="6185880" y="2146680"/>
-            <a:ext cx="2242080" cy="239760"/>
+            <a:ext cx="2241720" cy="239400"/>
           </a:xfrm>
           <a:prstGeom prst="rect">
             <a:avLst/>
@@ -10230,7 +10632,7 @@
         <p:spPr>
           <a:xfrm>
             <a:off x="6185880" y="2434680"/>
-            <a:ext cx="2242080" cy="205560"/>
+            <a:ext cx="2241720" cy="205200"/>
           </a:xfrm>
           <a:prstGeom prst="rect">
             <a:avLst/>
@@ -10291,7 +10693,7 @@
         <p:spPr>
           <a:xfrm>
             <a:off x="6185880" y="2626560"/>
-            <a:ext cx="2242080" cy="239760"/>
+            <a:ext cx="2241720" cy="239400"/>
           </a:xfrm>
           <a:prstGeom prst="rect">
             <a:avLst/>
@@ -10352,7 +10754,7 @@
         <p:spPr>
           <a:xfrm>
             <a:off x="6185880" y="2914560"/>
-            <a:ext cx="2242080" cy="205560"/>
+            <a:ext cx="2241720" cy="205200"/>
           </a:xfrm>
           <a:prstGeom prst="rect">
             <a:avLst/>
@@ -10413,7 +10815,7 @@
         <p:spPr>
           <a:xfrm>
             <a:off x="6185880" y="3106800"/>
-            <a:ext cx="2242080" cy="376920"/>
+            <a:ext cx="2241720" cy="376560"/>
           </a:xfrm>
           <a:prstGeom prst="rect">
             <a:avLst/>
@@ -10474,7 +10876,7 @@
         <p:spPr>
           <a:xfrm>
             <a:off x="6185880" y="3531960"/>
-            <a:ext cx="2242080" cy="205560"/>
+            <a:ext cx="2241720" cy="205200"/>
           </a:xfrm>
           <a:prstGeom prst="rect">
             <a:avLst/>
@@ -10535,7 +10937,7 @@
         <p:spPr>
           <a:xfrm>
             <a:off x="6185880" y="3723840"/>
-            <a:ext cx="2242080" cy="493560"/>
+            <a:ext cx="2241720" cy="493200"/>
           </a:xfrm>
           <a:prstGeom prst="rect">
             <a:avLst/>
@@ -10596,7 +10998,7 @@
         <p:spPr>
           <a:xfrm>
             <a:off x="411480" y="4423320"/>
-            <a:ext cx="8298000" cy="239760"/>
+            <a:ext cx="8297640" cy="239400"/>
           </a:xfrm>
           <a:prstGeom prst="rect">
             <a:avLst/>
@@ -10637,7 +11039,7 @@
         <p:spPr>
           <a:xfrm>
             <a:off x="343080" y="4903560"/>
-            <a:ext cx="8435160" cy="205560"/>
+            <a:ext cx="8434800" cy="205200"/>
           </a:xfrm>
           <a:prstGeom prst="rect">
             <a:avLst/>
@@ -10735,7 +11137,7 @@
         <p:spPr>
           <a:xfrm>
             <a:off x="411480" y="274320"/>
-            <a:ext cx="4114440" cy="239760"/>
+            <a:ext cx="4114080" cy="239400"/>
           </a:xfrm>
           <a:prstGeom prst="rect">
             <a:avLst/>
@@ -10796,7 +11198,7 @@
         <p:spPr>
           <a:xfrm>
             <a:off x="411480" y="514440"/>
-            <a:ext cx="7543440" cy="479880"/>
+            <a:ext cx="7543080" cy="479520"/>
           </a:xfrm>
           <a:prstGeom prst="rect">
             <a:avLst/>
@@ -10856,7 +11258,7 @@
         </p:nvGraphicFramePr>
         <p:xfrm>
           <a:off x="411480" y="1200240"/>
-          <a:ext cx="8297640" cy="3085560"/>
+          <a:ext cx="8296920" cy="3084840"/>
         </p:xfrm>
         <a:graphic>
           <a:graphicData uri="http://schemas.openxmlformats.org/drawingml/2006/table">
@@ -11880,7 +12282,7 @@
         <p:spPr>
           <a:xfrm>
             <a:off x="343080" y="4903560"/>
-            <a:ext cx="8435160" cy="205560"/>
+            <a:ext cx="8434800" cy="205200"/>
           </a:xfrm>
           <a:prstGeom prst="rect">
             <a:avLst/>
@@ -11978,7 +12380,7 @@
         <p:spPr>
           <a:xfrm>
             <a:off x="411480" y="274320"/>
-            <a:ext cx="4114440" cy="239760"/>
+            <a:ext cx="4114080" cy="239400"/>
           </a:xfrm>
           <a:prstGeom prst="rect">
             <a:avLst/>
@@ -12039,7 +12441,7 @@
         <p:spPr>
           <a:xfrm>
             <a:off x="411480" y="514440"/>
-            <a:ext cx="7543440" cy="479880"/>
+            <a:ext cx="7543080" cy="479520"/>
           </a:xfrm>
           <a:prstGeom prst="rect">
             <a:avLst/>
@@ -12100,7 +12502,7 @@
         <p:spPr>
           <a:xfrm>
             <a:off x="411480" y="1200240"/>
-            <a:ext cx="2653560" cy="3223080"/>
+            <a:ext cx="2653200" cy="3222720"/>
           </a:xfrm>
           <a:prstGeom prst="roundRect">
             <a:avLst>
@@ -12155,7 +12557,7 @@
         <p:spPr>
           <a:xfrm>
             <a:off x="617400" y="1405800"/>
-            <a:ext cx="376920" cy="376920"/>
+            <a:ext cx="376560" cy="376560"/>
           </a:xfrm>
           <a:prstGeom prst="ellipse">
             <a:avLst/>
@@ -12198,7 +12600,7 @@
         <p:spPr>
           <a:xfrm>
             <a:off x="617400" y="1405800"/>
-            <a:ext cx="376920" cy="376920"/>
+            <a:ext cx="376560" cy="376560"/>
           </a:xfrm>
           <a:prstGeom prst="rect">
             <a:avLst/>
@@ -12259,7 +12661,7 @@
         <p:spPr>
           <a:xfrm>
             <a:off x="1097280" y="1405800"/>
-            <a:ext cx="1762200" cy="205560"/>
+            <a:ext cx="1761840" cy="205200"/>
           </a:xfrm>
           <a:prstGeom prst="rect">
             <a:avLst/>
@@ -12320,7 +12722,7 @@
         <p:spPr>
           <a:xfrm>
             <a:off x="1097280" y="1611720"/>
-            <a:ext cx="1762200" cy="205560"/>
+            <a:ext cx="1761840" cy="205200"/>
           </a:xfrm>
           <a:prstGeom prst="rect">
             <a:avLst/>
@@ -12381,7 +12783,7 @@
         <p:spPr>
           <a:xfrm>
             <a:off x="617400" y="1920240"/>
-            <a:ext cx="2242080" cy="191520"/>
+            <a:ext cx="2241720" cy="191160"/>
           </a:xfrm>
           <a:prstGeom prst="rect">
             <a:avLst/>
@@ -12442,7 +12844,7 @@
         <p:spPr>
           <a:xfrm>
             <a:off x="617400" y="2098440"/>
-            <a:ext cx="2242080" cy="479880"/>
+            <a:ext cx="2241720" cy="479520"/>
           </a:xfrm>
           <a:prstGeom prst="rect">
             <a:avLst/>
@@ -12503,7 +12905,7 @@
         <p:spPr>
           <a:xfrm>
             <a:off x="617400" y="2640240"/>
-            <a:ext cx="2242080" cy="191520"/>
+            <a:ext cx="2241720" cy="191160"/>
           </a:xfrm>
           <a:prstGeom prst="rect">
             <a:avLst/>
@@ -12564,7 +12966,7 @@
         <p:spPr>
           <a:xfrm>
             <a:off x="617400" y="2818800"/>
-            <a:ext cx="2242080" cy="617040"/>
+            <a:ext cx="2241720" cy="616680"/>
           </a:xfrm>
           <a:prstGeom prst="rect">
             <a:avLst/>
@@ -12625,7 +13027,7 @@
         <p:spPr>
           <a:xfrm>
             <a:off x="617400" y="3497760"/>
-            <a:ext cx="2242080" cy="191520"/>
+            <a:ext cx="2241720" cy="191160"/>
           </a:xfrm>
           <a:prstGeom prst="rect">
             <a:avLst/>
@@ -12686,7 +13088,7 @@
         <p:spPr>
           <a:xfrm>
             <a:off x="617400" y="3675960"/>
-            <a:ext cx="2242080" cy="617040"/>
+            <a:ext cx="2241720" cy="616680"/>
           </a:xfrm>
           <a:prstGeom prst="rect">
             <a:avLst/>
@@ -12747,7 +13149,7 @@
         <p:spPr>
           <a:xfrm>
             <a:off x="3195720" y="1200240"/>
-            <a:ext cx="2653560" cy="3223080"/>
+            <a:ext cx="2653200" cy="3222720"/>
           </a:xfrm>
           <a:prstGeom prst="roundRect">
             <a:avLst>
@@ -12802,7 +13204,7 @@
         <p:spPr>
           <a:xfrm>
             <a:off x="3401640" y="1405800"/>
-            <a:ext cx="376920" cy="376920"/>
+            <a:ext cx="376560" cy="376560"/>
           </a:xfrm>
           <a:prstGeom prst="ellipse">
             <a:avLst/>
@@ -12845,7 +13247,7 @@
         <p:spPr>
           <a:xfrm>
             <a:off x="3401640" y="1405800"/>
-            <a:ext cx="376920" cy="376920"/>
+            <a:ext cx="376560" cy="376560"/>
           </a:xfrm>
           <a:prstGeom prst="rect">
             <a:avLst/>
@@ -12906,7 +13308,7 @@
         <p:spPr>
           <a:xfrm>
             <a:off x="3881520" y="1405800"/>
-            <a:ext cx="1762200" cy="205560"/>
+            <a:ext cx="1761840" cy="205200"/>
           </a:xfrm>
           <a:prstGeom prst="rect">
             <a:avLst/>
@@ -12967,7 +13369,7 @@
         <p:spPr>
           <a:xfrm>
             <a:off x="3881520" y="1611720"/>
-            <a:ext cx="1762200" cy="205560"/>
+            <a:ext cx="1761840" cy="205200"/>
           </a:xfrm>
           <a:prstGeom prst="rect">
             <a:avLst/>
@@ -13028,7 +13430,7 @@
         <p:spPr>
           <a:xfrm>
             <a:off x="3401640" y="1920240"/>
-            <a:ext cx="2242080" cy="191520"/>
+            <a:ext cx="2241720" cy="191160"/>
           </a:xfrm>
           <a:prstGeom prst="rect">
             <a:avLst/>
@@ -13089,7 +13491,7 @@
         <p:spPr>
           <a:xfrm>
             <a:off x="3401640" y="2098440"/>
-            <a:ext cx="2242080" cy="479880"/>
+            <a:ext cx="2241720" cy="479520"/>
           </a:xfrm>
           <a:prstGeom prst="rect">
             <a:avLst/>
@@ -13150,7 +13552,7 @@
         <p:spPr>
           <a:xfrm>
             <a:off x="3401640" y="2640240"/>
-            <a:ext cx="2242080" cy="191520"/>
+            <a:ext cx="2241720" cy="191160"/>
           </a:xfrm>
           <a:prstGeom prst="rect">
             <a:avLst/>
@@ -13211,7 +13613,7 @@
         <p:spPr>
           <a:xfrm>
             <a:off x="3401640" y="2818800"/>
-            <a:ext cx="2242080" cy="617040"/>
+            <a:ext cx="2241720" cy="616680"/>
           </a:xfrm>
           <a:prstGeom prst="rect">
             <a:avLst/>
@@ -13272,7 +13674,7 @@
         <p:spPr>
           <a:xfrm>
             <a:off x="3401640" y="3497760"/>
-            <a:ext cx="2242080" cy="191520"/>
+            <a:ext cx="2241720" cy="191160"/>
           </a:xfrm>
           <a:prstGeom prst="rect">
             <a:avLst/>
@@ -13333,7 +13735,7 @@
         <p:spPr>
           <a:xfrm>
             <a:off x="3401640" y="3675960"/>
-            <a:ext cx="2242080" cy="617040"/>
+            <a:ext cx="2241720" cy="616680"/>
           </a:xfrm>
           <a:prstGeom prst="rect">
             <a:avLst/>
@@ -13394,7 +13796,7 @@
         <p:spPr>
           <a:xfrm>
             <a:off x="5980320" y="1200240"/>
-            <a:ext cx="2653560" cy="3223080"/>
+            <a:ext cx="2653200" cy="3222720"/>
           </a:xfrm>
           <a:prstGeom prst="roundRect">
             <a:avLst>
@@ -13449,7 +13851,7 @@
         <p:spPr>
           <a:xfrm>
             <a:off x="6185880" y="1405800"/>
-            <a:ext cx="376920" cy="376920"/>
+            <a:ext cx="376560" cy="376560"/>
           </a:xfrm>
           <a:prstGeom prst="ellipse">
             <a:avLst/>
@@ -13492,7 +13894,7 @@
         <p:spPr>
           <a:xfrm>
             <a:off x="6185880" y="1405800"/>
-            <a:ext cx="376920" cy="376920"/>
+            <a:ext cx="376560" cy="376560"/>
           </a:xfrm>
           <a:prstGeom prst="rect">
             <a:avLst/>
@@ -13553,7 +13955,7 @@
         <p:spPr>
           <a:xfrm>
             <a:off x="6666120" y="1405800"/>
-            <a:ext cx="1762200" cy="205560"/>
+            <a:ext cx="1761840" cy="205200"/>
           </a:xfrm>
           <a:prstGeom prst="rect">
             <a:avLst/>
@@ -13614,7 +14016,7 @@
         <p:spPr>
           <a:xfrm>
             <a:off x="6666120" y="1611720"/>
-            <a:ext cx="1762200" cy="205560"/>
+            <a:ext cx="1761840" cy="205200"/>
           </a:xfrm>
           <a:prstGeom prst="rect">
             <a:avLst/>
@@ -13675,7 +14077,7 @@
         <p:spPr>
           <a:xfrm>
             <a:off x="6185880" y="1920240"/>
-            <a:ext cx="2242080" cy="191520"/>
+            <a:ext cx="2241720" cy="191160"/>
           </a:xfrm>
           <a:prstGeom prst="rect">
             <a:avLst/>
@@ -13736,7 +14138,7 @@
         <p:spPr>
           <a:xfrm>
             <a:off x="6185880" y="2098440"/>
-            <a:ext cx="2242080" cy="479880"/>
+            <a:ext cx="2241720" cy="479520"/>
           </a:xfrm>
           <a:prstGeom prst="rect">
             <a:avLst/>
@@ -13797,7 +14199,7 @@
         <p:spPr>
           <a:xfrm>
             <a:off x="6185880" y="2640240"/>
-            <a:ext cx="2242080" cy="191520"/>
+            <a:ext cx="2241720" cy="191160"/>
           </a:xfrm>
           <a:prstGeom prst="rect">
             <a:avLst/>
@@ -13858,7 +14260,7 @@
         <p:spPr>
           <a:xfrm>
             <a:off x="6185880" y="2818800"/>
-            <a:ext cx="2242080" cy="617040"/>
+            <a:ext cx="2241720" cy="616680"/>
           </a:xfrm>
           <a:prstGeom prst="rect">
             <a:avLst/>
@@ -13919,7 +14321,7 @@
         <p:spPr>
           <a:xfrm>
             <a:off x="6185880" y="3497760"/>
-            <a:ext cx="2242080" cy="191520"/>
+            <a:ext cx="2241720" cy="191160"/>
           </a:xfrm>
           <a:prstGeom prst="rect">
             <a:avLst/>
@@ -13980,7 +14382,7 @@
         <p:spPr>
           <a:xfrm>
             <a:off x="6185880" y="3675960"/>
-            <a:ext cx="2242080" cy="617040"/>
+            <a:ext cx="2241720" cy="616680"/>
           </a:xfrm>
           <a:prstGeom prst="rect">
             <a:avLst/>
@@ -14041,7 +14443,7 @@
         <p:spPr>
           <a:xfrm>
             <a:off x="343080" y="4903560"/>
-            <a:ext cx="8435160" cy="205560"/>
+            <a:ext cx="8434800" cy="205200"/>
           </a:xfrm>
           <a:prstGeom prst="rect">
             <a:avLst/>
@@ -14139,7 +14541,7 @@
         <p:spPr>
           <a:xfrm>
             <a:off x="411480" y="274320"/>
-            <a:ext cx="4114440" cy="239760"/>
+            <a:ext cx="4114080" cy="239400"/>
           </a:xfrm>
           <a:prstGeom prst="rect">
             <a:avLst/>
@@ -14200,7 +14602,7 @@
         <p:spPr>
           <a:xfrm>
             <a:off x="411480" y="514440"/>
-            <a:ext cx="7543440" cy="479880"/>
+            <a:ext cx="7543080" cy="479520"/>
           </a:xfrm>
           <a:prstGeom prst="rect">
             <a:avLst/>
@@ -14261,7 +14663,7 @@
         <p:spPr>
           <a:xfrm>
             <a:off x="788400" y="1405800"/>
-            <a:ext cx="360" cy="3155040"/>
+            <a:ext cx="720" cy="3155400"/>
           </a:xfrm>
           <a:prstGeom prst="straightConnector1">
             <a:avLst/>
@@ -14283,7 +14685,7 @@
         <p:spPr>
           <a:xfrm>
             <a:off x="637920" y="1268640"/>
-            <a:ext cx="301320" cy="301320"/>
+            <a:ext cx="300960" cy="300960"/>
           </a:xfrm>
           <a:prstGeom prst="ellipse">
             <a:avLst/>
@@ -14329,7 +14731,7 @@
         <p:spPr>
           <a:xfrm>
             <a:off x="637920" y="1268640"/>
-            <a:ext cx="301320" cy="301320"/>
+            <a:ext cx="300960" cy="300960"/>
           </a:xfrm>
           <a:prstGeom prst="rect">
             <a:avLst/>
@@ -14390,7 +14792,7 @@
         <p:spPr>
           <a:xfrm>
             <a:off x="1131480" y="1254960"/>
-            <a:ext cx="1096920" cy="205560"/>
+            <a:ext cx="1096560" cy="205200"/>
           </a:xfrm>
           <a:prstGeom prst="rect">
             <a:avLst/>
@@ -14451,7 +14853,7 @@
         <p:spPr>
           <a:xfrm>
             <a:off x="1131480" y="1447200"/>
-            <a:ext cx="7406280" cy="411120"/>
+            <a:ext cx="7405920" cy="410760"/>
           </a:xfrm>
           <a:prstGeom prst="rect">
             <a:avLst/>
@@ -14512,7 +14914,7 @@
         <p:spPr>
           <a:xfrm>
             <a:off x="637920" y="1899720"/>
-            <a:ext cx="301320" cy="301320"/>
+            <a:ext cx="300960" cy="300960"/>
           </a:xfrm>
           <a:prstGeom prst="ellipse">
             <a:avLst/>
@@ -14558,7 +14960,7 @@
         <p:spPr>
           <a:xfrm>
             <a:off x="637920" y="1899720"/>
-            <a:ext cx="301320" cy="301320"/>
+            <a:ext cx="300960" cy="300960"/>
           </a:xfrm>
           <a:prstGeom prst="rect">
             <a:avLst/>
@@ -14619,7 +15021,7 @@
         <p:spPr>
           <a:xfrm>
             <a:off x="1131480" y="1886040"/>
-            <a:ext cx="1096920" cy="205560"/>
+            <a:ext cx="1096560" cy="205200"/>
           </a:xfrm>
           <a:prstGeom prst="rect">
             <a:avLst/>
@@ -14680,7 +15082,7 @@
         <p:spPr>
           <a:xfrm>
             <a:off x="1131480" y="2077920"/>
-            <a:ext cx="7406280" cy="411120"/>
+            <a:ext cx="7405920" cy="410760"/>
           </a:xfrm>
           <a:prstGeom prst="rect">
             <a:avLst/>
@@ -14741,7 +15143,7 @@
         <p:spPr>
           <a:xfrm>
             <a:off x="637920" y="2530440"/>
-            <a:ext cx="301320" cy="301320"/>
+            <a:ext cx="300960" cy="300960"/>
           </a:xfrm>
           <a:prstGeom prst="ellipse">
             <a:avLst/>
@@ -14787,7 +15189,7 @@
         <p:spPr>
           <a:xfrm>
             <a:off x="637920" y="2530440"/>
-            <a:ext cx="301320" cy="301320"/>
+            <a:ext cx="300960" cy="300960"/>
           </a:xfrm>
           <a:prstGeom prst="rect">
             <a:avLst/>
@@ -14848,7 +15250,7 @@
         <p:spPr>
           <a:xfrm>
             <a:off x="1131480" y="2516760"/>
-            <a:ext cx="7406280" cy="514080"/>
+            <a:ext cx="7405920" cy="513720"/>
           </a:xfrm>
           <a:prstGeom prst="rect">
             <a:avLst/>
@@ -14909,7 +15311,7 @@
         <p:spPr>
           <a:xfrm>
             <a:off x="637920" y="3161520"/>
-            <a:ext cx="301320" cy="301320"/>
+            <a:ext cx="300960" cy="300960"/>
           </a:xfrm>
           <a:prstGeom prst="ellipse">
             <a:avLst/>
@@ -14955,7 +15357,7 @@
         <p:spPr>
           <a:xfrm>
             <a:off x="637920" y="3161520"/>
-            <a:ext cx="301320" cy="301320"/>
+            <a:ext cx="300960" cy="300960"/>
           </a:xfrm>
           <a:prstGeom prst="rect">
             <a:avLst/>
@@ -15016,7 +15418,7 @@
         <p:spPr>
           <a:xfrm>
             <a:off x="1131480" y="3147840"/>
-            <a:ext cx="7406280" cy="514080"/>
+            <a:ext cx="7405920" cy="513720"/>
           </a:xfrm>
           <a:prstGeom prst="rect">
             <a:avLst/>
@@ -15077,7 +15479,7 @@
         <p:spPr>
           <a:xfrm>
             <a:off x="637920" y="3792600"/>
-            <a:ext cx="301320" cy="301320"/>
+            <a:ext cx="300960" cy="300960"/>
           </a:xfrm>
           <a:prstGeom prst="ellipse">
             <a:avLst/>
@@ -15123,7 +15525,7 @@
         <p:spPr>
           <a:xfrm>
             <a:off x="637920" y="3792600"/>
-            <a:ext cx="301320" cy="301320"/>
+            <a:ext cx="300960" cy="300960"/>
           </a:xfrm>
           <a:prstGeom prst="rect">
             <a:avLst/>
@@ -15184,7 +15586,7 @@
         <p:spPr>
           <a:xfrm>
             <a:off x="1131480" y="3778920"/>
-            <a:ext cx="7406280" cy="514080"/>
+            <a:ext cx="7405920" cy="513720"/>
           </a:xfrm>
           <a:prstGeom prst="rect">
             <a:avLst/>
@@ -15245,7 +15647,7 @@
         <p:spPr>
           <a:xfrm>
             <a:off x="343080" y="4903560"/>
-            <a:ext cx="8435160" cy="205560"/>
+            <a:ext cx="8434800" cy="205200"/>
           </a:xfrm>
           <a:prstGeom prst="rect">
             <a:avLst/>
@@ -15343,7 +15745,7 @@
         <p:spPr>
           <a:xfrm>
             <a:off x="617400" y="1097280"/>
-            <a:ext cx="7886520" cy="617040"/>
+            <a:ext cx="7886160" cy="616680"/>
           </a:xfrm>
           <a:prstGeom prst="rect">
             <a:avLst/>
@@ -15404,7 +15806,7 @@
         <p:spPr>
           <a:xfrm>
             <a:off x="617400" y="1989000"/>
-            <a:ext cx="342720" cy="342720"/>
+            <a:ext cx="342360" cy="342360"/>
           </a:xfrm>
           <a:prstGeom prst="ellipse">
             <a:avLst/>
@@ -15447,7 +15849,7 @@
         <p:spPr>
           <a:xfrm>
             <a:off x="617400" y="1989000"/>
-            <a:ext cx="342720" cy="342720"/>
+            <a:ext cx="342360" cy="342360"/>
           </a:xfrm>
           <a:prstGeom prst="rect">
             <a:avLst/>
@@ -15508,7 +15910,7 @@
         <p:spPr>
           <a:xfrm>
             <a:off x="1097280" y="1974960"/>
-            <a:ext cx="2742840" cy="342720"/>
+            <a:ext cx="2742480" cy="342360"/>
           </a:xfrm>
           <a:prstGeom prst="rect">
             <a:avLst/>
@@ -15569,7 +15971,7 @@
         <p:spPr>
           <a:xfrm>
             <a:off x="3909240" y="1974960"/>
-            <a:ext cx="4594680" cy="342720"/>
+            <a:ext cx="4594320" cy="342360"/>
           </a:xfrm>
           <a:prstGeom prst="rect">
             <a:avLst/>
@@ -15630,7 +16032,7 @@
         <p:spPr>
           <a:xfrm>
             <a:off x="617400" y="2571840"/>
-            <a:ext cx="342720" cy="342720"/>
+            <a:ext cx="342360" cy="342360"/>
           </a:xfrm>
           <a:prstGeom prst="ellipse">
             <a:avLst/>
@@ -15673,7 +16075,7 @@
         <p:spPr>
           <a:xfrm>
             <a:off x="617400" y="2571840"/>
-            <a:ext cx="342720" cy="342720"/>
+            <a:ext cx="342360" cy="342360"/>
           </a:xfrm>
           <a:prstGeom prst="rect">
             <a:avLst/>
@@ -15734,7 +16136,7 @@
         <p:spPr>
           <a:xfrm>
             <a:off x="1097280" y="2558160"/>
-            <a:ext cx="2742840" cy="342720"/>
+            <a:ext cx="2742480" cy="342360"/>
           </a:xfrm>
           <a:prstGeom prst="rect">
             <a:avLst/>
@@ -15795,7 +16197,7 @@
         <p:spPr>
           <a:xfrm>
             <a:off x="3909240" y="2558160"/>
-            <a:ext cx="4594680" cy="342720"/>
+            <a:ext cx="4594320" cy="342360"/>
           </a:xfrm>
           <a:prstGeom prst="rect">
             <a:avLst/>
@@ -15856,7 +16258,7 @@
         <p:spPr>
           <a:xfrm>
             <a:off x="617400" y="3154680"/>
-            <a:ext cx="342720" cy="342720"/>
+            <a:ext cx="342360" cy="342360"/>
           </a:xfrm>
           <a:prstGeom prst="ellipse">
             <a:avLst/>
@@ -15899,7 +16301,7 @@
         <p:spPr>
           <a:xfrm>
             <a:off x="617400" y="3154680"/>
-            <a:ext cx="342720" cy="342720"/>
+            <a:ext cx="342360" cy="342360"/>
           </a:xfrm>
           <a:prstGeom prst="rect">
             <a:avLst/>
@@ -15960,7 +16362,7 @@
         <p:spPr>
           <a:xfrm>
             <a:off x="1097280" y="3141000"/>
-            <a:ext cx="2742840" cy="342720"/>
+            <a:ext cx="2742480" cy="342360"/>
           </a:xfrm>
           <a:prstGeom prst="rect">
             <a:avLst/>
@@ -16021,7 +16423,7 @@
         <p:spPr>
           <a:xfrm>
             <a:off x="3909240" y="3141000"/>
-            <a:ext cx="4594680" cy="342720"/>
+            <a:ext cx="4594320" cy="342360"/>
           </a:xfrm>
           <a:prstGeom prst="rect">
             <a:avLst/>
@@ -16082,7 +16484,7 @@
         <p:spPr>
           <a:xfrm>
             <a:off x="617040" y="3977640"/>
-            <a:ext cx="1509120" cy="360"/>
+            <a:ext cx="1509480" cy="720"/>
           </a:xfrm>
           <a:prstGeom prst="straightConnector1">
             <a:avLst/>
@@ -16104,7 +16506,7 @@
         <p:spPr>
           <a:xfrm>
             <a:off x="617400" y="4114800"/>
-            <a:ext cx="7543440" cy="411120"/>
+            <a:ext cx="7543080" cy="410760"/>
           </a:xfrm>
           <a:prstGeom prst="rect">
             <a:avLst/>
@@ -16165,7 +16567,7 @@
         <p:spPr>
           <a:xfrm>
             <a:off x="343080" y="4903560"/>
-            <a:ext cx="8435160" cy="205560"/>
+            <a:ext cx="8434800" cy="205200"/>
           </a:xfrm>
           <a:prstGeom prst="rect">
             <a:avLst/>
@@ -16263,7 +16665,7 @@
         <p:spPr>
           <a:xfrm>
             <a:off x="411480" y="274320"/>
-            <a:ext cx="4114440" cy="239760"/>
+            <a:ext cx="4114080" cy="239400"/>
           </a:xfrm>
           <a:prstGeom prst="rect">
             <a:avLst/>
@@ -16324,7 +16726,7 @@
         <p:spPr>
           <a:xfrm>
             <a:off x="411480" y="514440"/>
-            <a:ext cx="7543440" cy="479880"/>
+            <a:ext cx="7543080" cy="479520"/>
           </a:xfrm>
           <a:prstGeom prst="rect">
             <a:avLst/>
@@ -16385,7 +16787,7 @@
         <p:spPr>
           <a:xfrm>
             <a:off x="411480" y="960120"/>
-            <a:ext cx="7543440" cy="273960"/>
+            <a:ext cx="7543080" cy="273600"/>
           </a:xfrm>
           <a:prstGeom prst="rect">
             <a:avLst/>
@@ -16446,7 +16848,7 @@
         <p:spPr>
           <a:xfrm>
             <a:off x="411480" y="1440360"/>
-            <a:ext cx="3977280" cy="3085920"/>
+            <a:ext cx="3976920" cy="3085560"/>
           </a:xfrm>
           <a:prstGeom prst="roundRect">
             <a:avLst>
@@ -16501,7 +16903,7 @@
         <p:spPr>
           <a:xfrm>
             <a:off x="651600" y="1611720"/>
-            <a:ext cx="3497400" cy="273960"/>
+            <a:ext cx="3497040" cy="273600"/>
           </a:xfrm>
           <a:prstGeom prst="rect">
             <a:avLst/>
@@ -16562,7 +16964,7 @@
         <p:spPr>
           <a:xfrm>
             <a:off x="651600" y="1954440"/>
-            <a:ext cx="3497400" cy="2400120"/>
+            <a:ext cx="3497040" cy="2399760"/>
           </a:xfrm>
           <a:prstGeom prst="rect">
             <a:avLst/>
@@ -16719,7 +17121,7 @@
         <p:spPr>
           <a:xfrm>
             <a:off x="4595040" y="1440360"/>
-            <a:ext cx="3977280" cy="3085920"/>
+            <a:ext cx="3976920" cy="3085560"/>
           </a:xfrm>
           <a:prstGeom prst="roundRect">
             <a:avLst>
@@ -16771,7 +17173,7 @@
         <p:spPr>
           <a:xfrm>
             <a:off x="4834800" y="1611720"/>
-            <a:ext cx="3497400" cy="273960"/>
+            <a:ext cx="3497040" cy="273600"/>
           </a:xfrm>
           <a:prstGeom prst="rect">
             <a:avLst/>
@@ -16832,7 +17234,7 @@
         <p:spPr>
           <a:xfrm>
             <a:off x="4834800" y="1954440"/>
-            <a:ext cx="3497400" cy="2400120"/>
+            <a:ext cx="3497040" cy="2399760"/>
           </a:xfrm>
           <a:prstGeom prst="rect">
             <a:avLst/>
@@ -17001,7 +17403,7 @@
         <p:spPr>
           <a:xfrm>
             <a:off x="343080" y="4903560"/>
-            <a:ext cx="8435160" cy="205560"/>
+            <a:ext cx="8434800" cy="205200"/>
           </a:xfrm>
           <a:prstGeom prst="rect">
             <a:avLst/>
@@ -17099,7 +17501,7 @@
         <p:spPr>
           <a:xfrm>
             <a:off x="411480" y="274320"/>
-            <a:ext cx="4114440" cy="239760"/>
+            <a:ext cx="4114080" cy="239400"/>
           </a:xfrm>
           <a:prstGeom prst="rect">
             <a:avLst/>
@@ -17160,7 +17562,7 @@
         <p:spPr>
           <a:xfrm>
             <a:off x="411480" y="514440"/>
-            <a:ext cx="7543440" cy="479880"/>
+            <a:ext cx="7543080" cy="479520"/>
           </a:xfrm>
           <a:prstGeom prst="rect">
             <a:avLst/>
@@ -17221,7 +17623,7 @@
         <p:spPr>
           <a:xfrm>
             <a:off x="411480" y="960120"/>
-            <a:ext cx="7543440" cy="273960"/>
+            <a:ext cx="7543080" cy="273600"/>
           </a:xfrm>
           <a:prstGeom prst="rect">
             <a:avLst/>
@@ -17282,7 +17684,7 @@
         <p:spPr>
           <a:xfrm>
             <a:off x="411480" y="1474560"/>
-            <a:ext cx="445320" cy="445320"/>
+            <a:ext cx="444960" cy="444960"/>
           </a:xfrm>
           <a:prstGeom prst="ellipse">
             <a:avLst/>
@@ -17325,7 +17727,7 @@
         <p:spPr>
           <a:xfrm>
             <a:off x="411480" y="1474560"/>
-            <a:ext cx="445320" cy="445320"/>
+            <a:ext cx="444960" cy="444960"/>
           </a:xfrm>
           <a:prstGeom prst="rect">
             <a:avLst/>
@@ -17386,7 +17788,7 @@
         <p:spPr>
           <a:xfrm>
             <a:off x="1028880" y="1454040"/>
-            <a:ext cx="7131960" cy="273960"/>
+            <a:ext cx="7131600" cy="273600"/>
           </a:xfrm>
           <a:prstGeom prst="rect">
             <a:avLst/>
@@ -17447,7 +17849,7 @@
         <p:spPr>
           <a:xfrm>
             <a:off x="1028880" y="1735200"/>
-            <a:ext cx="7131960" cy="514080"/>
+            <a:ext cx="7131600" cy="513720"/>
           </a:xfrm>
           <a:prstGeom prst="rect">
             <a:avLst/>
@@ -17547,7 +17949,7 @@
         <p:spPr>
           <a:xfrm>
             <a:off x="411480" y="2537640"/>
-            <a:ext cx="445320" cy="445320"/>
+            <a:ext cx="444960" cy="444960"/>
           </a:xfrm>
           <a:prstGeom prst="ellipse">
             <a:avLst/>
@@ -17590,7 +17992,7 @@
         <p:spPr>
           <a:xfrm>
             <a:off x="411480" y="2537640"/>
-            <a:ext cx="445320" cy="445320"/>
+            <a:ext cx="444960" cy="444960"/>
           </a:xfrm>
           <a:prstGeom prst="rect">
             <a:avLst/>
@@ -17651,7 +18053,7 @@
         <p:spPr>
           <a:xfrm>
             <a:off x="1028880" y="2516760"/>
-            <a:ext cx="7131960" cy="273960"/>
+            <a:ext cx="7131600" cy="273600"/>
           </a:xfrm>
           <a:prstGeom prst="rect">
             <a:avLst/>
@@ -17712,7 +18114,7 @@
         <p:spPr>
           <a:xfrm>
             <a:off x="1028880" y="2797920"/>
-            <a:ext cx="7543440" cy="514080"/>
+            <a:ext cx="7543080" cy="513720"/>
           </a:xfrm>
           <a:prstGeom prst="rect">
             <a:avLst/>
@@ -17812,7 +18214,7 @@
         <p:spPr>
           <a:xfrm>
             <a:off x="411480" y="3600360"/>
-            <a:ext cx="445320" cy="445320"/>
+            <a:ext cx="444960" cy="444960"/>
           </a:xfrm>
           <a:prstGeom prst="ellipse">
             <a:avLst/>
@@ -17855,7 +18257,7 @@
         <p:spPr>
           <a:xfrm>
             <a:off x="411480" y="3600360"/>
-            <a:ext cx="445320" cy="445320"/>
+            <a:ext cx="444960" cy="444960"/>
           </a:xfrm>
           <a:prstGeom prst="rect">
             <a:avLst/>
@@ -17916,7 +18318,7 @@
         <p:spPr>
           <a:xfrm>
             <a:off x="1028880" y="3579840"/>
-            <a:ext cx="7131960" cy="273960"/>
+            <a:ext cx="7131600" cy="273600"/>
           </a:xfrm>
           <a:prstGeom prst="rect">
             <a:avLst/>
@@ -17977,7 +18379,7 @@
         <p:spPr>
           <a:xfrm>
             <a:off x="1028880" y="3861000"/>
-            <a:ext cx="7131960" cy="514080"/>
+            <a:ext cx="7131600" cy="513720"/>
           </a:xfrm>
           <a:prstGeom prst="rect">
             <a:avLst/>
@@ -18077,7 +18479,7 @@
         <p:spPr>
           <a:xfrm>
             <a:off x="343080" y="4903560"/>
-            <a:ext cx="8435160" cy="205560"/>
+            <a:ext cx="8434800" cy="205200"/>
           </a:xfrm>
           <a:prstGeom prst="rect">
             <a:avLst/>
@@ -18175,7 +18577,7 @@
         <p:spPr>
           <a:xfrm>
             <a:off x="411480" y="274320"/>
-            <a:ext cx="4114440" cy="239760"/>
+            <a:ext cx="4114080" cy="239400"/>
           </a:xfrm>
           <a:prstGeom prst="rect">
             <a:avLst/>
@@ -18236,7 +18638,7 @@
         <p:spPr>
           <a:xfrm>
             <a:off x="411480" y="514440"/>
-            <a:ext cx="7886520" cy="479880"/>
+            <a:ext cx="7886160" cy="479520"/>
           </a:xfrm>
           <a:prstGeom prst="rect">
             <a:avLst/>
@@ -18297,7 +18699,7 @@
         <p:spPr>
           <a:xfrm>
             <a:off x="411480" y="960120"/>
-            <a:ext cx="7543440" cy="273960"/>
+            <a:ext cx="7543080" cy="273600"/>
           </a:xfrm>
           <a:prstGeom prst="rect">
             <a:avLst/>
@@ -18358,7 +18760,7 @@
         <p:spPr>
           <a:xfrm>
             <a:off x="411480" y="1440360"/>
-            <a:ext cx="3977280" cy="3085920"/>
+            <a:ext cx="3976920" cy="3085560"/>
           </a:xfrm>
           <a:prstGeom prst="roundRect">
             <a:avLst>
@@ -18413,7 +18815,7 @@
         <p:spPr>
           <a:xfrm>
             <a:off x="651600" y="1611720"/>
-            <a:ext cx="3497400" cy="273960"/>
+            <a:ext cx="3497040" cy="273600"/>
           </a:xfrm>
           <a:prstGeom prst="rect">
             <a:avLst/>
@@ -18474,7 +18876,7 @@
         <p:spPr>
           <a:xfrm>
             <a:off x="651600" y="1954440"/>
-            <a:ext cx="3497400" cy="2400120"/>
+            <a:ext cx="3497040" cy="2399760"/>
           </a:xfrm>
           <a:prstGeom prst="rect">
             <a:avLst/>
@@ -18643,7 +19045,7 @@
         <p:spPr>
           <a:xfrm>
             <a:off x="4595040" y="1440360"/>
-            <a:ext cx="3977280" cy="3085920"/>
+            <a:ext cx="3976920" cy="3085560"/>
           </a:xfrm>
           <a:prstGeom prst="roundRect">
             <a:avLst>
@@ -18695,7 +19097,7 @@
         <p:spPr>
           <a:xfrm>
             <a:off x="4834800" y="1611720"/>
-            <a:ext cx="3497400" cy="273960"/>
+            <a:ext cx="3497040" cy="273600"/>
           </a:xfrm>
           <a:prstGeom prst="rect">
             <a:avLst/>
@@ -18756,7 +19158,7 @@
         <p:spPr>
           <a:xfrm>
             <a:off x="4834800" y="1954440"/>
-            <a:ext cx="3497400" cy="2400120"/>
+            <a:ext cx="3497040" cy="2399760"/>
           </a:xfrm>
           <a:prstGeom prst="rect">
             <a:avLst/>
@@ -18951,7 +19353,7 @@
         <p:spPr>
           <a:xfrm>
             <a:off x="343080" y="4903560"/>
-            <a:ext cx="8435160" cy="205560"/>
+            <a:ext cx="8434800" cy="205200"/>
           </a:xfrm>
           <a:prstGeom prst="rect">
             <a:avLst/>
@@ -19049,7 +19451,7 @@
         <p:spPr>
           <a:xfrm>
             <a:off x="411480" y="274320"/>
-            <a:ext cx="4114440" cy="239760"/>
+            <a:ext cx="4114080" cy="239400"/>
           </a:xfrm>
           <a:prstGeom prst="rect">
             <a:avLst/>
@@ -19110,7 +19512,7 @@
         <p:spPr>
           <a:xfrm>
             <a:off x="411480" y="514440"/>
-            <a:ext cx="7543440" cy="479880"/>
+            <a:ext cx="7543080" cy="479520"/>
           </a:xfrm>
           <a:prstGeom prst="rect">
             <a:avLst/>
@@ -19171,7 +19573,7 @@
         <p:spPr>
           <a:xfrm>
             <a:off x="411480" y="960120"/>
-            <a:ext cx="7543440" cy="273960"/>
+            <a:ext cx="7543080" cy="273600"/>
           </a:xfrm>
           <a:prstGeom prst="rect">
             <a:avLst/>
@@ -19232,7 +19634,7 @@
         <p:spPr>
           <a:xfrm>
             <a:off x="411480" y="1577520"/>
-            <a:ext cx="2653560" cy="2537280"/>
+            <a:ext cx="2653200" cy="2536920"/>
           </a:xfrm>
           <a:prstGeom prst="roundRect">
             <a:avLst>
@@ -19287,7 +19689,7 @@
         <p:spPr>
           <a:xfrm>
             <a:off x="617400" y="1783080"/>
-            <a:ext cx="411120" cy="411120"/>
+            <a:ext cx="410760" cy="410760"/>
           </a:xfrm>
           <a:prstGeom prst="ellipse">
             <a:avLst/>
@@ -19330,7 +19732,7 @@
         <p:spPr>
           <a:xfrm>
             <a:off x="617400" y="1783080"/>
-            <a:ext cx="411120" cy="411120"/>
+            <a:ext cx="410760" cy="410760"/>
           </a:xfrm>
           <a:prstGeom prst="rect">
             <a:avLst/>
@@ -19391,7 +19793,7 @@
         <p:spPr>
           <a:xfrm>
             <a:off x="617400" y="2297520"/>
-            <a:ext cx="2242080" cy="308160"/>
+            <a:ext cx="2241720" cy="307800"/>
           </a:xfrm>
           <a:prstGeom prst="rect">
             <a:avLst/>
@@ -19452,7 +19854,7 @@
         <p:spPr>
           <a:xfrm>
             <a:off x="617400" y="2640240"/>
-            <a:ext cx="2242080" cy="1371240"/>
+            <a:ext cx="2241720" cy="1370880"/>
           </a:xfrm>
           <a:prstGeom prst="rect">
             <a:avLst/>
@@ -19513,7 +19915,7 @@
         <p:spPr>
           <a:xfrm>
             <a:off x="3195720" y="1577520"/>
-            <a:ext cx="2653560" cy="2537280"/>
+            <a:ext cx="2653200" cy="2536920"/>
           </a:xfrm>
           <a:prstGeom prst="roundRect">
             <a:avLst>
@@ -19568,7 +19970,7 @@
         <p:spPr>
           <a:xfrm>
             <a:off x="3401640" y="1783080"/>
-            <a:ext cx="411120" cy="411120"/>
+            <a:ext cx="410760" cy="410760"/>
           </a:xfrm>
           <a:prstGeom prst="ellipse">
             <a:avLst/>
@@ -19611,7 +20013,7 @@
         <p:spPr>
           <a:xfrm>
             <a:off x="3401640" y="1783080"/>
-            <a:ext cx="411120" cy="411120"/>
+            <a:ext cx="410760" cy="410760"/>
           </a:xfrm>
           <a:prstGeom prst="rect">
             <a:avLst/>
@@ -19672,7 +20074,7 @@
         <p:spPr>
           <a:xfrm>
             <a:off x="3401640" y="2297520"/>
-            <a:ext cx="2242080" cy="308160"/>
+            <a:ext cx="2241720" cy="307800"/>
           </a:xfrm>
           <a:prstGeom prst="rect">
             <a:avLst/>
@@ -19733,7 +20135,7 @@
         <p:spPr>
           <a:xfrm>
             <a:off x="3401640" y="2640240"/>
-            <a:ext cx="2242080" cy="1371240"/>
+            <a:ext cx="2241720" cy="1370880"/>
           </a:xfrm>
           <a:prstGeom prst="rect">
             <a:avLst/>
@@ -19794,7 +20196,7 @@
         <p:spPr>
           <a:xfrm>
             <a:off x="5980320" y="1577520"/>
-            <a:ext cx="2653560" cy="2537280"/>
+            <a:ext cx="2653200" cy="2536920"/>
           </a:xfrm>
           <a:prstGeom prst="roundRect">
             <a:avLst>
@@ -19849,7 +20251,7 @@
         <p:spPr>
           <a:xfrm>
             <a:off x="6185880" y="1783080"/>
-            <a:ext cx="411120" cy="411120"/>
+            <a:ext cx="410760" cy="410760"/>
           </a:xfrm>
           <a:prstGeom prst="ellipse">
             <a:avLst/>
@@ -19892,7 +20294,7 @@
         <p:spPr>
           <a:xfrm>
             <a:off x="6185880" y="1783080"/>
-            <a:ext cx="411120" cy="411120"/>
+            <a:ext cx="410760" cy="410760"/>
           </a:xfrm>
           <a:prstGeom prst="rect">
             <a:avLst/>
@@ -19953,7 +20355,7 @@
         <p:spPr>
           <a:xfrm>
             <a:off x="6185880" y="2297520"/>
-            <a:ext cx="2242080" cy="308160"/>
+            <a:ext cx="2241720" cy="307800"/>
           </a:xfrm>
           <a:prstGeom prst="rect">
             <a:avLst/>
@@ -20014,7 +20416,7 @@
         <p:spPr>
           <a:xfrm>
             <a:off x="6185880" y="2640240"/>
-            <a:ext cx="2242080" cy="1371240"/>
+            <a:ext cx="2241720" cy="1370880"/>
           </a:xfrm>
           <a:prstGeom prst="rect">
             <a:avLst/>
@@ -20075,7 +20477,7 @@
         <p:spPr>
           <a:xfrm>
             <a:off x="411480" y="4251960"/>
-            <a:ext cx="8298000" cy="514080"/>
+            <a:ext cx="8297640" cy="513720"/>
           </a:xfrm>
           <a:prstGeom prst="roundRect">
             <a:avLst>
@@ -20120,7 +20522,7 @@
         <p:spPr>
           <a:xfrm>
             <a:off x="617400" y="4251960"/>
-            <a:ext cx="7886520" cy="514080"/>
+            <a:ext cx="7886160" cy="513720"/>
           </a:xfrm>
           <a:prstGeom prst="rect">
             <a:avLst/>
@@ -20181,7 +20583,7 @@
         <p:spPr>
           <a:xfrm>
             <a:off x="343080" y="4903560"/>
-            <a:ext cx="8435160" cy="205560"/>
+            <a:ext cx="8434800" cy="205200"/>
           </a:xfrm>
           <a:prstGeom prst="rect">
             <a:avLst/>
@@ -20279,7 +20681,7 @@
         <p:spPr>
           <a:xfrm>
             <a:off x="411480" y="274320"/>
-            <a:ext cx="4114440" cy="239760"/>
+            <a:ext cx="4114080" cy="239400"/>
           </a:xfrm>
           <a:prstGeom prst="rect">
             <a:avLst/>
@@ -20340,7 +20742,7 @@
         <p:spPr>
           <a:xfrm>
             <a:off x="411480" y="514440"/>
-            <a:ext cx="7543440" cy="479880"/>
+            <a:ext cx="7543080" cy="479520"/>
           </a:xfrm>
           <a:prstGeom prst="rect">
             <a:avLst/>
@@ -20401,7 +20803,7 @@
         <p:spPr>
           <a:xfrm>
             <a:off x="411480" y="960120"/>
-            <a:ext cx="7543440" cy="273960"/>
+            <a:ext cx="7543080" cy="273600"/>
           </a:xfrm>
           <a:prstGeom prst="rect">
             <a:avLst/>
@@ -20462,7 +20864,7 @@
         <p:spPr>
           <a:xfrm>
             <a:off x="411480" y="1440360"/>
-            <a:ext cx="3977280" cy="3085920"/>
+            <a:ext cx="3976920" cy="3085560"/>
           </a:xfrm>
           <a:prstGeom prst="roundRect">
             <a:avLst>
@@ -20517,7 +20919,7 @@
         <p:spPr>
           <a:xfrm>
             <a:off x="651600" y="1611720"/>
-            <a:ext cx="3497400" cy="273960"/>
+            <a:ext cx="3497040" cy="273600"/>
           </a:xfrm>
           <a:prstGeom prst="rect">
             <a:avLst/>
@@ -20578,7 +20980,7 @@
         <p:spPr>
           <a:xfrm>
             <a:off x="651600" y="1954440"/>
-            <a:ext cx="3497400" cy="2400120"/>
+            <a:ext cx="3497040" cy="2399760"/>
           </a:xfrm>
           <a:prstGeom prst="rect">
             <a:avLst/>
@@ -20747,7 +21149,7 @@
         <p:spPr>
           <a:xfrm>
             <a:off x="4595040" y="1440360"/>
-            <a:ext cx="3977280" cy="3085920"/>
+            <a:ext cx="3976920" cy="3085560"/>
           </a:xfrm>
           <a:prstGeom prst="roundRect">
             <a:avLst>
@@ -20799,7 +21201,7 @@
         <p:spPr>
           <a:xfrm>
             <a:off x="4834800" y="1611720"/>
-            <a:ext cx="3497400" cy="273960"/>
+            <a:ext cx="3497040" cy="273600"/>
           </a:xfrm>
           <a:prstGeom prst="rect">
             <a:avLst/>
@@ -20860,7 +21262,7 @@
         <p:spPr>
           <a:xfrm>
             <a:off x="4834800" y="1954440"/>
-            <a:ext cx="3497400" cy="2400120"/>
+            <a:ext cx="3497040" cy="2399760"/>
           </a:xfrm>
           <a:prstGeom prst="rect">
             <a:avLst/>
@@ -21029,7 +21431,7 @@
         <p:spPr>
           <a:xfrm>
             <a:off x="343080" y="4903560"/>
-            <a:ext cx="8435160" cy="205560"/>
+            <a:ext cx="8434800" cy="205200"/>
           </a:xfrm>
           <a:prstGeom prst="rect">
             <a:avLst/>
@@ -21127,7 +21529,7 @@
         <p:spPr>
           <a:xfrm>
             <a:off x="411480" y="274320"/>
-            <a:ext cx="4114440" cy="239760"/>
+            <a:ext cx="4114080" cy="239400"/>
           </a:xfrm>
           <a:prstGeom prst="rect">
             <a:avLst/>
@@ -21188,7 +21590,7 @@
         <p:spPr>
           <a:xfrm>
             <a:off x="411480" y="514440"/>
-            <a:ext cx="7886520" cy="479880"/>
+            <a:ext cx="7886160" cy="479520"/>
           </a:xfrm>
           <a:prstGeom prst="rect">
             <a:avLst/>
@@ -21249,7 +21651,7 @@
         <p:spPr>
           <a:xfrm>
             <a:off x="411480" y="1200240"/>
-            <a:ext cx="411120" cy="411120"/>
+            <a:ext cx="410760" cy="410760"/>
           </a:xfrm>
           <a:prstGeom prst="ellipse">
             <a:avLst/>
@@ -21292,7 +21694,7 @@
         <p:spPr>
           <a:xfrm>
             <a:off x="411480" y="1200240"/>
-            <a:ext cx="411120" cy="411120"/>
+            <a:ext cx="410760" cy="410760"/>
           </a:xfrm>
           <a:prstGeom prst="rect">
             <a:avLst/>
@@ -21353,7 +21755,7 @@
         <p:spPr>
           <a:xfrm>
             <a:off x="994320" y="1179720"/>
-            <a:ext cx="7200720" cy="273960"/>
+            <a:ext cx="7200360" cy="273600"/>
           </a:xfrm>
           <a:prstGeom prst="rect">
             <a:avLst/>
@@ -21414,7 +21816,7 @@
         <p:spPr>
           <a:xfrm>
             <a:off x="994320" y="1454040"/>
-            <a:ext cx="7200720" cy="582480"/>
+            <a:ext cx="7200360" cy="582120"/>
           </a:xfrm>
           <a:prstGeom prst="rect">
             <a:avLst/>
@@ -21514,7 +21916,7 @@
         <p:spPr>
           <a:xfrm>
             <a:off x="411480" y="2352240"/>
-            <a:ext cx="411120" cy="411120"/>
+            <a:ext cx="410760" cy="410760"/>
           </a:xfrm>
           <a:prstGeom prst="ellipse">
             <a:avLst/>
@@ -21557,7 +21959,7 @@
         <p:spPr>
           <a:xfrm>
             <a:off x="411480" y="2352240"/>
-            <a:ext cx="411120" cy="411120"/>
+            <a:ext cx="410760" cy="410760"/>
           </a:xfrm>
           <a:prstGeom prst="rect">
             <a:avLst/>
@@ -21618,7 +22020,7 @@
         <p:spPr>
           <a:xfrm>
             <a:off x="994320" y="2331720"/>
-            <a:ext cx="7200720" cy="273960"/>
+            <a:ext cx="7200360" cy="273600"/>
           </a:xfrm>
           <a:prstGeom prst="rect">
             <a:avLst/>
@@ -21679,7 +22081,7 @@
         <p:spPr>
           <a:xfrm>
             <a:off x="994320" y="2606040"/>
-            <a:ext cx="7200720" cy="582480"/>
+            <a:ext cx="7200360" cy="582120"/>
           </a:xfrm>
           <a:prstGeom prst="rect">
             <a:avLst/>
@@ -21779,7 +22181,7 @@
         <p:spPr>
           <a:xfrm>
             <a:off x="411480" y="3504600"/>
-            <a:ext cx="411120" cy="411120"/>
+            <a:ext cx="410760" cy="410760"/>
           </a:xfrm>
           <a:prstGeom prst="ellipse">
             <a:avLst/>
@@ -21822,7 +22224,7 @@
         <p:spPr>
           <a:xfrm>
             <a:off x="411480" y="3504600"/>
-            <a:ext cx="411120" cy="411120"/>
+            <a:ext cx="410760" cy="410760"/>
           </a:xfrm>
           <a:prstGeom prst="rect">
             <a:avLst/>
@@ -21883,7 +22285,7 @@
         <p:spPr>
           <a:xfrm>
             <a:off x="994320" y="3483720"/>
-            <a:ext cx="7200720" cy="273960"/>
+            <a:ext cx="7200360" cy="273600"/>
           </a:xfrm>
           <a:prstGeom prst="rect">
             <a:avLst/>
@@ -21944,7 +22346,7 @@
         <p:spPr>
           <a:xfrm>
             <a:off x="994320" y="3758040"/>
-            <a:ext cx="7200720" cy="582480"/>
+            <a:ext cx="7200360" cy="582120"/>
           </a:xfrm>
           <a:prstGeom prst="rect">
             <a:avLst/>
@@ -22044,7 +22446,7 @@
         <p:spPr>
           <a:xfrm>
             <a:off x="411480" y="4697640"/>
-            <a:ext cx="8298000" cy="239760"/>
+            <a:ext cx="8297640" cy="239400"/>
           </a:xfrm>
           <a:prstGeom prst="rect">
             <a:avLst/>
@@ -22105,7 +22507,7 @@
         <p:spPr>
           <a:xfrm>
             <a:off x="343080" y="4903560"/>
-            <a:ext cx="8435160" cy="205560"/>
+            <a:ext cx="8434800" cy="205200"/>
           </a:xfrm>
           <a:prstGeom prst="rect">
             <a:avLst/>
@@ -22203,7 +22605,7 @@
         <p:spPr>
           <a:xfrm>
             <a:off x="411480" y="274320"/>
-            <a:ext cx="4114440" cy="239760"/>
+            <a:ext cx="4114080" cy="239400"/>
           </a:xfrm>
           <a:prstGeom prst="rect">
             <a:avLst/>
@@ -22264,7 +22666,7 @@
         <p:spPr>
           <a:xfrm>
             <a:off x="411480" y="514440"/>
-            <a:ext cx="7886520" cy="479880"/>
+            <a:ext cx="7886160" cy="479520"/>
           </a:xfrm>
           <a:prstGeom prst="rect">
             <a:avLst/>
@@ -22325,7 +22727,7 @@
         <p:spPr>
           <a:xfrm>
             <a:off x="411480" y="960120"/>
-            <a:ext cx="7543440" cy="273960"/>
+            <a:ext cx="7543080" cy="273600"/>
           </a:xfrm>
           <a:prstGeom prst="rect">
             <a:avLst/>
@@ -22386,7 +22788,7 @@
         <p:spPr>
           <a:xfrm>
             <a:off x="411480" y="1474560"/>
-            <a:ext cx="3840120" cy="1440000"/>
+            <a:ext cx="3839760" cy="1439640"/>
           </a:xfrm>
           <a:prstGeom prst="roundRect">
             <a:avLst>
@@ -22431,7 +22833,7 @@
         <p:spPr>
           <a:xfrm>
             <a:off x="411480" y="1542960"/>
-            <a:ext cx="3840120" cy="754200"/>
+            <a:ext cx="3839760" cy="753840"/>
           </a:xfrm>
           <a:prstGeom prst="rect">
             <a:avLst/>
@@ -22492,7 +22894,7 @@
         <p:spPr>
           <a:xfrm>
             <a:off x="617400" y="2297520"/>
-            <a:ext cx="3428640" cy="548280"/>
+            <a:ext cx="3428280" cy="547920"/>
           </a:xfrm>
           <a:prstGeom prst="rect">
             <a:avLst/>
@@ -22553,7 +22955,7 @@
         <p:spPr>
           <a:xfrm>
             <a:off x="4457880" y="1474560"/>
-            <a:ext cx="2022840" cy="1440000"/>
+            <a:ext cx="2022480" cy="1439640"/>
           </a:xfrm>
           <a:prstGeom prst="roundRect">
             <a:avLst>
@@ -22598,7 +23000,7 @@
         <p:spPr>
           <a:xfrm>
             <a:off x="4457880" y="1577520"/>
-            <a:ext cx="2022840" cy="582480"/>
+            <a:ext cx="2022480" cy="582120"/>
           </a:xfrm>
           <a:prstGeom prst="rect">
             <a:avLst/>
@@ -22659,7 +23061,7 @@
         <p:spPr>
           <a:xfrm>
             <a:off x="4560480" y="2160360"/>
-            <a:ext cx="1816920" cy="651240"/>
+            <a:ext cx="1816560" cy="650880"/>
           </a:xfrm>
           <a:prstGeom prst="rect">
             <a:avLst/>
@@ -22720,7 +23122,7 @@
         <p:spPr>
           <a:xfrm>
             <a:off x="6604200" y="1474560"/>
-            <a:ext cx="2022840" cy="1440000"/>
+            <a:ext cx="2022480" cy="1439640"/>
           </a:xfrm>
           <a:prstGeom prst="roundRect">
             <a:avLst>
@@ -22765,7 +23167,7 @@
         <p:spPr>
           <a:xfrm>
             <a:off x="6604200" y="1577520"/>
-            <a:ext cx="2022840" cy="582480"/>
+            <a:ext cx="2022480" cy="582120"/>
           </a:xfrm>
           <a:prstGeom prst="rect">
             <a:avLst/>
@@ -22826,7 +23228,7 @@
         <p:spPr>
           <a:xfrm>
             <a:off x="6707160" y="2160360"/>
-            <a:ext cx="1816920" cy="651240"/>
+            <a:ext cx="1816560" cy="650880"/>
           </a:xfrm>
           <a:prstGeom prst="rect">
             <a:avLst/>
@@ -22902,7 +23304,7 @@
         <p:spPr>
           <a:xfrm>
             <a:off x="4457880" y="3051720"/>
-            <a:ext cx="2022840" cy="1440000"/>
+            <a:ext cx="2022480" cy="1439640"/>
           </a:xfrm>
           <a:prstGeom prst="roundRect">
             <a:avLst>
@@ -22947,7 +23349,7 @@
         <p:spPr>
           <a:xfrm>
             <a:off x="4457880" y="3154680"/>
-            <a:ext cx="2022840" cy="582480"/>
+            <a:ext cx="2022480" cy="582120"/>
           </a:xfrm>
           <a:prstGeom prst="rect">
             <a:avLst/>
@@ -23008,7 +23410,7 @@
         <p:spPr>
           <a:xfrm>
             <a:off x="4560480" y="3737520"/>
-            <a:ext cx="1816920" cy="651240"/>
+            <a:ext cx="1816560" cy="650880"/>
           </a:xfrm>
           <a:prstGeom prst="rect">
             <a:avLst/>
@@ -23069,7 +23471,7 @@
         <p:spPr>
           <a:xfrm>
             <a:off x="6604200" y="3051720"/>
-            <a:ext cx="2022840" cy="1440000"/>
+            <a:ext cx="2022480" cy="1439640"/>
           </a:xfrm>
           <a:prstGeom prst="roundRect">
             <a:avLst>
@@ -23114,7 +23516,7 @@
         <p:spPr>
           <a:xfrm>
             <a:off x="6604200" y="3154680"/>
-            <a:ext cx="2022840" cy="582480"/>
+            <a:ext cx="2022480" cy="582120"/>
           </a:xfrm>
           <a:prstGeom prst="rect">
             <a:avLst/>
@@ -23175,7 +23577,7 @@
         <p:spPr>
           <a:xfrm>
             <a:off x="6707160" y="3737520"/>
-            <a:ext cx="1816920" cy="651240"/>
+            <a:ext cx="1816560" cy="650880"/>
           </a:xfrm>
           <a:prstGeom prst="rect">
             <a:avLst/>
@@ -23236,7 +23638,7 @@
         <p:spPr>
           <a:xfrm>
             <a:off x="411480" y="4595040"/>
-            <a:ext cx="8298000" cy="273960"/>
+            <a:ext cx="8297640" cy="273600"/>
           </a:xfrm>
           <a:prstGeom prst="rect">
             <a:avLst/>
@@ -23297,7 +23699,7 @@
         <p:spPr>
           <a:xfrm>
             <a:off x="343080" y="4903560"/>
-            <a:ext cx="8435160" cy="205560"/>
+            <a:ext cx="8434800" cy="205200"/>
           </a:xfrm>
           <a:prstGeom prst="rect">
             <a:avLst/>
@@ -23395,7 +23797,7 @@
         <p:spPr>
           <a:xfrm>
             <a:off x="411480" y="274320"/>
-            <a:ext cx="4114440" cy="239760"/>
+            <a:ext cx="4114080" cy="239400"/>
           </a:xfrm>
           <a:prstGeom prst="rect">
             <a:avLst/>
@@ -23456,7 +23858,7 @@
         <p:spPr>
           <a:xfrm>
             <a:off x="411480" y="514440"/>
-            <a:ext cx="8229240" cy="479880"/>
+            <a:ext cx="8228880" cy="479520"/>
           </a:xfrm>
           <a:prstGeom prst="rect">
             <a:avLst/>
@@ -23516,7 +23918,7 @@
         </p:nvGraphicFramePr>
         <p:xfrm>
           <a:off x="411480" y="1166040"/>
-          <a:ext cx="8297640" cy="2057040"/>
+          <a:ext cx="8296560" cy="2056320"/>
         </p:xfrm>
         <a:graphic>
           <a:graphicData uri="http://schemas.openxmlformats.org/drawingml/2006/table">
@@ -25534,7 +25936,7 @@
         <p:spPr>
           <a:xfrm>
             <a:off x="411480" y="3497760"/>
-            <a:ext cx="8298000" cy="959760"/>
+            <a:ext cx="8297640" cy="959400"/>
           </a:xfrm>
           <a:prstGeom prst="roundRect">
             <a:avLst>
@@ -25579,7 +25981,7 @@
         <p:spPr>
           <a:xfrm>
             <a:off x="651600" y="3497760"/>
-            <a:ext cx="7817760" cy="959760"/>
+            <a:ext cx="7817400" cy="959400"/>
           </a:xfrm>
           <a:prstGeom prst="rect">
             <a:avLst/>
@@ -25640,7 +26042,7 @@
         <p:spPr>
           <a:xfrm>
             <a:off x="343080" y="4903560"/>
-            <a:ext cx="8435160" cy="205560"/>
+            <a:ext cx="8434800" cy="205200"/>
           </a:xfrm>
           <a:prstGeom prst="rect">
             <a:avLst/>
